--- a/docs/Презентация_Лазарев_ВКР.pptx
+++ b/docs/Презентация_Лазарев_ВКР.pptx
@@ -17,6 +17,7 @@
     <p:sldId id="265" r:id="rId16"/>
     <p:sldId id="266" r:id="rId17"/>
     <p:sldId id="267" r:id="rId18"/>
+    <p:sldId id="268" r:id="rId19"/>
   </p:sldIdLst>
   <p:sldSz cx="12191695" cy="6858000" type="screen4x3"/>
   <p:notesSz cx="6858000" cy="9144000"/>
@@ -3650,7 +3651,7 @@
                 </a:solidFill>
                 <a:latin typeface="Calibri"/>
               </a:rPr>
-              <a:t>Итеративное прогнозирование</a:t>
+              <a:t>Анализ отдельных рядов</a:t>
             </a:r>
           </a:p>
         </p:txBody>
@@ -3689,7 +3690,7 @@
                 </a:solidFill>
                 <a:latin typeface="Calibri"/>
               </a:rPr>
-              <a:t>Раздел 3. Хрупкость обучаемой декомпозиции</a:t>
+              <a:t>Раздел 3. Преимущество нейросетей носит массовый характер</a:t>
             </a:r>
           </a:p>
         </p:txBody>
@@ -3772,7 +3773,7 @@
                 </a:solidFill>
                 <a:latin typeface="Calibri"/>
               </a:rPr>
-              <a:t>10 / 12</a:t>
+              <a:t>10 / 13</a:t>
             </a:r>
           </a:p>
         </p:txBody>
@@ -3816,16 +3817,40 @@
           </a:p>
         </p:txBody>
       </p:sp>
-      <p:sp>
-        <p:nvSpPr>
-          <p:cNvPr id="9" name="TextBox 8"/>
+      <p:pic>
+        <p:nvPicPr>
+          <p:cNvPr id="9" name="Picture 8" descr="cherry_D2052.png"/>
+          <p:cNvPicPr>
+            <a:picLocks noChangeAspect="1"/>
+          </p:cNvPicPr>
+          <p:nvPr/>
+        </p:nvPicPr>
+        <p:blipFill>
+          <a:blip r:embed="rId2"/>
+          <a:stretch>
+            <a:fillRect/>
+          </a:stretch>
+        </p:blipFill>
+        <p:spPr>
+          <a:xfrm>
+            <a:off x="640080" y="2049207"/>
+            <a:ext cx="7406640" cy="3125345"/>
+          </a:xfrm>
+          <a:prstGeom prst="rect">
+            <a:avLst/>
+          </a:prstGeom>
+        </p:spPr>
+      </p:pic>
+      <p:sp>
+        <p:nvSpPr>
+          <p:cNvPr id="10" name="TextBox 9"/>
           <p:cNvSpPr txBox="1"/>
           <p:nvPr/>
         </p:nvSpPr>
         <p:spPr>
           <a:xfrm>
-            <a:off x="640080" y="1920240"/>
-            <a:ext cx="6766560" cy="3657600"/>
+            <a:off x="8412480" y="1783080"/>
+            <a:ext cx="2743200" cy="868680"/>
           </a:xfrm>
           <a:prstGeom prst="rect">
             <a:avLst/>
@@ -3840,163 +3865,150 @@
           <a:p>
             <a:pPr algn="l">
               <a:lnSpc>
-                <a:spcPct val="112000"/>
+                <a:spcPct val="100000"/>
               </a:lnSpc>
-              <a:spcAft>
-                <a:spcPts val="1500"/>
-              </a:spcAft>
             </a:pPr>
             <a:r>
-              <a:rPr sz="1700" b="1" i="0">
+              <a:rPr sz="4000" b="1" i="0">
                 <a:solidFill>
                   <a:srgbClr val="E07A5F"/>
                 </a:solidFill>
                 <a:latin typeface="Calibri"/>
               </a:rPr>
-              <a:t>▪  </a:t>
-            </a:r>
-            <a:r>
-              <a:rPr sz="1700" b="1" i="0">
-                <a:solidFill>
-                  <a:srgbClr val="2B2B2B"/>
-                </a:solidFill>
-                <a:latin typeface="Calibri"/>
-              </a:rPr>
-              <a:t>При накоплении ошибки </a:t>
-            </a:r>
-            <a:r>
-              <a:rPr sz="1700" b="0" i="0">
-                <a:solidFill>
-                  <a:srgbClr val="2B2B2B"/>
-                </a:solidFill>
-                <a:latin typeface="Calibri"/>
-              </a:rPr>
-              <a:t>сильнее всего деградируют модели с обучаемой декомпозицией.</a:t>
-            </a:r>
-          </a:p>
+              <a:t>517</a:t>
+            </a:r>
+          </a:p>
+        </p:txBody>
+      </p:sp>
+      <p:sp>
+        <p:nvSpPr>
+          <p:cNvPr id="11" name="TextBox 10"/>
+          <p:cNvSpPr txBox="1"/>
+          <p:nvPr/>
+        </p:nvSpPr>
+        <p:spPr>
+          <a:xfrm>
+            <a:off x="8412480" y="2560320"/>
+            <a:ext cx="2743200" cy="640080"/>
+          </a:xfrm>
+          <a:prstGeom prst="rect">
+            <a:avLst/>
+          </a:prstGeom>
+          <a:noFill/>
+        </p:spPr>
+        <p:txBody>
+          <a:bodyPr wrap="square" anchor="t" lIns="0" rIns="0" tIns="0" bIns="0">
+            <a:spAutoFit/>
+          </a:bodyPr>
+          <a:lstStyle/>
           <a:p>
             <a:pPr algn="l">
               <a:lnSpc>
-                <a:spcPct val="112000"/>
+                <a:spcPct val="105000"/>
               </a:lnSpc>
-              <a:spcAft>
-                <a:spcPts val="1500"/>
-              </a:spcAft>
             </a:pPr>
             <a:r>
-              <a:rPr sz="1700" b="1" i="0">
-                <a:solidFill>
-                  <a:srgbClr val="E07A5F"/>
-                </a:solidFill>
-                <a:latin typeface="Calibri"/>
-              </a:rPr>
-              <a:t>▪  </a:t>
-            </a:r>
-            <a:r>
-              <a:rPr sz="1700" b="1" i="0">
-                <a:solidFill>
-                  <a:srgbClr val="2B2B2B"/>
-                </a:solidFill>
-                <a:latin typeface="Calibri"/>
-              </a:rPr>
-              <a:t>FEDformer и TimesNet </a:t>
-            </a:r>
-            <a:r>
-              <a:rPr sz="1700" b="0" i="0">
-                <a:solidFill>
-                  <a:srgbClr val="2B2B2B"/>
-                </a:solidFill>
-                <a:latin typeface="Calibri"/>
-              </a:rPr>
-              <a:t>теряют около +5 п.п. sMAPE при переходе к итеративному режиму.</a:t>
-            </a:r>
-          </a:p>
+              <a:rPr sz="1300" b="0" i="0">
+                <a:solidFill>
+                  <a:srgbClr val="5A6478"/>
+                </a:solidFill>
+                <a:latin typeface="Calibri"/>
+              </a:rPr>
+              <a:t>из 1000 ежедневных рядов
+нейросеть точнее классики</a:t>
+            </a:r>
+          </a:p>
+        </p:txBody>
+      </p:sp>
+      <p:sp>
+        <p:nvSpPr>
+          <p:cNvPr id="12" name="TextBox 11"/>
+          <p:cNvSpPr txBox="1"/>
+          <p:nvPr/>
+        </p:nvSpPr>
+        <p:spPr>
+          <a:xfrm>
+            <a:off x="8412480" y="3429000"/>
+            <a:ext cx="2743200" cy="868680"/>
+          </a:xfrm>
+          <a:prstGeom prst="rect">
+            <a:avLst/>
+          </a:prstGeom>
+          <a:noFill/>
+        </p:spPr>
+        <p:txBody>
+          <a:bodyPr wrap="square" anchor="t" lIns="0" rIns="0" tIns="0" bIns="0">
+            <a:spAutoFit/>
+          </a:bodyPr>
+          <a:lstStyle/>
           <a:p>
             <a:pPr algn="l">
               <a:lnSpc>
-                <a:spcPct val="112000"/>
+                <a:spcPct val="100000"/>
               </a:lnSpc>
-              <a:spcAft>
-                <a:spcPts val="1500"/>
-              </a:spcAft>
             </a:pPr>
             <a:r>
-              <a:rPr sz="1700" b="1" i="0">
+              <a:rPr sz="4000" b="1" i="0">
                 <a:solidFill>
                   <a:srgbClr val="E07A5F"/>
                 </a:solidFill>
                 <a:latin typeface="Calibri"/>
               </a:rPr>
-              <a:t>▪  </a:t>
-            </a:r>
-            <a:r>
-              <a:rPr sz="1700" b="1" i="0">
-                <a:solidFill>
-                  <a:srgbClr val="2B2B2B"/>
-                </a:solidFill>
-                <a:latin typeface="Calibri"/>
-              </a:rPr>
-              <a:t>PatchTST </a:t>
-            </a:r>
-            <a:r>
-              <a:rPr sz="1700" b="0" i="0">
-                <a:solidFill>
-                  <a:srgbClr val="2B2B2B"/>
-                </a:solidFill>
-                <a:latin typeface="Calibri"/>
-              </a:rPr>
-              <a:t>(без явной декомпозиции) — наиболее устойчивый трансформер.</a:t>
-            </a:r>
-          </a:p>
+              <a:t>295</a:t>
+            </a:r>
+          </a:p>
+        </p:txBody>
+      </p:sp>
+      <p:sp>
+        <p:nvSpPr>
+          <p:cNvPr id="13" name="TextBox 12"/>
+          <p:cNvSpPr txBox="1"/>
+          <p:nvPr/>
+        </p:nvSpPr>
+        <p:spPr>
+          <a:xfrm>
+            <a:off x="8412480" y="4206240"/>
+            <a:ext cx="2743200" cy="640080"/>
+          </a:xfrm>
+          <a:prstGeom prst="rect">
+            <a:avLst/>
+          </a:prstGeom>
+          <a:noFill/>
+        </p:spPr>
+        <p:txBody>
+          <a:bodyPr wrap="square" anchor="t" lIns="0" rIns="0" tIns="0" bIns="0">
+            <a:spAutoFit/>
+          </a:bodyPr>
+          <a:lstStyle/>
           <a:p>
             <a:pPr algn="l">
               <a:lnSpc>
-                <a:spcPct val="112000"/>
+                <a:spcPct val="105000"/>
               </a:lnSpc>
-              <a:spcAft>
-                <a:spcPts val="1500"/>
-              </a:spcAft>
             </a:pPr>
             <a:r>
-              <a:rPr sz="1700" b="1" i="0">
-                <a:solidFill>
-                  <a:srgbClr val="E07A5F"/>
-                </a:solidFill>
-                <a:latin typeface="Calibri"/>
-              </a:rPr>
-              <a:t>▪  </a:t>
-            </a:r>
-            <a:r>
-              <a:rPr sz="1700" b="1" i="0">
-                <a:solidFill>
-                  <a:srgbClr val="2B2B2B"/>
-                </a:solidFill>
-                <a:latin typeface="Calibri"/>
-              </a:rPr>
-              <a:t>Классические модели </a:t>
-            </a:r>
-            <a:r>
-              <a:rPr sz="1700" b="0" i="0">
-                <a:solidFill>
-                  <a:srgbClr val="2B2B2B"/>
-                </a:solidFill>
-                <a:latin typeface="Calibri"/>
-              </a:rPr>
-              <a:t>(ETS, Auto-ARIMA) практически нечувствительны к режиму.</a:t>
-            </a:r>
-          </a:p>
-        </p:txBody>
-      </p:sp>
-      <p:sp>
-        <p:nvSpPr>
-          <p:cNvPr id="10" name="Rectangle 9"/>
+              <a:rPr sz="1300" b="0" i="0">
+                <a:solidFill>
+                  <a:srgbClr val="5A6478"/>
+                </a:solidFill>
+                <a:latin typeface="Calibri"/>
+              </a:rPr>
+              <a:t>рядов, где побеждают
+3+ нейросетевых модели</a:t>
+            </a:r>
+          </a:p>
+        </p:txBody>
+      </p:sp>
+      <p:sp>
+        <p:nvSpPr>
+          <p:cNvPr id="14" name="Rectangle 13"/>
           <p:cNvSpPr/>
           <p:nvPr/>
         </p:nvSpPr>
         <p:spPr>
           <a:xfrm>
-            <a:off x="7772400" y="2103120"/>
-            <a:ext cx="38100" cy="3108960"/>
+            <a:off x="640080" y="5897880"/>
+            <a:ext cx="38100" cy="384048"/>
           </a:xfrm>
           <a:prstGeom prst="rect">
             <a:avLst/>
@@ -4033,14 +4045,14 @@
       </p:sp>
       <p:sp>
         <p:nvSpPr>
-          <p:cNvPr id="11" name="TextBox 10"/>
+          <p:cNvPr id="15" name="TextBox 14"/>
           <p:cNvSpPr txBox="1"/>
           <p:nvPr/>
         </p:nvSpPr>
         <p:spPr>
           <a:xfrm>
-            <a:off x="8046720" y="2103120"/>
-            <a:ext cx="3566160" cy="3291840"/>
+            <a:off x="804672" y="5897880"/>
+            <a:ext cx="10881360" cy="457200"/>
           </a:xfrm>
           <a:prstGeom prst="rect">
             <a:avLst/>
@@ -4055,26 +4067,26 @@
           <a:p>
             <a:pPr algn="l">
               <a:lnSpc>
-                <a:spcPct val="118000"/>
+                <a:spcPct val="105000"/>
               </a:lnSpc>
             </a:pPr>
             <a:r>
-              <a:rPr sz="1700" b="1" i="0">
+              <a:rPr sz="1500" b="1" i="0">
                 <a:solidFill>
                   <a:srgbClr val="E07A5F"/>
                 </a:solidFill>
                 <a:latin typeface="Calibri"/>
               </a:rPr>
-              <a:t>Вывод: </a:t>
-            </a:r>
-            <a:r>
-              <a:rPr sz="1700" b="0" i="0">
+              <a:t>Главное:  </a:t>
+            </a:r>
+            <a:r>
+              <a:rPr sz="1500" b="0" i="0">
                 <a:solidFill>
                   <a:srgbClr val="2B2B2B"/>
                 </a:solidFill>
                 <a:latin typeface="Calibri"/>
               </a:rPr>
-              <a:t>сложная обучаемая декомпозиция — это риск при многошаговом прогнозе. Простые и классические модели предпочтительнее, если нужен итеративный режим.</a:t>
+              <a:t>нейросети выигрывают не точечно, а на большинстве длинных ежедневных рядов M4.</a:t>
             </a:r>
           </a:p>
         </p:txBody>
@@ -4219,7 +4231,7 @@
                 </a:solidFill>
                 <a:latin typeface="Calibri"/>
               </a:rPr>
-              <a:t>Выводы и практические рекомендации</a:t>
+              <a:t>Итеративное прогнозирование</a:t>
             </a:r>
           </a:p>
         </p:txBody>
@@ -4258,7 +4270,7 @@
                 </a:solidFill>
                 <a:latin typeface="Calibri"/>
               </a:rPr>
-              <a:t>Раздел 4. Основные результаты</a:t>
+              <a:t>Раздел 3. Хрупкость обучаемой декомпозиции</a:t>
             </a:r>
           </a:p>
         </p:txBody>
@@ -4341,7 +4353,7 @@
                 </a:solidFill>
                 <a:latin typeface="Calibri"/>
               </a:rPr>
-              <a:t>11 / 12</a:t>
+              <a:t>11 / 13</a:t>
             </a:r>
           </a:p>
         </p:txBody>
@@ -4393,8 +4405,8 @@
         </p:nvSpPr>
         <p:spPr>
           <a:xfrm>
-            <a:off x="640080" y="1737360"/>
-            <a:ext cx="10881360" cy="4389120"/>
+            <a:off x="640080" y="1920240"/>
+            <a:ext cx="6766560" cy="3657600"/>
           </a:xfrm>
           <a:prstGeom prst="rect">
             <a:avLst/>
@@ -4412,11 +4424,11 @@
                 <a:spcPct val="112000"/>
               </a:lnSpc>
               <a:spcAft>
-                <a:spcPts val="1300"/>
+                <a:spcPts val="1500"/>
               </a:spcAft>
             </a:pPr>
             <a:r>
-              <a:rPr sz="1650" b="1" i="0">
+              <a:rPr sz="1700" b="1" i="0">
                 <a:solidFill>
                   <a:srgbClr val="E07A5F"/>
                 </a:solidFill>
@@ -4425,22 +4437,22 @@
               <a:t>▪  </a:t>
             </a:r>
             <a:r>
-              <a:rPr sz="1650" b="1" i="0">
+              <a:rPr sz="1700" b="1" i="0">
                 <a:solidFill>
                   <a:srgbClr val="2B2B2B"/>
                 </a:solidFill>
                 <a:latin typeface="Calibri"/>
               </a:rPr>
-              <a:t>Длина ряда решает. </a:t>
-            </a:r>
-            <a:r>
-              <a:rPr sz="1650" b="0" i="0">
+              <a:t>При накоплении ошибки </a:t>
+            </a:r>
+            <a:r>
+              <a:rPr sz="1700" b="0" i="0">
                 <a:solidFill>
                   <a:srgbClr val="2B2B2B"/>
                 </a:solidFill>
                 <a:latin typeface="Calibri"/>
               </a:rPr>
-              <a:t>Ниже ≈ 50–100 наблюдений лидирует классика (ETS, Auto-ARIMA); выше — нейросети конкурентоспособны.</a:t>
+              <a:t>сильнее всего деградируют модели с обучаемой декомпозицией.</a:t>
             </a:r>
           </a:p>
           <a:p>
@@ -4449,11 +4461,11 @@
                 <a:spcPct val="112000"/>
               </a:lnSpc>
               <a:spcAft>
-                <a:spcPts val="1300"/>
+                <a:spcPts val="1500"/>
               </a:spcAft>
             </a:pPr>
             <a:r>
-              <a:rPr sz="1650" b="1" i="0">
+              <a:rPr sz="1700" b="1" i="0">
                 <a:solidFill>
                   <a:srgbClr val="E07A5F"/>
                 </a:solidFill>
@@ -4462,22 +4474,22 @@
               <a:t>▪  </a:t>
             </a:r>
             <a:r>
-              <a:rPr sz="1650" b="1" i="0">
+              <a:rPr sz="1700" b="1" i="0">
                 <a:solidFill>
                   <a:srgbClr val="2B2B2B"/>
                 </a:solidFill>
                 <a:latin typeface="Calibri"/>
               </a:rPr>
-              <a:t>TimesNet — лучшая нейросеть </a:t>
-            </a:r>
-            <a:r>
-              <a:rPr sz="1650" b="0" i="0">
+              <a:t>FEDformer и TimesNet </a:t>
+            </a:r>
+            <a:r>
+              <a:rPr sz="1700" b="0" i="0">
                 <a:solidFill>
                   <a:srgbClr val="2B2B2B"/>
                 </a:solidFill>
                 <a:latin typeface="Calibri"/>
               </a:rPr>
-              <a:t>в per-series режиме; обучаемая 2D-декомпозиция эффективна при достатке данных.</a:t>
+              <a:t>теряют около +5 п.п. sMAPE при переходе к итеративному режиму.</a:t>
             </a:r>
           </a:p>
           <a:p>
@@ -4486,11 +4498,11 @@
                 <a:spcPct val="112000"/>
               </a:lnSpc>
               <a:spcAft>
-                <a:spcPts val="1300"/>
+                <a:spcPts val="1500"/>
               </a:spcAft>
             </a:pPr>
             <a:r>
-              <a:rPr sz="1650" b="1" i="0">
+              <a:rPr sz="1700" b="1" i="0">
                 <a:solidFill>
                   <a:srgbClr val="E07A5F"/>
                 </a:solidFill>
@@ -4499,22 +4511,22 @@
               <a:t>▪  </a:t>
             </a:r>
             <a:r>
-              <a:rPr sz="1650" b="1" i="0">
+              <a:rPr sz="1700" b="1" i="0">
                 <a:solidFill>
                   <a:srgbClr val="2B2B2B"/>
                 </a:solidFill>
                 <a:latin typeface="Calibri"/>
               </a:rPr>
-              <a:t>Предобучение кардинально усиливает нейросети </a:t>
-            </a:r>
-            <a:r>
-              <a:rPr sz="1650" b="0" i="0">
+              <a:t>PatchTST </a:t>
+            </a:r>
+            <a:r>
+              <a:rPr sz="1700" b="0" i="0">
                 <a:solidFill>
                   <a:srgbClr val="2B2B2B"/>
                 </a:solidFill>
                 <a:latin typeface="Calibri"/>
               </a:rPr>
-              <a:t>(+18…32 %) и выводит их на уровень и выше классики (M3 monthly, M4 daily).</a:t>
+              <a:t>(без явной декомпозиции) — наиболее устойчивый трансформер.</a:t>
             </a:r>
           </a:p>
           <a:p>
@@ -4523,11 +4535,11 @@
                 <a:spcPct val="112000"/>
               </a:lnSpc>
               <a:spcAft>
-                <a:spcPts val="1300"/>
+                <a:spcPts val="1500"/>
               </a:spcAft>
             </a:pPr>
             <a:r>
-              <a:rPr sz="1650" b="1" i="0">
+              <a:rPr sz="1700" b="1" i="0">
                 <a:solidFill>
                   <a:srgbClr val="E07A5F"/>
                 </a:solidFill>
@@ -4536,59 +4548,114 @@
               <a:t>▪  </a:t>
             </a:r>
             <a:r>
-              <a:rPr sz="1650" b="1" i="0">
+              <a:rPr sz="1700" b="1" i="0">
                 <a:solidFill>
                   <a:srgbClr val="2B2B2B"/>
                 </a:solidFill>
                 <a:latin typeface="Calibri"/>
               </a:rPr>
-              <a:t>Тип декомпозиции должен соответствовать режиму: </a:t>
-            </a:r>
-            <a:r>
-              <a:rPr sz="1650" b="0" i="0">
+              <a:t>Классические модели </a:t>
+            </a:r>
+            <a:r>
+              <a:rPr sz="1700" b="0" i="0">
                 <a:solidFill>
                   <a:srgbClr val="2B2B2B"/>
                 </a:solidFill>
                 <a:latin typeface="Calibri"/>
               </a:rPr>
-              <a:t>фиксированная — устойчивее, обучаемая — адаптивнее, но хрупка при итеративном прогнозе.</a:t>
-            </a:r>
-          </a:p>
+              <a:t>(ETS, Auto-ARIMA) практически нечувствительны к режиму.</a:t>
+            </a:r>
+          </a:p>
+        </p:txBody>
+      </p:sp>
+      <p:sp>
+        <p:nvSpPr>
+          <p:cNvPr id="10" name="Rectangle 9"/>
+          <p:cNvSpPr/>
+          <p:nvPr/>
+        </p:nvSpPr>
+        <p:spPr>
+          <a:xfrm>
+            <a:off x="7772400" y="2103120"/>
+            <a:ext cx="38100" cy="3108960"/>
+          </a:xfrm>
+          <a:prstGeom prst="rect">
+            <a:avLst/>
+          </a:prstGeom>
+          <a:solidFill>
+            <a:srgbClr val="E07A5F"/>
+          </a:solidFill>
+          <a:ln>
+            <a:noFill/>
+          </a:ln>
+          <a:effectLst/>
+        </p:spPr>
+        <p:style>
+          <a:lnRef idx="1">
+            <a:schemeClr val="accent1"/>
+          </a:lnRef>
+          <a:fillRef idx="3">
+            <a:schemeClr val="accent1"/>
+          </a:fillRef>
+          <a:effectRef idx="2">
+            <a:schemeClr val="accent1"/>
+          </a:effectRef>
+          <a:fontRef idx="minor">
+            <a:schemeClr val="lt1"/>
+          </a:fontRef>
+        </p:style>
+        <p:txBody>
+          <a:bodyPr rtlCol="0" anchor="ctr"/>
+          <a:lstStyle/>
+          <a:p>
+            <a:pPr algn="ctr"/>
+          </a:p>
+        </p:txBody>
+      </p:sp>
+      <p:sp>
+        <p:nvSpPr>
+          <p:cNvPr id="11" name="TextBox 10"/>
+          <p:cNvSpPr txBox="1"/>
+          <p:nvPr/>
+        </p:nvSpPr>
+        <p:spPr>
+          <a:xfrm>
+            <a:off x="8046720" y="2103120"/>
+            <a:ext cx="3566160" cy="3291840"/>
+          </a:xfrm>
+          <a:prstGeom prst="rect">
+            <a:avLst/>
+          </a:prstGeom>
+          <a:noFill/>
+        </p:spPr>
+        <p:txBody>
+          <a:bodyPr wrap="square" anchor="t" lIns="0" rIns="0" tIns="0" bIns="0">
+            <a:spAutoFit/>
+          </a:bodyPr>
+          <a:lstStyle/>
           <a:p>
             <a:pPr algn="l">
               <a:lnSpc>
-                <a:spcPct val="112000"/>
+                <a:spcPct val="118000"/>
               </a:lnSpc>
-              <a:spcAft>
-                <a:spcPts val="1300"/>
-              </a:spcAft>
             </a:pPr>
             <a:r>
-              <a:rPr sz="1650" b="1" i="0">
+              <a:rPr sz="1700" b="1" i="0">
                 <a:solidFill>
                   <a:srgbClr val="E07A5F"/>
                 </a:solidFill>
                 <a:latin typeface="Calibri"/>
               </a:rPr>
-              <a:t>▪  </a:t>
-            </a:r>
-            <a:r>
-              <a:rPr sz="1650" b="1" i="0">
+              <a:t>Вывод: </a:t>
+            </a:r>
+            <a:r>
+              <a:rPr sz="1700" b="0" i="0">
                 <a:solidFill>
                   <a:srgbClr val="2B2B2B"/>
                 </a:solidFill>
                 <a:latin typeface="Calibri"/>
               </a:rPr>
-              <a:t>Ответ не бинарный: </a:t>
-            </a:r>
-            <a:r>
-              <a:rPr sz="1650" b="0" i="0">
-                <a:solidFill>
-                  <a:srgbClr val="2B2B2B"/>
-                </a:solidFill>
-                <a:latin typeface="Calibri"/>
-              </a:rPr>
-              <a:t>эффективность нейросетевых механизмов зависит от длины ряда, режима обучения и объёма данных.</a:t>
+              <a:t>сложная обучаемая декомпозиция — это риск при многошаговом прогнозе. Простые и классические модели предпочтительнее, если нужен итеративный режим.</a:t>
             </a:r>
           </a:p>
         </p:txBody>
@@ -4626,6 +4693,520 @@
             <a:avLst/>
           </a:prstGeom>
           <a:solidFill>
+            <a:srgbClr val="FFFFFF"/>
+          </a:solidFill>
+          <a:ln>
+            <a:noFill/>
+          </a:ln>
+          <a:effectLst/>
+        </p:spPr>
+        <p:style>
+          <a:lnRef idx="1">
+            <a:schemeClr val="accent1"/>
+          </a:lnRef>
+          <a:fillRef idx="3">
+            <a:schemeClr val="accent1"/>
+          </a:fillRef>
+          <a:effectRef idx="2">
+            <a:schemeClr val="accent1"/>
+          </a:effectRef>
+          <a:fontRef idx="minor">
+            <a:schemeClr val="lt1"/>
+          </a:fontRef>
+        </p:style>
+        <p:txBody>
+          <a:bodyPr rtlCol="0" anchor="ctr"/>
+          <a:lstStyle/>
+          <a:p>
+            <a:pPr algn="ctr"/>
+          </a:p>
+        </p:txBody>
+      </p:sp>
+      <p:sp>
+        <p:nvSpPr>
+          <p:cNvPr id="3" name="Rectangle 2"/>
+          <p:cNvSpPr/>
+          <p:nvPr/>
+        </p:nvSpPr>
+        <p:spPr>
+          <a:xfrm>
+            <a:off x="0" y="0"/>
+            <a:ext cx="12191695" cy="146304"/>
+          </a:xfrm>
+          <a:prstGeom prst="rect">
+            <a:avLst/>
+          </a:prstGeom>
+          <a:solidFill>
+            <a:srgbClr val="1F2A4E"/>
+          </a:solidFill>
+          <a:ln>
+            <a:noFill/>
+          </a:ln>
+          <a:effectLst/>
+        </p:spPr>
+        <p:style>
+          <a:lnRef idx="1">
+            <a:schemeClr val="accent1"/>
+          </a:lnRef>
+          <a:fillRef idx="3">
+            <a:schemeClr val="accent1"/>
+          </a:fillRef>
+          <a:effectRef idx="2">
+            <a:schemeClr val="accent1"/>
+          </a:effectRef>
+          <a:fontRef idx="minor">
+            <a:schemeClr val="lt1"/>
+          </a:fontRef>
+        </p:style>
+        <p:txBody>
+          <a:bodyPr rtlCol="0" anchor="ctr"/>
+          <a:lstStyle/>
+          <a:p>
+            <a:pPr algn="ctr"/>
+          </a:p>
+        </p:txBody>
+      </p:sp>
+      <p:sp>
+        <p:nvSpPr>
+          <p:cNvPr id="4" name="TextBox 3"/>
+          <p:cNvSpPr txBox="1"/>
+          <p:nvPr/>
+        </p:nvSpPr>
+        <p:spPr>
+          <a:xfrm>
+            <a:off x="640080" y="384048"/>
+            <a:ext cx="10881360" cy="868680"/>
+          </a:xfrm>
+          <a:prstGeom prst="rect">
+            <a:avLst/>
+          </a:prstGeom>
+          <a:noFill/>
+        </p:spPr>
+        <p:txBody>
+          <a:bodyPr wrap="square" anchor="t" lIns="0" rIns="0" tIns="0" bIns="0">
+            <a:spAutoFit/>
+          </a:bodyPr>
+          <a:lstStyle/>
+          <a:p>
+            <a:pPr algn="l">
+              <a:lnSpc>
+                <a:spcPct val="100000"/>
+              </a:lnSpc>
+            </a:pPr>
+            <a:r>
+              <a:rPr sz="3000" b="1" i="0">
+                <a:solidFill>
+                  <a:srgbClr val="1F2A4E"/>
+                </a:solidFill>
+                <a:latin typeface="Calibri"/>
+              </a:rPr>
+              <a:t>Выводы и практические рекомендации</a:t>
+            </a:r>
+          </a:p>
+        </p:txBody>
+      </p:sp>
+      <p:sp>
+        <p:nvSpPr>
+          <p:cNvPr id="5" name="TextBox 4"/>
+          <p:cNvSpPr txBox="1"/>
+          <p:nvPr/>
+        </p:nvSpPr>
+        <p:spPr>
+          <a:xfrm>
+            <a:off x="658368" y="1115568"/>
+            <a:ext cx="10881360" cy="411480"/>
+          </a:xfrm>
+          <a:prstGeom prst="rect">
+            <a:avLst/>
+          </a:prstGeom>
+          <a:noFill/>
+        </p:spPr>
+        <p:txBody>
+          <a:bodyPr wrap="square" anchor="t" lIns="0" rIns="0" tIns="0" bIns="0">
+            <a:spAutoFit/>
+          </a:bodyPr>
+          <a:lstStyle/>
+          <a:p>
+            <a:pPr algn="l">
+              <a:lnSpc>
+                <a:spcPct val="100000"/>
+              </a:lnSpc>
+            </a:pPr>
+            <a:r>
+              <a:rPr sz="1600" b="0" i="1">
+                <a:solidFill>
+                  <a:srgbClr val="374676"/>
+                </a:solidFill>
+                <a:latin typeface="Calibri"/>
+              </a:rPr>
+              <a:t>Раздел 4. Основные результаты</a:t>
+            </a:r>
+          </a:p>
+        </p:txBody>
+      </p:sp>
+      <p:sp>
+        <p:nvSpPr>
+          <p:cNvPr id="6" name="Rectangle 5"/>
+          <p:cNvSpPr/>
+          <p:nvPr/>
+        </p:nvSpPr>
+        <p:spPr>
+          <a:xfrm>
+            <a:off x="640080" y="6419088"/>
+            <a:ext cx="10908792" cy="9525"/>
+          </a:xfrm>
+          <a:prstGeom prst="rect">
+            <a:avLst/>
+          </a:prstGeom>
+          <a:solidFill>
+            <a:srgbClr val="D8DDE8"/>
+          </a:solidFill>
+          <a:ln>
+            <a:noFill/>
+          </a:ln>
+          <a:effectLst/>
+        </p:spPr>
+        <p:style>
+          <a:lnRef idx="1">
+            <a:schemeClr val="accent1"/>
+          </a:lnRef>
+          <a:fillRef idx="3">
+            <a:schemeClr val="accent1"/>
+          </a:fillRef>
+          <a:effectRef idx="2">
+            <a:schemeClr val="accent1"/>
+          </a:effectRef>
+          <a:fontRef idx="minor">
+            <a:schemeClr val="lt1"/>
+          </a:fontRef>
+        </p:style>
+        <p:txBody>
+          <a:bodyPr rtlCol="0" anchor="ctr"/>
+          <a:lstStyle/>
+          <a:p>
+            <a:pPr algn="ctr"/>
+          </a:p>
+        </p:txBody>
+      </p:sp>
+      <p:sp>
+        <p:nvSpPr>
+          <p:cNvPr id="7" name="TextBox 6"/>
+          <p:cNvSpPr txBox="1"/>
+          <p:nvPr/>
+        </p:nvSpPr>
+        <p:spPr>
+          <a:xfrm>
+            <a:off x="10424160" y="6473952"/>
+            <a:ext cx="1097280" cy="274320"/>
+          </a:xfrm>
+          <a:prstGeom prst="rect">
+            <a:avLst/>
+          </a:prstGeom>
+          <a:noFill/>
+        </p:spPr>
+        <p:txBody>
+          <a:bodyPr wrap="square" anchor="t" lIns="0" rIns="0" tIns="0" bIns="0">
+            <a:spAutoFit/>
+          </a:bodyPr>
+          <a:lstStyle/>
+          <a:p>
+            <a:pPr algn="r">
+              <a:lnSpc>
+                <a:spcPct val="100000"/>
+              </a:lnSpc>
+            </a:pPr>
+            <a:r>
+              <a:rPr sz="1100" b="0" i="0">
+                <a:solidFill>
+                  <a:srgbClr val="5A6478"/>
+                </a:solidFill>
+                <a:latin typeface="Calibri"/>
+              </a:rPr>
+              <a:t>12 / 13</a:t>
+            </a:r>
+          </a:p>
+        </p:txBody>
+      </p:sp>
+      <p:sp>
+        <p:nvSpPr>
+          <p:cNvPr id="8" name="TextBox 7"/>
+          <p:cNvSpPr txBox="1"/>
+          <p:nvPr/>
+        </p:nvSpPr>
+        <p:spPr>
+          <a:xfrm>
+            <a:off x="640080" y="6473952"/>
+            <a:ext cx="6400800" cy="274320"/>
+          </a:xfrm>
+          <a:prstGeom prst="rect">
+            <a:avLst/>
+          </a:prstGeom>
+          <a:noFill/>
+        </p:spPr>
+        <p:txBody>
+          <a:bodyPr wrap="square" anchor="t" lIns="0" rIns="0" tIns="0" bIns="0">
+            <a:spAutoFit/>
+          </a:bodyPr>
+          <a:lstStyle/>
+          <a:p>
+            <a:pPr algn="l">
+              <a:lnSpc>
+                <a:spcPct val="100000"/>
+              </a:lnSpc>
+            </a:pPr>
+            <a:r>
+              <a:rPr sz="1000" b="0" i="0">
+                <a:solidFill>
+                  <a:srgbClr val="5A6478"/>
+                </a:solidFill>
+                <a:latin typeface="Calibri"/>
+              </a:rPr>
+              <a:t>Прогнозирование временных рядов · ВКР · Лазарев А.К.</a:t>
+            </a:r>
+          </a:p>
+        </p:txBody>
+      </p:sp>
+      <p:sp>
+        <p:nvSpPr>
+          <p:cNvPr id="9" name="TextBox 8"/>
+          <p:cNvSpPr txBox="1"/>
+          <p:nvPr/>
+        </p:nvSpPr>
+        <p:spPr>
+          <a:xfrm>
+            <a:off x="640080" y="1737360"/>
+            <a:ext cx="10881360" cy="4389120"/>
+          </a:xfrm>
+          <a:prstGeom prst="rect">
+            <a:avLst/>
+          </a:prstGeom>
+          <a:noFill/>
+        </p:spPr>
+        <p:txBody>
+          <a:bodyPr wrap="square" anchor="t" lIns="0" rIns="0" tIns="0" bIns="0">
+            <a:spAutoFit/>
+          </a:bodyPr>
+          <a:lstStyle/>
+          <a:p>
+            <a:pPr algn="l">
+              <a:lnSpc>
+                <a:spcPct val="112000"/>
+              </a:lnSpc>
+              <a:spcAft>
+                <a:spcPts val="1300"/>
+              </a:spcAft>
+            </a:pPr>
+            <a:r>
+              <a:rPr sz="1650" b="1" i="0">
+                <a:solidFill>
+                  <a:srgbClr val="E07A5F"/>
+                </a:solidFill>
+                <a:latin typeface="Calibri"/>
+              </a:rPr>
+              <a:t>▪  </a:t>
+            </a:r>
+            <a:r>
+              <a:rPr sz="1650" b="1" i="0">
+                <a:solidFill>
+                  <a:srgbClr val="2B2B2B"/>
+                </a:solidFill>
+                <a:latin typeface="Calibri"/>
+              </a:rPr>
+              <a:t>Длина ряда решает. </a:t>
+            </a:r>
+            <a:r>
+              <a:rPr sz="1650" b="0" i="0">
+                <a:solidFill>
+                  <a:srgbClr val="2B2B2B"/>
+                </a:solidFill>
+                <a:latin typeface="Calibri"/>
+              </a:rPr>
+              <a:t>Ниже ≈ 50–100 наблюдений лидирует классика (ETS, Auto-ARIMA); выше — нейросети конкурентоспособны.</a:t>
+            </a:r>
+          </a:p>
+          <a:p>
+            <a:pPr algn="l">
+              <a:lnSpc>
+                <a:spcPct val="112000"/>
+              </a:lnSpc>
+              <a:spcAft>
+                <a:spcPts val="1300"/>
+              </a:spcAft>
+            </a:pPr>
+            <a:r>
+              <a:rPr sz="1650" b="1" i="0">
+                <a:solidFill>
+                  <a:srgbClr val="E07A5F"/>
+                </a:solidFill>
+                <a:latin typeface="Calibri"/>
+              </a:rPr>
+              <a:t>▪  </a:t>
+            </a:r>
+            <a:r>
+              <a:rPr sz="1650" b="1" i="0">
+                <a:solidFill>
+                  <a:srgbClr val="2B2B2B"/>
+                </a:solidFill>
+                <a:latin typeface="Calibri"/>
+              </a:rPr>
+              <a:t>TimesNet — лучшая нейросеть </a:t>
+            </a:r>
+            <a:r>
+              <a:rPr sz="1650" b="0" i="0">
+                <a:solidFill>
+                  <a:srgbClr val="2B2B2B"/>
+                </a:solidFill>
+                <a:latin typeface="Calibri"/>
+              </a:rPr>
+              <a:t>в per-series режиме; обучаемая 2D-декомпозиция эффективна при достатке данных.</a:t>
+            </a:r>
+          </a:p>
+          <a:p>
+            <a:pPr algn="l">
+              <a:lnSpc>
+                <a:spcPct val="112000"/>
+              </a:lnSpc>
+              <a:spcAft>
+                <a:spcPts val="1300"/>
+              </a:spcAft>
+            </a:pPr>
+            <a:r>
+              <a:rPr sz="1650" b="1" i="0">
+                <a:solidFill>
+                  <a:srgbClr val="E07A5F"/>
+                </a:solidFill>
+                <a:latin typeface="Calibri"/>
+              </a:rPr>
+              <a:t>▪  </a:t>
+            </a:r>
+            <a:r>
+              <a:rPr sz="1650" b="1" i="0">
+                <a:solidFill>
+                  <a:srgbClr val="2B2B2B"/>
+                </a:solidFill>
+                <a:latin typeface="Calibri"/>
+              </a:rPr>
+              <a:t>Предобучение кардинально усиливает нейросети </a:t>
+            </a:r>
+            <a:r>
+              <a:rPr sz="1650" b="0" i="0">
+                <a:solidFill>
+                  <a:srgbClr val="2B2B2B"/>
+                </a:solidFill>
+                <a:latin typeface="Calibri"/>
+              </a:rPr>
+              <a:t>(+18…32 %) и выводит их на уровень и выше классики (M3 monthly, M4 daily).</a:t>
+            </a:r>
+          </a:p>
+          <a:p>
+            <a:pPr algn="l">
+              <a:lnSpc>
+                <a:spcPct val="112000"/>
+              </a:lnSpc>
+              <a:spcAft>
+                <a:spcPts val="1300"/>
+              </a:spcAft>
+            </a:pPr>
+            <a:r>
+              <a:rPr sz="1650" b="1" i="0">
+                <a:solidFill>
+                  <a:srgbClr val="E07A5F"/>
+                </a:solidFill>
+                <a:latin typeface="Calibri"/>
+              </a:rPr>
+              <a:t>▪  </a:t>
+            </a:r>
+            <a:r>
+              <a:rPr sz="1650" b="1" i="0">
+                <a:solidFill>
+                  <a:srgbClr val="2B2B2B"/>
+                </a:solidFill>
+                <a:latin typeface="Calibri"/>
+              </a:rPr>
+              <a:t>Тип декомпозиции должен соответствовать режиму: </a:t>
+            </a:r>
+            <a:r>
+              <a:rPr sz="1650" b="0" i="0">
+                <a:solidFill>
+                  <a:srgbClr val="2B2B2B"/>
+                </a:solidFill>
+                <a:latin typeface="Calibri"/>
+              </a:rPr>
+              <a:t>фиксированная — устойчивее, обучаемая — адаптивнее, но хрупка при итеративном прогнозе.</a:t>
+            </a:r>
+          </a:p>
+          <a:p>
+            <a:pPr algn="l">
+              <a:lnSpc>
+                <a:spcPct val="112000"/>
+              </a:lnSpc>
+              <a:spcAft>
+                <a:spcPts val="1300"/>
+              </a:spcAft>
+            </a:pPr>
+            <a:r>
+              <a:rPr sz="1650" b="1" i="0">
+                <a:solidFill>
+                  <a:srgbClr val="E07A5F"/>
+                </a:solidFill>
+                <a:latin typeface="Calibri"/>
+              </a:rPr>
+              <a:t>▪  </a:t>
+            </a:r>
+            <a:r>
+              <a:rPr sz="1650" b="1" i="0">
+                <a:solidFill>
+                  <a:srgbClr val="2B2B2B"/>
+                </a:solidFill>
+                <a:latin typeface="Calibri"/>
+              </a:rPr>
+              <a:t>Ответ не бинарный: </a:t>
+            </a:r>
+            <a:r>
+              <a:rPr sz="1650" b="0" i="0">
+                <a:solidFill>
+                  <a:srgbClr val="2B2B2B"/>
+                </a:solidFill>
+                <a:latin typeface="Calibri"/>
+              </a:rPr>
+              <a:t>эффективность нейросетевых механизмов зависит от длины ряда, режима обучения и объёма данных.</a:t>
+            </a:r>
+          </a:p>
+        </p:txBody>
+      </p:sp>
+    </p:spTree>
+  </p:cSld>
+  <p:clrMapOvr>
+    <a:masterClrMapping/>
+  </p:clrMapOvr>
+</p:sld>
+</file>
+
+<file path=ppt/slides/slide13.xml><?xml version="1.0" encoding="utf-8"?>
+<p:sld xmlns:a="http://schemas.openxmlformats.org/drawingml/2006/main" xmlns:p="http://schemas.openxmlformats.org/presentationml/2006/main" xmlns:r="http://schemas.openxmlformats.org/officeDocument/2006/relationships">
+  <p:cSld>
+    <p:spTree>
+      <p:nvGrpSpPr>
+        <p:cNvPr id="1" name=""/>
+        <p:cNvGrpSpPr/>
+        <p:nvPr/>
+      </p:nvGrpSpPr>
+      <p:grpSpPr/>
+      <p:sp>
+        <p:nvSpPr>
+          <p:cNvPr id="2" name="Rectangle 1"/>
+          <p:cNvSpPr/>
+          <p:nvPr/>
+        </p:nvSpPr>
+        <p:spPr>
+          <a:xfrm>
+            <a:off x="0" y="0"/>
+            <a:ext cx="12191695" cy="6858000"/>
+          </a:xfrm>
+          <a:prstGeom prst="rect">
+            <a:avLst/>
+          </a:prstGeom>
+          <a:solidFill>
             <a:srgbClr val="1F2A4E"/>
           </a:solidFill>
           <a:ln>
@@ -5078,7 +5659,7 @@
                 </a:solidFill>
                 <a:latin typeface="Calibri"/>
               </a:rPr>
-              <a:t>2 / 12</a:t>
+              <a:t>2 / 13</a:t>
             </a:r>
           </a:p>
         </p:txBody>
@@ -5557,7 +6138,7 @@
                 </a:solidFill>
                 <a:latin typeface="Calibri"/>
               </a:rPr>
-              <a:t>Раздел 1. Что и на чём сравнивалось</a:t>
+              <a:t>Раздел 1. Состав моделей и экспериментальная база</a:t>
             </a:r>
           </a:p>
         </p:txBody>
@@ -5640,7 +6221,7 @@
                 </a:solidFill>
                 <a:latin typeface="Calibri"/>
               </a:rPr>
-              <a:t>3 / 12</a:t>
+              <a:t>3 / 13</a:t>
             </a:r>
           </a:p>
         </p:txBody>
@@ -6564,7 +7145,7 @@
                 </a:solidFill>
                 <a:latin typeface="Calibri"/>
               </a:rPr>
-              <a:t>4 / 12</a:t>
+              <a:t>4 / 13</a:t>
             </a:r>
           </a:p>
         </p:txBody>
@@ -6758,7 +7339,7 @@
         </p:blipFill>
         <p:spPr>
           <a:xfrm>
-            <a:off x="5440680" y="2538487"/>
+            <a:off x="5440680" y="2264167"/>
             <a:ext cx="6126480" cy="2512545"/>
           </a:xfrm>
           <a:prstGeom prst="rect">
@@ -6768,14 +7349,58 @@
       </p:pic>
       <p:sp>
         <p:nvSpPr>
-          <p:cNvPr id="11" name="TextBox 10"/>
+          <p:cNvPr id="11" name="Rectangle 10"/>
+          <p:cNvSpPr/>
+          <p:nvPr/>
+        </p:nvSpPr>
+        <p:spPr>
+          <a:xfrm>
+            <a:off x="640080" y="5897880"/>
+            <a:ext cx="38100" cy="384048"/>
+          </a:xfrm>
+          <a:prstGeom prst="rect">
+            <a:avLst/>
+          </a:prstGeom>
+          <a:solidFill>
+            <a:srgbClr val="E07A5F"/>
+          </a:solidFill>
+          <a:ln>
+            <a:noFill/>
+          </a:ln>
+          <a:effectLst/>
+        </p:spPr>
+        <p:style>
+          <a:lnRef idx="1">
+            <a:schemeClr val="accent1"/>
+          </a:lnRef>
+          <a:fillRef idx="3">
+            <a:schemeClr val="accent1"/>
+          </a:fillRef>
+          <a:effectRef idx="2">
+            <a:schemeClr val="accent1"/>
+          </a:effectRef>
+          <a:fontRef idx="minor">
+            <a:schemeClr val="lt1"/>
+          </a:fontRef>
+        </p:style>
+        <p:txBody>
+          <a:bodyPr rtlCol="0" anchor="ctr"/>
+          <a:lstStyle/>
+          <a:p>
+            <a:pPr algn="ctr"/>
+          </a:p>
+        </p:txBody>
+      </p:sp>
+      <p:sp>
+        <p:nvSpPr>
+          <p:cNvPr id="12" name="TextBox 11"/>
           <p:cNvSpPr txBox="1"/>
           <p:nvPr/>
         </p:nvSpPr>
         <p:spPr>
           <a:xfrm>
-            <a:off x="5440680" y="5806440"/>
-            <a:ext cx="6126480" cy="365760"/>
+            <a:off x="804672" y="5897880"/>
+            <a:ext cx="10881360" cy="457200"/>
           </a:xfrm>
           <a:prstGeom prst="rect">
             <a:avLst/>
@@ -6790,17 +7415,26 @@
           <a:p>
             <a:pPr algn="l">
               <a:lnSpc>
-                <a:spcPct val="100000"/>
+                <a:spcPct val="105000"/>
               </a:lnSpc>
             </a:pPr>
             <a:r>
-              <a:rPr sz="1200" b="0" i="1">
-                <a:solidFill>
-                  <a:srgbClr val="5A6478"/>
-                </a:solidFill>
-                <a:latin typeface="Calibri"/>
-              </a:rPr>
-              <a:t>Средний sMAPE и MASE по типу декомпозиции — обучаемая выигрывает только при достатке данных.</a:t>
+              <a:rPr sz="1500" b="1" i="0">
+                <a:solidFill>
+                  <a:srgbClr val="E07A5F"/>
+                </a:solidFill>
+                <a:latin typeface="Calibri"/>
+              </a:rPr>
+              <a:t>Главное:  </a:t>
+            </a:r>
+            <a:r>
+              <a:rPr sz="1500" b="0" i="0">
+                <a:solidFill>
+                  <a:srgbClr val="2B2B2B"/>
+                </a:solidFill>
+                <a:latin typeface="Calibri"/>
+              </a:rPr>
+              <a:t>сама по себе обучаемая декомпозиция не гарантирует выигрыша — решает объём данных и режим обучения.</a:t>
             </a:r>
           </a:p>
         </p:txBody>
@@ -6984,7 +7618,7 @@
                 </a:solidFill>
                 <a:latin typeface="Calibri"/>
               </a:rPr>
-              <a:t>Раздел 3. Кто лидирует по частотам</a:t>
+              <a:t>Раздел 3. Классика устойчиво впереди, TimesNet — лучшая нейросеть</a:t>
             </a:r>
           </a:p>
         </p:txBody>
@@ -7067,7 +7701,7 @@
                 </a:solidFill>
                 <a:latin typeface="Calibri"/>
               </a:rPr>
-              <a:t>5 / 12</a:t>
+              <a:t>5 / 13</a:t>
             </a:r>
           </a:p>
         </p:txBody>
@@ -7127,8 +7761,8 @@
         </p:blipFill>
         <p:spPr>
           <a:xfrm>
-            <a:off x="640080" y="2032228"/>
-            <a:ext cx="7315200" cy="3616503"/>
+            <a:off x="640080" y="1871951"/>
+            <a:ext cx="7223760" cy="3571297"/>
           </a:xfrm>
           <a:prstGeom prst="rect">
             <a:avLst/>
@@ -7143,8 +7777,8 @@
         </p:nvSpPr>
         <p:spPr>
           <a:xfrm>
-            <a:off x="8183879" y="1920240"/>
-            <a:ext cx="3383280" cy="3840480"/>
+            <a:off x="8001000" y="1828800"/>
+            <a:ext cx="3566160" cy="4023360"/>
           </a:xfrm>
           <a:prstGeom prst="rect">
             <a:avLst/>
@@ -7162,11 +7796,11 @@
                 <a:spcPct val="112000"/>
               </a:lnSpc>
               <a:spcAft>
-                <a:spcPts val="1200"/>
+                <a:spcPts val="900"/>
               </a:spcAft>
             </a:pPr>
             <a:r>
-              <a:rPr sz="1500" b="1" i="0">
+              <a:rPr sz="1400" b="1" i="0">
                 <a:solidFill>
                   <a:srgbClr val="E07A5F"/>
                 </a:solidFill>
@@ -7175,13 +7809,22 @@
               <a:t>▪  </a:t>
             </a:r>
             <a:r>
-              <a:rPr sz="1500" b="0" i="0">
+              <a:rPr sz="1400" b="1" i="0">
                 <a:solidFill>
                   <a:srgbClr val="2B2B2B"/>
                 </a:solidFill>
                 <a:latin typeface="Calibri"/>
               </a:rPr>
-              <a:t>Классика (ARIMA, ETS, S. Naive) стабильно лидирует</a:t>
+              <a:t>Классика впереди. </a:t>
+            </a:r>
+            <a:r>
+              <a:rPr sz="1400" b="0" i="0">
+                <a:solidFill>
+                  <a:srgbClr val="2B2B2B"/>
+                </a:solidFill>
+                <a:latin typeface="Calibri"/>
+              </a:rPr>
+              <a:t>Auto-ARIMA, ETS и Seasonal Naive занимают верхние ранги на всех шести частотах.</a:t>
             </a:r>
           </a:p>
           <a:p>
@@ -7190,11 +7833,11 @@
                 <a:spcPct val="112000"/>
               </a:lnSpc>
               <a:spcAft>
-                <a:spcPts val="1200"/>
+                <a:spcPts val="900"/>
               </a:spcAft>
             </a:pPr>
             <a:r>
-              <a:rPr sz="1500" b="1" i="0">
+              <a:rPr sz="1400" b="1" i="0">
                 <a:solidFill>
                   <a:srgbClr val="E07A5F"/>
                 </a:solidFill>
@@ -7203,13 +7846,22 @@
               <a:t>▪  </a:t>
             </a:r>
             <a:r>
-              <a:rPr sz="1500" b="0" i="0">
+              <a:rPr sz="1400" b="1" i="0">
                 <a:solidFill>
                   <a:srgbClr val="2B2B2B"/>
                 </a:solidFill>
                 <a:latin typeface="Calibri"/>
               </a:rPr>
-              <a:t>TimesNet — лучшая нейросеть, средний ранг ≈ 4</a:t>
+              <a:t>TimesNet — лучшая нейросеть, </a:t>
+            </a:r>
+            <a:r>
+              <a:rPr sz="1400" b="0" i="0">
+                <a:solidFill>
+                  <a:srgbClr val="2B2B2B"/>
+                </a:solidFill>
+                <a:latin typeface="Calibri"/>
+              </a:rPr>
+              <a:t>средний ранг ≈ 4, вплотную к классике.</a:t>
             </a:r>
           </a:p>
           <a:p>
@@ -7218,11 +7870,11 @@
                 <a:spcPct val="112000"/>
               </a:lnSpc>
               <a:spcAft>
-                <a:spcPts val="1200"/>
+                <a:spcPts val="900"/>
               </a:spcAft>
             </a:pPr>
             <a:r>
-              <a:rPr sz="1500" b="1" i="0">
+              <a:rPr sz="1400" b="1" i="0">
                 <a:solidFill>
                   <a:srgbClr val="E07A5F"/>
                 </a:solidFill>
@@ -7231,13 +7883,22 @@
               <a:t>▪  </a:t>
             </a:r>
             <a:r>
-              <a:rPr sz="1500" b="0" i="0">
+              <a:rPr sz="1400" b="1" i="0">
                 <a:solidFill>
                   <a:srgbClr val="2B2B2B"/>
                 </a:solidFill>
                 <a:latin typeface="Calibri"/>
               </a:rPr>
-              <a:t>Трансформеры в per-series режиме отстают</a:t>
+              <a:t>Трансформеры </a:t>
+            </a:r>
+            <a:r>
+              <a:rPr sz="1400" b="0" i="0">
+                <a:solidFill>
+                  <a:srgbClr val="2B2B2B"/>
+                </a:solidFill>
+                <a:latin typeface="Calibri"/>
+              </a:rPr>
+              <a:t>(Autoformer, FEDformer) в режиме обучения на одном ряде заметно отстают.</a:t>
             </a:r>
           </a:p>
           <a:p>
@@ -7246,17 +7907,118 @@
                 <a:spcPct val="112000"/>
               </a:lnSpc>
               <a:spcAft>
-                <a:spcPts val="1200"/>
+                <a:spcPts val="900"/>
               </a:spcAft>
             </a:pPr>
             <a:r>
+              <a:rPr sz="1400" b="1" i="0">
+                <a:solidFill>
+                  <a:srgbClr val="E07A5F"/>
+                </a:solidFill>
+                <a:latin typeface="Calibri"/>
+              </a:rPr>
+              <a:t>▪  </a:t>
+            </a:r>
+            <a:r>
+              <a:rPr sz="1400" b="1" i="0">
+                <a:solidFill>
+                  <a:srgbClr val="2B2B2B"/>
+                </a:solidFill>
+                <a:latin typeface="Calibri"/>
+              </a:rPr>
+              <a:t>Тенденция: </a:t>
+            </a:r>
+            <a:r>
+              <a:rPr sz="1400" b="0" i="0">
+                <a:solidFill>
+                  <a:srgbClr val="2B2B2B"/>
+                </a:solidFill>
+                <a:latin typeface="Calibri"/>
+              </a:rPr>
+              <a:t>чем длиннее ряды, тем выше поднимаются нейросети.</a:t>
+            </a:r>
+          </a:p>
+        </p:txBody>
+      </p:sp>
+      <p:sp>
+        <p:nvSpPr>
+          <p:cNvPr id="11" name="Rectangle 10"/>
+          <p:cNvSpPr/>
+          <p:nvPr/>
+        </p:nvSpPr>
+        <p:spPr>
+          <a:xfrm>
+            <a:off x="640080" y="5897880"/>
+            <a:ext cx="38100" cy="384048"/>
+          </a:xfrm>
+          <a:prstGeom prst="rect">
+            <a:avLst/>
+          </a:prstGeom>
+          <a:solidFill>
+            <a:srgbClr val="E07A5F"/>
+          </a:solidFill>
+          <a:ln>
+            <a:noFill/>
+          </a:ln>
+          <a:effectLst/>
+        </p:spPr>
+        <p:style>
+          <a:lnRef idx="1">
+            <a:schemeClr val="accent1"/>
+          </a:lnRef>
+          <a:fillRef idx="3">
+            <a:schemeClr val="accent1"/>
+          </a:fillRef>
+          <a:effectRef idx="2">
+            <a:schemeClr val="accent1"/>
+          </a:effectRef>
+          <a:fontRef idx="minor">
+            <a:schemeClr val="lt1"/>
+          </a:fontRef>
+        </p:style>
+        <p:txBody>
+          <a:bodyPr rtlCol="0" anchor="ctr"/>
+          <a:lstStyle/>
+          <a:p>
+            <a:pPr algn="ctr"/>
+          </a:p>
+        </p:txBody>
+      </p:sp>
+      <p:sp>
+        <p:nvSpPr>
+          <p:cNvPr id="12" name="TextBox 11"/>
+          <p:cNvSpPr txBox="1"/>
+          <p:nvPr/>
+        </p:nvSpPr>
+        <p:spPr>
+          <a:xfrm>
+            <a:off x="804672" y="5897880"/>
+            <a:ext cx="10881360" cy="457200"/>
+          </a:xfrm>
+          <a:prstGeom prst="rect">
+            <a:avLst/>
+          </a:prstGeom>
+          <a:noFill/>
+        </p:spPr>
+        <p:txBody>
+          <a:bodyPr wrap="square" anchor="t" lIns="0" rIns="0" tIns="0" bIns="0">
+            <a:spAutoFit/>
+          </a:bodyPr>
+          <a:lstStyle/>
+          <a:p>
+            <a:pPr algn="l">
+              <a:lnSpc>
+                <a:spcPct val="105000"/>
+              </a:lnSpc>
+            </a:pPr>
+            <a:r>
               <a:rPr sz="1500" b="1" i="0">
                 <a:solidFill>
                   <a:srgbClr val="E07A5F"/>
                 </a:solidFill>
                 <a:latin typeface="Calibri"/>
               </a:rPr>
-              <a:t>▪  </a:t>
+              <a:t>Главное:  </a:t>
             </a:r>
             <a:r>
               <a:rPr sz="1500" b="0" i="0">
@@ -7265,7 +8027,7 @@
                 </a:solidFill>
                 <a:latin typeface="Calibri"/>
               </a:rPr>
-              <a:t>С ростом частоты разрыв сокращается</a:t>
+              <a:t>в обычном режиме классика побеждает, но разрыв сокращается с ростом длины ряда.</a:t>
             </a:r>
           </a:p>
         </p:txBody>
@@ -7449,7 +8211,7 @@
                 </a:solidFill>
                 <a:latin typeface="Calibri"/>
               </a:rPr>
-              <a:t>Раздел 3. Где нейросети догоняют классику</a:t>
+              <a:t>Раздел 3. Порог длины ряда определяет исход сравнения</a:t>
             </a:r>
           </a:p>
         </p:txBody>
@@ -7532,7 +8294,7 @@
                 </a:solidFill>
                 <a:latin typeface="Calibri"/>
               </a:rPr>
-              <a:t>6 / 12</a:t>
+              <a:t>6 / 13</a:t>
             </a:r>
           </a:p>
         </p:txBody>
@@ -7592,8 +8354,8 @@
         </p:blipFill>
         <p:spPr>
           <a:xfrm>
-            <a:off x="640080" y="2373834"/>
-            <a:ext cx="7132320" cy="2933292"/>
+            <a:off x="640080" y="2209757"/>
+            <a:ext cx="7040880" cy="2895685"/>
           </a:xfrm>
           <a:prstGeom prst="rect">
             <a:avLst/>
@@ -7608,7 +8370,7 @@
         </p:nvSpPr>
         <p:spPr>
           <a:xfrm>
-            <a:off x="7955279" y="1828800"/>
+            <a:off x="7909560" y="1828800"/>
             <a:ext cx="3657600" cy="365760"/>
           </a:xfrm>
           <a:prstGeom prst="rect">
@@ -7628,7 +8390,7 @@
               </a:lnSpc>
             </a:pPr>
             <a:r>
-              <a:rPr sz="1700" b="1" i="0">
+              <a:rPr sz="1600" b="1" i="0">
                 <a:solidFill>
                   <a:srgbClr val="1F2A4E"/>
                 </a:solidFill>
@@ -7647,8 +8409,8 @@
         </p:nvSpPr>
         <p:spPr>
           <a:xfrm>
-            <a:off x="7955279" y="2377440"/>
-            <a:ext cx="3611880" cy="2743200"/>
+            <a:off x="7909560" y="2331720"/>
+            <a:ext cx="3657600" cy="3291840"/>
           </a:xfrm>
           <a:prstGeom prst="rect">
             <a:avLst/>
@@ -7666,11 +8428,11 @@
                 <a:spcPct val="112000"/>
               </a:lnSpc>
               <a:spcAft>
-                <a:spcPts val="1100"/>
+                <a:spcPts val="1000"/>
               </a:spcAft>
             </a:pPr>
             <a:r>
-              <a:rPr sz="1500" b="1" i="0">
+              <a:rPr sz="1400" b="1" i="0">
                 <a:solidFill>
                   <a:srgbClr val="E07A5F"/>
                 </a:solidFill>
@@ -7679,13 +8441,22 @@
               <a:t>▪  </a:t>
             </a:r>
             <a:r>
-              <a:rPr sz="1500" b="0" i="0">
+              <a:rPr sz="1400" b="1" i="0">
                 <a:solidFill>
                   <a:srgbClr val="2B2B2B"/>
                 </a:solidFill>
                 <a:latin typeface="Calibri"/>
               </a:rPr>
-              <a:t>Короткие ряды — преимущество классики</a:t>
+              <a:t>Короткие ряды </a:t>
+            </a:r>
+            <a:r>
+              <a:rPr sz="1400" b="0" i="0">
+                <a:solidFill>
+                  <a:srgbClr val="2B2B2B"/>
+                </a:solidFill>
+                <a:latin typeface="Calibri"/>
+              </a:rPr>
+              <a:t>— уверенное преимущество классики.</a:t>
             </a:r>
           </a:p>
           <a:p>
@@ -7694,11 +8465,11 @@
                 <a:spcPct val="112000"/>
               </a:lnSpc>
               <a:spcAft>
-                <a:spcPts val="1100"/>
+                <a:spcPts val="1000"/>
               </a:spcAft>
             </a:pPr>
             <a:r>
-              <a:rPr sz="1500" b="1" i="0">
+              <a:rPr sz="1400" b="1" i="0">
                 <a:solidFill>
                   <a:srgbClr val="E07A5F"/>
                 </a:solidFill>
@@ -7707,13 +8478,22 @@
               <a:t>▪  </a:t>
             </a:r>
             <a:r>
-              <a:rPr sz="1500" b="0" i="0">
+              <a:rPr sz="1400" b="1" i="0">
                 <a:solidFill>
                   <a:srgbClr val="2B2B2B"/>
                 </a:solidFill>
                 <a:latin typeface="Calibri"/>
               </a:rPr>
-              <a:t>Длинные ежедневные ряды M4 — нейросети конкурентоспособны</a:t>
+              <a:t>Длинные ежедневные ряды M4 </a:t>
+            </a:r>
+            <a:r>
+              <a:rPr sz="1400" b="0" i="0">
+                <a:solidFill>
+                  <a:srgbClr val="2B2B2B"/>
+                </a:solidFill>
+                <a:latin typeface="Calibri"/>
+              </a:rPr>
+              <a:t>— нейросети конкурентоспособны.</a:t>
             </a:r>
           </a:p>
           <a:p>
@@ -7722,17 +8502,155 @@
                 <a:spcPct val="112000"/>
               </a:lnSpc>
               <a:spcAft>
-                <a:spcPts val="1100"/>
+                <a:spcPts val="1000"/>
               </a:spcAft>
             </a:pPr>
             <a:r>
+              <a:rPr sz="1400" b="1" i="0">
+                <a:solidFill>
+                  <a:srgbClr val="E07A5F"/>
+                </a:solidFill>
+                <a:latin typeface="Calibri"/>
+              </a:rPr>
+              <a:t>▪  </a:t>
+            </a:r>
+            <a:r>
+              <a:rPr sz="1400" b="1" i="0">
+                <a:solidFill>
+                  <a:srgbClr val="2B2B2B"/>
+                </a:solidFill>
+                <a:latin typeface="Calibri"/>
+              </a:rPr>
+              <a:t>TimesNet (3.62) </a:t>
+            </a:r>
+            <a:r>
+              <a:rPr sz="1400" b="0" i="0">
+                <a:solidFill>
+                  <a:srgbClr val="2B2B2B"/>
+                </a:solidFill>
+                <a:latin typeface="Calibri"/>
+              </a:rPr>
+              <a:t>вплотную к Auto-ARIMA (3.22) и ETS (3.46).</a:t>
+            </a:r>
+          </a:p>
+          <a:p>
+            <a:pPr algn="l">
+              <a:lnSpc>
+                <a:spcPct val="112000"/>
+              </a:lnSpc>
+              <a:spcAft>
+                <a:spcPts val="1000"/>
+              </a:spcAft>
+            </a:pPr>
+            <a:r>
+              <a:rPr sz="1400" b="1" i="0">
+                <a:solidFill>
+                  <a:srgbClr val="E07A5F"/>
+                </a:solidFill>
+                <a:latin typeface="Calibri"/>
+              </a:rPr>
+              <a:t>▪  </a:t>
+            </a:r>
+            <a:r>
+              <a:rPr sz="1400" b="1" i="0">
+                <a:solidFill>
+                  <a:srgbClr val="2B2B2B"/>
+                </a:solidFill>
+                <a:latin typeface="Calibri"/>
+              </a:rPr>
+              <a:t>Prophet </a:t>
+            </a:r>
+            <a:r>
+              <a:rPr sz="1400" b="0" i="0">
+                <a:solidFill>
+                  <a:srgbClr val="2B2B2B"/>
+                </a:solidFill>
+                <a:latin typeface="Calibri"/>
+              </a:rPr>
+              <a:t>стоит особняком — слаб на недельной сезонности.</a:t>
+            </a:r>
+          </a:p>
+        </p:txBody>
+      </p:sp>
+      <p:sp>
+        <p:nvSpPr>
+          <p:cNvPr id="12" name="Rectangle 11"/>
+          <p:cNvSpPr/>
+          <p:nvPr/>
+        </p:nvSpPr>
+        <p:spPr>
+          <a:xfrm>
+            <a:off x="640080" y="5897880"/>
+            <a:ext cx="38100" cy="384048"/>
+          </a:xfrm>
+          <a:prstGeom prst="rect">
+            <a:avLst/>
+          </a:prstGeom>
+          <a:solidFill>
+            <a:srgbClr val="E07A5F"/>
+          </a:solidFill>
+          <a:ln>
+            <a:noFill/>
+          </a:ln>
+          <a:effectLst/>
+        </p:spPr>
+        <p:style>
+          <a:lnRef idx="1">
+            <a:schemeClr val="accent1"/>
+          </a:lnRef>
+          <a:fillRef idx="3">
+            <a:schemeClr val="accent1"/>
+          </a:fillRef>
+          <a:effectRef idx="2">
+            <a:schemeClr val="accent1"/>
+          </a:effectRef>
+          <a:fontRef idx="minor">
+            <a:schemeClr val="lt1"/>
+          </a:fontRef>
+        </p:style>
+        <p:txBody>
+          <a:bodyPr rtlCol="0" anchor="ctr"/>
+          <a:lstStyle/>
+          <a:p>
+            <a:pPr algn="ctr"/>
+          </a:p>
+        </p:txBody>
+      </p:sp>
+      <p:sp>
+        <p:nvSpPr>
+          <p:cNvPr id="13" name="TextBox 12"/>
+          <p:cNvSpPr txBox="1"/>
+          <p:nvPr/>
+        </p:nvSpPr>
+        <p:spPr>
+          <a:xfrm>
+            <a:off x="804672" y="5897880"/>
+            <a:ext cx="10881360" cy="457200"/>
+          </a:xfrm>
+          <a:prstGeom prst="rect">
+            <a:avLst/>
+          </a:prstGeom>
+          <a:noFill/>
+        </p:spPr>
+        <p:txBody>
+          <a:bodyPr wrap="square" anchor="t" lIns="0" rIns="0" tIns="0" bIns="0">
+            <a:spAutoFit/>
+          </a:bodyPr>
+          <a:lstStyle/>
+          <a:p>
+            <a:pPr algn="l">
+              <a:lnSpc>
+                <a:spcPct val="105000"/>
+              </a:lnSpc>
+            </a:pPr>
+            <a:r>
               <a:rPr sz="1500" b="1" i="0">
                 <a:solidFill>
                   <a:srgbClr val="E07A5F"/>
                 </a:solidFill>
                 <a:latin typeface="Calibri"/>
               </a:rPr>
-              <a:t>▪  </a:t>
+              <a:t>Главное:  </a:t>
             </a:r>
             <a:r>
               <a:rPr sz="1500" b="0" i="0">
@@ -7741,7 +8659,7 @@
                 </a:solidFill>
                 <a:latin typeface="Calibri"/>
               </a:rPr>
-              <a:t>TimesNet вплотную к Auto-ARIMA</a:t>
+              <a:t>ниже порога длины лидирует классика, выше — нейросети выходят на её уровень.</a:t>
             </a:r>
           </a:p>
         </p:txBody>
@@ -8008,7 +8926,7 @@
                 </a:solidFill>
                 <a:latin typeface="Calibri"/>
               </a:rPr>
-              <a:t>7 / 12</a:t>
+              <a:t>7 / 13</a:t>
             </a:r>
           </a:p>
         </p:txBody>
@@ -8068,8 +8986,8 @@
         </p:blipFill>
         <p:spPr>
           <a:xfrm>
-            <a:off x="640080" y="2670510"/>
-            <a:ext cx="7406640" cy="2248499"/>
+            <a:off x="640080" y="2501510"/>
+            <a:ext cx="7315200" cy="2220740"/>
           </a:xfrm>
           <a:prstGeom prst="rect">
             <a:avLst/>
@@ -8084,7 +9002,7 @@
         </p:nvSpPr>
         <p:spPr>
           <a:xfrm>
-            <a:off x="8321040" y="1828800"/>
+            <a:off x="8229600" y="1783080"/>
             <a:ext cx="2743200" cy="868680"/>
           </a:xfrm>
           <a:prstGeom prst="rect">
@@ -8123,7 +9041,7 @@
         </p:nvSpPr>
         <p:spPr>
           <a:xfrm>
-            <a:off x="8321040" y="2606040"/>
+            <a:off x="8229600" y="2560320"/>
             <a:ext cx="2743200" cy="640080"/>
           </a:xfrm>
           <a:prstGeom prst="rect">
@@ -8149,7 +9067,7 @@
                 </a:solidFill>
                 <a:latin typeface="Calibri"/>
               </a:rPr>
-              <a:t>DLinear — наибольший выигрыш</a:t>
+              <a:t>DLinear — наибольший выигрыш от предобучения</a:t>
             </a:r>
           </a:p>
         </p:txBody>
@@ -8162,7 +9080,7 @@
         </p:nvSpPr>
         <p:spPr>
           <a:xfrm>
-            <a:off x="8321040" y="3291840"/>
+            <a:off x="8229600" y="3154680"/>
             <a:ext cx="2743200" cy="868680"/>
           </a:xfrm>
           <a:prstGeom prst="rect">
@@ -8201,7 +9119,7 @@
         </p:nvSpPr>
         <p:spPr>
           <a:xfrm>
-            <a:off x="8321040" y="4069080"/>
+            <a:off x="8229600" y="3931920"/>
             <a:ext cx="2743200" cy="640080"/>
           </a:xfrm>
           <a:prstGeom prst="rect">
@@ -8240,7 +9158,7 @@
         </p:nvSpPr>
         <p:spPr>
           <a:xfrm>
-            <a:off x="8321040" y="4663440"/>
+            <a:off x="8229600" y="4526280"/>
             <a:ext cx="2743200" cy="868680"/>
           </a:xfrm>
           <a:prstGeom prst="rect">
@@ -8279,7 +9197,7 @@
         </p:nvSpPr>
         <p:spPr>
           <a:xfrm>
-            <a:off x="8321040" y="5440680"/>
+            <a:off x="8229600" y="5303520"/>
             <a:ext cx="2743200" cy="640080"/>
           </a:xfrm>
           <a:prstGeom prst="rect">
@@ -8306,6 +9224,98 @@
                 <a:latin typeface="Calibri"/>
               </a:rPr>
               <a:t>Helformer</a:t>
+            </a:r>
+          </a:p>
+        </p:txBody>
+      </p:sp>
+      <p:sp>
+        <p:nvSpPr>
+          <p:cNvPr id="16" name="Rectangle 15"/>
+          <p:cNvSpPr/>
+          <p:nvPr/>
+        </p:nvSpPr>
+        <p:spPr>
+          <a:xfrm>
+            <a:off x="640080" y="5897880"/>
+            <a:ext cx="38100" cy="384048"/>
+          </a:xfrm>
+          <a:prstGeom prst="rect">
+            <a:avLst/>
+          </a:prstGeom>
+          <a:solidFill>
+            <a:srgbClr val="E07A5F"/>
+          </a:solidFill>
+          <a:ln>
+            <a:noFill/>
+          </a:ln>
+          <a:effectLst/>
+        </p:spPr>
+        <p:style>
+          <a:lnRef idx="1">
+            <a:schemeClr val="accent1"/>
+          </a:lnRef>
+          <a:fillRef idx="3">
+            <a:schemeClr val="accent1"/>
+          </a:fillRef>
+          <a:effectRef idx="2">
+            <a:schemeClr val="accent1"/>
+          </a:effectRef>
+          <a:fontRef idx="minor">
+            <a:schemeClr val="lt1"/>
+          </a:fontRef>
+        </p:style>
+        <p:txBody>
+          <a:bodyPr rtlCol="0" anchor="ctr"/>
+          <a:lstStyle/>
+          <a:p>
+            <a:pPr algn="ctr"/>
+          </a:p>
+        </p:txBody>
+      </p:sp>
+      <p:sp>
+        <p:nvSpPr>
+          <p:cNvPr id="17" name="TextBox 16"/>
+          <p:cNvSpPr txBox="1"/>
+          <p:nvPr/>
+        </p:nvSpPr>
+        <p:spPr>
+          <a:xfrm>
+            <a:off x="804672" y="5897880"/>
+            <a:ext cx="10881360" cy="457200"/>
+          </a:xfrm>
+          <a:prstGeom prst="rect">
+            <a:avLst/>
+          </a:prstGeom>
+          <a:noFill/>
+        </p:spPr>
+        <p:txBody>
+          <a:bodyPr wrap="square" anchor="t" lIns="0" rIns="0" tIns="0" bIns="0">
+            <a:spAutoFit/>
+          </a:bodyPr>
+          <a:lstStyle/>
+          <a:p>
+            <a:pPr algn="l">
+              <a:lnSpc>
+                <a:spcPct val="105000"/>
+              </a:lnSpc>
+            </a:pPr>
+            <a:r>
+              <a:rPr sz="1500" b="1" i="0">
+                <a:solidFill>
+                  <a:srgbClr val="E07A5F"/>
+                </a:solidFill>
+                <a:latin typeface="Calibri"/>
+              </a:rPr>
+              <a:t>Главное:  </a:t>
+            </a:r>
+            <a:r>
+              <a:rPr sz="1500" b="0" i="0">
+                <a:solidFill>
+                  <a:srgbClr val="2B2B2B"/>
+                </a:solidFill>
+                <a:latin typeface="Calibri"/>
+              </a:rPr>
+              <a:t>предобучение на корпусе рядов превращает слабые в обычном режиме нейросети в сильные.</a:t>
             </a:r>
           </a:p>
         </p:txBody>
@@ -8489,7 +9499,7 @@
                 </a:solidFill>
                 <a:latin typeface="Calibri"/>
               </a:rPr>
-              <a:t>Раздел 3. M3 monthly и M4 daily</a:t>
+              <a:t>Раздел 3. Превосходство на среднечастотных и длинных рядах</a:t>
             </a:r>
           </a:p>
         </p:txBody>
@@ -8572,7 +9582,7 @@
                 </a:solidFill>
                 <a:latin typeface="Calibri"/>
               </a:rPr>
-              <a:t>8 / 12</a:t>
+              <a:t>8 / 13</a:t>
             </a:r>
           </a:p>
         </p:txBody>
@@ -8632,8 +9642,8 @@
         </p:blipFill>
         <p:spPr>
           <a:xfrm>
-            <a:off x="640080" y="2270672"/>
-            <a:ext cx="7223760" cy="3048176"/>
+            <a:off x="640080" y="2126376"/>
+            <a:ext cx="7040880" cy="2971007"/>
           </a:xfrm>
           <a:prstGeom prst="rect">
             <a:avLst/>
@@ -8648,8 +9658,8 @@
         </p:nvSpPr>
         <p:spPr>
           <a:xfrm>
-            <a:off x="8046720" y="1920240"/>
-            <a:ext cx="3520440" cy="3657600"/>
+            <a:off x="7909560" y="1828800"/>
+            <a:ext cx="3657600" cy="3840480"/>
           </a:xfrm>
           <a:prstGeom prst="rect">
             <a:avLst/>
@@ -8667,11 +9677,11 @@
                 <a:spcPct val="112000"/>
               </a:lnSpc>
               <a:spcAft>
-                <a:spcPts val="1300"/>
+                <a:spcPts val="1100"/>
               </a:spcAft>
             </a:pPr>
             <a:r>
-              <a:rPr sz="1500" b="1" i="0">
+              <a:rPr sz="1400" b="1" i="0">
                 <a:solidFill>
                   <a:srgbClr val="E07A5F"/>
                 </a:solidFill>
@@ -8680,13 +9690,22 @@
               <a:t>▪  </a:t>
             </a:r>
             <a:r>
-              <a:rPr sz="1500" b="0" i="0">
+              <a:rPr sz="1400" b="1" i="0">
                 <a:solidFill>
                   <a:srgbClr val="2B2B2B"/>
                 </a:solidFill>
                 <a:latin typeface="Calibri"/>
               </a:rPr>
-              <a:t>M3 monthly: предобученный TimesNet точнее ETS</a:t>
+              <a:t>M3 monthly: </a:t>
+            </a:r>
+            <a:r>
+              <a:rPr sz="1400" b="0" i="0">
+                <a:solidFill>
+                  <a:srgbClr val="2B2B2B"/>
+                </a:solidFill>
+                <a:latin typeface="Calibri"/>
+              </a:rPr>
+              <a:t>предобученный TimesNet (13.68) точнее ETS (17.42).</a:t>
             </a:r>
           </a:p>
           <a:p>
@@ -8695,11 +9714,11 @@
                 <a:spcPct val="112000"/>
               </a:lnSpc>
               <a:spcAft>
-                <a:spcPts val="1300"/>
+                <a:spcPts val="1100"/>
               </a:spcAft>
             </a:pPr>
             <a:r>
-              <a:rPr sz="1500" b="1" i="0">
+              <a:rPr sz="1400" b="1" i="0">
                 <a:solidFill>
                   <a:srgbClr val="E07A5F"/>
                 </a:solidFill>
@@ -8708,13 +9727,22 @@
               <a:t>▪  </a:t>
             </a:r>
             <a:r>
-              <a:rPr sz="1500" b="0" i="0">
+              <a:rPr sz="1400" b="1" i="0">
                 <a:solidFill>
                   <a:srgbClr val="2B2B2B"/>
                 </a:solidFill>
                 <a:latin typeface="Calibri"/>
               </a:rPr>
-              <a:t>M4 daily: предобученный PatchTST обходит Auto-ARIMA и ETS</a:t>
+              <a:t>M4 daily: </a:t>
+            </a:r>
+            <a:r>
+              <a:rPr sz="1400" b="0" i="0">
+                <a:solidFill>
+                  <a:srgbClr val="2B2B2B"/>
+                </a:solidFill>
+                <a:latin typeface="Calibri"/>
+              </a:rPr>
+              <a:t>предобученный PatchTST (2.36) обходит Auto-ARIMA (3.22) и ETS (3.46).</a:t>
             </a:r>
           </a:p>
           <a:p>
@@ -8723,17 +9751,118 @@
                 <a:spcPct val="112000"/>
               </a:lnSpc>
               <a:spcAft>
-                <a:spcPts val="1300"/>
+                <a:spcPts val="1100"/>
               </a:spcAft>
             </a:pPr>
             <a:r>
+              <a:rPr sz="1400" b="1" i="0">
+                <a:solidFill>
+                  <a:srgbClr val="E07A5F"/>
+                </a:solidFill>
+                <a:latin typeface="Calibri"/>
+              </a:rPr>
+              <a:t>▪  </a:t>
+            </a:r>
+            <a:r>
+              <a:rPr sz="1400" b="1" i="0">
+                <a:solidFill>
+                  <a:srgbClr val="2B2B2B"/>
+                </a:solidFill>
+                <a:latin typeface="Calibri"/>
+              </a:rPr>
+              <a:t>На графике </a:t>
+            </a:r>
+            <a:r>
+              <a:rPr sz="1400" b="0" i="0">
+                <a:solidFill>
+                  <a:srgbClr val="2B2B2B"/>
+                </a:solidFill>
+                <a:latin typeface="Calibri"/>
+              </a:rPr>
+              <a:t>цветные линии предобученных нейросетей идут плотно к чёрной фактической линии, пунктир классики — дальше.</a:t>
+            </a:r>
+          </a:p>
+        </p:txBody>
+      </p:sp>
+      <p:sp>
+        <p:nvSpPr>
+          <p:cNvPr id="11" name="Rectangle 10"/>
+          <p:cNvSpPr/>
+          <p:nvPr/>
+        </p:nvSpPr>
+        <p:spPr>
+          <a:xfrm>
+            <a:off x="640080" y="5897880"/>
+            <a:ext cx="38100" cy="384048"/>
+          </a:xfrm>
+          <a:prstGeom prst="rect">
+            <a:avLst/>
+          </a:prstGeom>
+          <a:solidFill>
+            <a:srgbClr val="E07A5F"/>
+          </a:solidFill>
+          <a:ln>
+            <a:noFill/>
+          </a:ln>
+          <a:effectLst/>
+        </p:spPr>
+        <p:style>
+          <a:lnRef idx="1">
+            <a:schemeClr val="accent1"/>
+          </a:lnRef>
+          <a:fillRef idx="3">
+            <a:schemeClr val="accent1"/>
+          </a:fillRef>
+          <a:effectRef idx="2">
+            <a:schemeClr val="accent1"/>
+          </a:effectRef>
+          <a:fontRef idx="minor">
+            <a:schemeClr val="lt1"/>
+          </a:fontRef>
+        </p:style>
+        <p:txBody>
+          <a:bodyPr rtlCol="0" anchor="ctr"/>
+          <a:lstStyle/>
+          <a:p>
+            <a:pPr algn="ctr"/>
+          </a:p>
+        </p:txBody>
+      </p:sp>
+      <p:sp>
+        <p:nvSpPr>
+          <p:cNvPr id="12" name="TextBox 11"/>
+          <p:cNvSpPr txBox="1"/>
+          <p:nvPr/>
+        </p:nvSpPr>
+        <p:spPr>
+          <a:xfrm>
+            <a:off x="804672" y="5897880"/>
+            <a:ext cx="10881360" cy="457200"/>
+          </a:xfrm>
+          <a:prstGeom prst="rect">
+            <a:avLst/>
+          </a:prstGeom>
+          <a:noFill/>
+        </p:spPr>
+        <p:txBody>
+          <a:bodyPr wrap="square" anchor="t" lIns="0" rIns="0" tIns="0" bIns="0">
+            <a:spAutoFit/>
+          </a:bodyPr>
+          <a:lstStyle/>
+          <a:p>
+            <a:pPr algn="l">
+              <a:lnSpc>
+                <a:spcPct val="105000"/>
+              </a:lnSpc>
+            </a:pPr>
+            <a:r>
               <a:rPr sz="1500" b="1" i="0">
                 <a:solidFill>
                   <a:srgbClr val="E07A5F"/>
                 </a:solidFill>
                 <a:latin typeface="Calibri"/>
               </a:rPr>
-              <a:t>▪  </a:t>
+              <a:t>Главное:  </a:t>
             </a:r>
             <a:r>
               <a:rPr sz="1500" b="0" i="0">
@@ -8742,7 +9871,7 @@
                 </a:solidFill>
                 <a:latin typeface="Calibri"/>
               </a:rPr>
-              <a:t>Предобучение сдвигает порог конкурентоспособности вниз</a:t>
+              <a:t>при достатке данных предобученные нейросети не догоняют, а превосходят лучшую классику.</a:t>
             </a:r>
           </a:p>
         </p:txBody>
@@ -8887,7 +10016,7 @@
                 </a:solidFill>
                 <a:latin typeface="Calibri"/>
               </a:rPr>
-              <a:t>Анализ отдельных рядов</a:t>
+              <a:t>Предобученные нейросети vs классические модели</a:t>
             </a:r>
           </a:p>
         </p:txBody>
@@ -8926,7 +10055,7 @@
                 </a:solidFill>
                 <a:latin typeface="Calibri"/>
               </a:rPr>
-              <a:t>Раздел 3. Где нейросети явно точнее</a:t>
+              <a:t>Раздел 3. Сравнение sMAPE по шести частотным категориям</a:t>
             </a:r>
           </a:p>
         </p:txBody>
@@ -9009,7 +10138,7 @@
                 </a:solidFill>
                 <a:latin typeface="Calibri"/>
               </a:rPr>
-              <a:t>9 / 12</a:t>
+              <a:t>9 / 13</a:t>
             </a:r>
           </a:p>
         </p:txBody>
@@ -9053,66 +10182,2125 @@
           </a:p>
         </p:txBody>
       </p:sp>
-      <p:pic>
-        <p:nvPicPr>
-          <p:cNvPr id="9" name="Picture 8" descr="cherry_D2052.png"/>
-          <p:cNvPicPr>
-            <a:picLocks noChangeAspect="1"/>
-          </p:cNvPicPr>
-          <p:nvPr/>
-        </p:nvPicPr>
-        <p:blipFill>
-          <a:blip r:embed="rId2"/>
-          <a:stretch>
-            <a:fillRect/>
-          </a:stretch>
-        </p:blipFill>
-        <p:spPr>
-          <a:xfrm>
-            <a:off x="640080" y="2193503"/>
-            <a:ext cx="7589520" cy="3202514"/>
-          </a:xfrm>
-          <a:prstGeom prst="rect">
-            <a:avLst/>
-          </a:prstGeom>
-        </p:spPr>
-      </p:pic>
-      <p:sp>
-        <p:nvSpPr>
-          <p:cNvPr id="10" name="TextBox 9"/>
-          <p:cNvSpPr txBox="1"/>
-          <p:nvPr/>
-        </p:nvSpPr>
-        <p:spPr>
-          <a:xfrm>
-            <a:off x="8503920" y="1828800"/>
-            <a:ext cx="2743200" cy="868680"/>
-          </a:xfrm>
-          <a:prstGeom prst="rect">
-            <a:avLst/>
-          </a:prstGeom>
-          <a:noFill/>
-        </p:spPr>
-        <p:txBody>
-          <a:bodyPr wrap="square" anchor="t" lIns="0" rIns="0" tIns="0" bIns="0">
-            <a:spAutoFit/>
-          </a:bodyPr>
-          <a:lstStyle/>
-          <a:p>
-            <a:pPr algn="l">
-              <a:lnSpc>
-                <a:spcPct val="100000"/>
-              </a:lnSpc>
-            </a:pPr>
-            <a:r>
-              <a:rPr sz="4000" b="1" i="0">
-                <a:solidFill>
-                  <a:srgbClr val="E07A5F"/>
-                </a:solidFill>
-                <a:latin typeface="Calibri"/>
-              </a:rPr>
-              <a:t>517</a:t>
-            </a:r>
+      <p:graphicFrame>
+        <p:nvGraphicFramePr>
+          <p:cNvPr id="9" name="Table 8"/>
+          <p:cNvGraphicFramePr>
+            <a:graphicFrameLocks noGrp="1"/>
+          </p:cNvGraphicFramePr>
+          <p:nvPr/>
+        </p:nvGraphicFramePr>
+        <p:xfrm>
+          <a:off x="640080" y="1645920"/>
+          <a:ext cx="10789920" cy="274320"/>
+        </p:xfrm>
+        <a:graphic>
+          <a:graphicData uri="http://schemas.openxmlformats.org/drawingml/2006/table">
+            <a:tbl>
+              <a:tblPr>
+                <a:tableStyleId>{5C22544A-7EE6-4342-B048-85BDC9FD1C3A}</a:tableStyleId>
+              </a:tblPr>
+              <a:tblGrid>
+                <a:gridCol w="3108960"/>
+                <a:gridCol w="1097280"/>
+                <a:gridCol w="1097280"/>
+                <a:gridCol w="1097280"/>
+                <a:gridCol w="1097280"/>
+                <a:gridCol w="1097280"/>
+                <a:gridCol w="1097280"/>
+                <a:gridCol w="1097280"/>
+              </a:tblGrid>
+              <a:tr h="24938">
+                <a:tc>
+                  <a:txBody>
+                    <a:bodyPr wrap="none"/>
+                    <a:lstStyle/>
+                    <a:p>
+                      <a:pPr algn="l"/>
+                      <a:r>
+                        <a:rPr b="1" sz="1250">
+                          <a:solidFill>
+                            <a:srgbClr val="FFFFFF"/>
+                          </a:solidFill>
+                          <a:latin typeface="Calibri"/>
+                        </a:rPr>
+                        <a:t>Модель</a:t>
+                      </a:r>
+                    </a:p>
+                  </a:txBody>
+                  <a:tcPr marL="50800" marR="50800" marT="25400" marB="25400" anchor="ctr">
+                    <a:solidFill>
+                      <a:srgbClr val="1F2A4E"/>
+                    </a:solidFill>
+                  </a:tcPr>
+                </a:tc>
+                <a:tc>
+                  <a:txBody>
+                    <a:bodyPr wrap="none"/>
+                    <a:lstStyle/>
+                    <a:p>
+                      <a:pPr algn="ctr"/>
+                      <a:r>
+                        <a:rPr b="1" sz="1250">
+                          <a:solidFill>
+                            <a:srgbClr val="FFFFFF"/>
+                          </a:solidFill>
+                          <a:latin typeface="Calibri"/>
+                        </a:rPr>
+                        <a:t>M3-Y</a:t>
+                      </a:r>
+                    </a:p>
+                  </a:txBody>
+                  <a:tcPr marL="50800" marR="50800" marT="25400" marB="25400" anchor="ctr">
+                    <a:solidFill>
+                      <a:srgbClr val="1F2A4E"/>
+                    </a:solidFill>
+                  </a:tcPr>
+                </a:tc>
+                <a:tc>
+                  <a:txBody>
+                    <a:bodyPr wrap="none"/>
+                    <a:lstStyle/>
+                    <a:p>
+                      <a:pPr algn="ctr"/>
+                      <a:r>
+                        <a:rPr b="1" sz="1250">
+                          <a:solidFill>
+                            <a:srgbClr val="FFFFFF"/>
+                          </a:solidFill>
+                          <a:latin typeface="Calibri"/>
+                        </a:rPr>
+                        <a:t>M3-Q</a:t>
+                      </a:r>
+                    </a:p>
+                  </a:txBody>
+                  <a:tcPr marL="50800" marR="50800" marT="25400" marB="25400" anchor="ctr">
+                    <a:solidFill>
+                      <a:srgbClr val="1F2A4E"/>
+                    </a:solidFill>
+                  </a:tcPr>
+                </a:tc>
+                <a:tc>
+                  <a:txBody>
+                    <a:bodyPr wrap="none"/>
+                    <a:lstStyle/>
+                    <a:p>
+                      <a:pPr algn="ctr"/>
+                      <a:r>
+                        <a:rPr b="1" sz="1250">
+                          <a:solidFill>
+                            <a:srgbClr val="FFFFFF"/>
+                          </a:solidFill>
+                          <a:latin typeface="Calibri"/>
+                        </a:rPr>
+                        <a:t>M3-M</a:t>
+                      </a:r>
+                    </a:p>
+                  </a:txBody>
+                  <a:tcPr marL="50800" marR="50800" marT="25400" marB="25400" anchor="ctr">
+                    <a:solidFill>
+                      <a:srgbClr val="1F2A4E"/>
+                    </a:solidFill>
+                  </a:tcPr>
+                </a:tc>
+                <a:tc>
+                  <a:txBody>
+                    <a:bodyPr wrap="none"/>
+                    <a:lstStyle/>
+                    <a:p>
+                      <a:pPr algn="ctr"/>
+                      <a:r>
+                        <a:rPr b="1" sz="1250">
+                          <a:solidFill>
+                            <a:srgbClr val="FFFFFF"/>
+                          </a:solidFill>
+                          <a:latin typeface="Calibri"/>
+                        </a:rPr>
+                        <a:t>M4-Q</a:t>
+                      </a:r>
+                    </a:p>
+                  </a:txBody>
+                  <a:tcPr marL="50800" marR="50800" marT="25400" marB="25400" anchor="ctr">
+                    <a:solidFill>
+                      <a:srgbClr val="1F2A4E"/>
+                    </a:solidFill>
+                  </a:tcPr>
+                </a:tc>
+                <a:tc>
+                  <a:txBody>
+                    <a:bodyPr wrap="none"/>
+                    <a:lstStyle/>
+                    <a:p>
+                      <a:pPr algn="ctr"/>
+                      <a:r>
+                        <a:rPr b="1" sz="1250">
+                          <a:solidFill>
+                            <a:srgbClr val="FFFFFF"/>
+                          </a:solidFill>
+                          <a:latin typeface="Calibri"/>
+                        </a:rPr>
+                        <a:t>M4-M</a:t>
+                      </a:r>
+                    </a:p>
+                  </a:txBody>
+                  <a:tcPr marL="50800" marR="50800" marT="25400" marB="25400" anchor="ctr">
+                    <a:solidFill>
+                      <a:srgbClr val="1F2A4E"/>
+                    </a:solidFill>
+                  </a:tcPr>
+                </a:tc>
+                <a:tc>
+                  <a:txBody>
+                    <a:bodyPr wrap="none"/>
+                    <a:lstStyle/>
+                    <a:p>
+                      <a:pPr algn="ctr"/>
+                      <a:r>
+                        <a:rPr b="1" sz="1250">
+                          <a:solidFill>
+                            <a:srgbClr val="FFFFFF"/>
+                          </a:solidFill>
+                          <a:latin typeface="Calibri"/>
+                        </a:rPr>
+                        <a:t>M4-D</a:t>
+                      </a:r>
+                    </a:p>
+                  </a:txBody>
+                  <a:tcPr marL="50800" marR="50800" marT="25400" marB="25400" anchor="ctr">
+                    <a:solidFill>
+                      <a:srgbClr val="1F2A4E"/>
+                    </a:solidFill>
+                  </a:tcPr>
+                </a:tc>
+                <a:tc>
+                  <a:txBody>
+                    <a:bodyPr wrap="none"/>
+                    <a:lstStyle/>
+                    <a:p>
+                      <a:pPr algn="ctr"/>
+                      <a:r>
+                        <a:rPr b="1" sz="1250">
+                          <a:solidFill>
+                            <a:srgbClr val="FFFFFF"/>
+                          </a:solidFill>
+                          <a:latin typeface="Calibri"/>
+                        </a:rPr>
+                        <a:t>Ср.</a:t>
+                      </a:r>
+                    </a:p>
+                  </a:txBody>
+                  <a:tcPr marL="50800" marR="50800" marT="25400" marB="25400" anchor="ctr">
+                    <a:solidFill>
+                      <a:srgbClr val="1F2A4E"/>
+                    </a:solidFill>
+                  </a:tcPr>
+                </a:tc>
+              </a:tr>
+              <a:tr h="24938">
+                <a:tc>
+                  <a:txBody>
+                    <a:bodyPr wrap="none"/>
+                    <a:lstStyle/>
+                    <a:p>
+                      <a:pPr algn="l"/>
+                      <a:r>
+                        <a:rPr b="1" i="1" sz="1200">
+                          <a:solidFill>
+                            <a:srgbClr val="1F2A4E"/>
+                          </a:solidFill>
+                          <a:latin typeface="Calibri"/>
+                        </a:rPr>
+                        <a:t>Классические модели (per-series)</a:t>
+                      </a:r>
+                    </a:p>
+                  </a:txBody>
+                  <a:tcPr marL="50800" marR="50800" marT="25400" marB="25400" anchor="ctr">
+                    <a:solidFill>
+                      <a:srgbClr val="F3F5FA"/>
+                    </a:solidFill>
+                  </a:tcPr>
+                </a:tc>
+                <a:tc>
+                  <a:txBody>
+                    <a:bodyPr wrap="none"/>
+                    <a:lstStyle/>
+                    <a:p>
+                      <a:pPr algn="ctr"/>
+                      <a:r>
+                        <a:rPr b="1" i="1" sz="1200">
+                          <a:solidFill>
+                            <a:srgbClr val="1F2A4E"/>
+                          </a:solidFill>
+                          <a:latin typeface="Calibri"/>
+                        </a:rPr>
+                        <a:t/>
+                      </a:r>
+                    </a:p>
+                  </a:txBody>
+                  <a:tcPr marL="50800" marR="50800" marT="25400" marB="25400" anchor="ctr">
+                    <a:solidFill>
+                      <a:srgbClr val="F3F5FA"/>
+                    </a:solidFill>
+                  </a:tcPr>
+                </a:tc>
+                <a:tc>
+                  <a:txBody>
+                    <a:bodyPr wrap="none"/>
+                    <a:lstStyle/>
+                    <a:p>
+                      <a:pPr algn="ctr"/>
+                      <a:r>
+                        <a:rPr b="1" i="1" sz="1200">
+                          <a:solidFill>
+                            <a:srgbClr val="1F2A4E"/>
+                          </a:solidFill>
+                          <a:latin typeface="Calibri"/>
+                        </a:rPr>
+                        <a:t/>
+                      </a:r>
+                    </a:p>
+                  </a:txBody>
+                  <a:tcPr marL="50800" marR="50800" marT="25400" marB="25400" anchor="ctr">
+                    <a:solidFill>
+                      <a:srgbClr val="F3F5FA"/>
+                    </a:solidFill>
+                  </a:tcPr>
+                </a:tc>
+                <a:tc>
+                  <a:txBody>
+                    <a:bodyPr wrap="none"/>
+                    <a:lstStyle/>
+                    <a:p>
+                      <a:pPr algn="ctr"/>
+                      <a:r>
+                        <a:rPr b="1" i="1" sz="1200">
+                          <a:solidFill>
+                            <a:srgbClr val="1F2A4E"/>
+                          </a:solidFill>
+                          <a:latin typeface="Calibri"/>
+                        </a:rPr>
+                        <a:t/>
+                      </a:r>
+                    </a:p>
+                  </a:txBody>
+                  <a:tcPr marL="50800" marR="50800" marT="25400" marB="25400" anchor="ctr">
+                    <a:solidFill>
+                      <a:srgbClr val="F3F5FA"/>
+                    </a:solidFill>
+                  </a:tcPr>
+                </a:tc>
+                <a:tc>
+                  <a:txBody>
+                    <a:bodyPr wrap="none"/>
+                    <a:lstStyle/>
+                    <a:p>
+                      <a:pPr algn="ctr"/>
+                      <a:r>
+                        <a:rPr b="1" i="1" sz="1200">
+                          <a:solidFill>
+                            <a:srgbClr val="1F2A4E"/>
+                          </a:solidFill>
+                          <a:latin typeface="Calibri"/>
+                        </a:rPr>
+                        <a:t/>
+                      </a:r>
+                    </a:p>
+                  </a:txBody>
+                  <a:tcPr marL="50800" marR="50800" marT="25400" marB="25400" anchor="ctr">
+                    <a:solidFill>
+                      <a:srgbClr val="F3F5FA"/>
+                    </a:solidFill>
+                  </a:tcPr>
+                </a:tc>
+                <a:tc>
+                  <a:txBody>
+                    <a:bodyPr wrap="none"/>
+                    <a:lstStyle/>
+                    <a:p>
+                      <a:pPr algn="ctr"/>
+                      <a:r>
+                        <a:rPr b="1" i="1" sz="1200">
+                          <a:solidFill>
+                            <a:srgbClr val="1F2A4E"/>
+                          </a:solidFill>
+                          <a:latin typeface="Calibri"/>
+                        </a:rPr>
+                        <a:t/>
+                      </a:r>
+                    </a:p>
+                  </a:txBody>
+                  <a:tcPr marL="50800" marR="50800" marT="25400" marB="25400" anchor="ctr">
+                    <a:solidFill>
+                      <a:srgbClr val="F3F5FA"/>
+                    </a:solidFill>
+                  </a:tcPr>
+                </a:tc>
+                <a:tc>
+                  <a:txBody>
+                    <a:bodyPr wrap="none"/>
+                    <a:lstStyle/>
+                    <a:p>
+                      <a:pPr algn="ctr"/>
+                      <a:r>
+                        <a:rPr b="1" i="1" sz="1200">
+                          <a:solidFill>
+                            <a:srgbClr val="1F2A4E"/>
+                          </a:solidFill>
+                          <a:latin typeface="Calibri"/>
+                        </a:rPr>
+                        <a:t/>
+                      </a:r>
+                    </a:p>
+                  </a:txBody>
+                  <a:tcPr marL="50800" marR="50800" marT="25400" marB="25400" anchor="ctr">
+                    <a:solidFill>
+                      <a:srgbClr val="F3F5FA"/>
+                    </a:solidFill>
+                  </a:tcPr>
+                </a:tc>
+                <a:tc>
+                  <a:txBody>
+                    <a:bodyPr wrap="none"/>
+                    <a:lstStyle/>
+                    <a:p>
+                      <a:pPr algn="ctr"/>
+                      <a:r>
+                        <a:rPr b="1" i="1" sz="1200">
+                          <a:solidFill>
+                            <a:srgbClr val="1F2A4E"/>
+                          </a:solidFill>
+                          <a:latin typeface="Calibri"/>
+                        </a:rPr>
+                        <a:t/>
+                      </a:r>
+                    </a:p>
+                  </a:txBody>
+                  <a:tcPr marL="50800" marR="50800" marT="25400" marB="25400" anchor="ctr">
+                    <a:solidFill>
+                      <a:srgbClr val="F3F5FA"/>
+                    </a:solidFill>
+                  </a:tcPr>
+                </a:tc>
+              </a:tr>
+              <a:tr h="24938">
+                <a:tc>
+                  <a:txBody>
+                    <a:bodyPr wrap="none"/>
+                    <a:lstStyle/>
+                    <a:p>
+                      <a:pPr algn="l"/>
+                      <a:r>
+                        <a:rPr sz="1250" b="1">
+                          <a:solidFill>
+                            <a:srgbClr val="5A6478"/>
+                          </a:solidFill>
+                          <a:latin typeface="Calibri"/>
+                        </a:rPr>
+                        <a:t>Auto-ARIMA</a:t>
+                      </a:r>
+                    </a:p>
+                  </a:txBody>
+                  <a:tcPr marL="50800" marR="50800" marT="25400" marB="25400" anchor="ctr">
+                    <a:solidFill>
+                      <a:srgbClr val="F8F9FC"/>
+                    </a:solidFill>
+                  </a:tcPr>
+                </a:tc>
+                <a:tc>
+                  <a:txBody>
+                    <a:bodyPr wrap="none"/>
+                    <a:lstStyle/>
+                    <a:p>
+                      <a:pPr algn="ctr"/>
+                      <a:r>
+                        <a:rPr sz="1250">
+                          <a:solidFill>
+                            <a:srgbClr val="5A6478"/>
+                          </a:solidFill>
+                          <a:latin typeface="Calibri"/>
+                        </a:rPr>
+                        <a:t>17.9</a:t>
+                      </a:r>
+                    </a:p>
+                  </a:txBody>
+                  <a:tcPr marL="50800" marR="50800" marT="25400" marB="25400" anchor="ctr">
+                    <a:solidFill>
+                      <a:srgbClr val="F8F9FC"/>
+                    </a:solidFill>
+                  </a:tcPr>
+                </a:tc>
+                <a:tc>
+                  <a:txBody>
+                    <a:bodyPr wrap="none"/>
+                    <a:lstStyle/>
+                    <a:p>
+                      <a:pPr algn="ctr"/>
+                      <a:r>
+                        <a:rPr sz="1250">
+                          <a:solidFill>
+                            <a:srgbClr val="5A6478"/>
+                          </a:solidFill>
+                          <a:latin typeface="Calibri"/>
+                        </a:rPr>
+                        <a:t>10.9</a:t>
+                      </a:r>
+                    </a:p>
+                  </a:txBody>
+                  <a:tcPr marL="50800" marR="50800" marT="25400" marB="25400" anchor="ctr">
+                    <a:solidFill>
+                      <a:srgbClr val="F8F9FC"/>
+                    </a:solidFill>
+                  </a:tcPr>
+                </a:tc>
+                <a:tc>
+                  <a:txBody>
+                    <a:bodyPr wrap="none"/>
+                    <a:lstStyle/>
+                    <a:p>
+                      <a:pPr algn="ctr"/>
+                      <a:r>
+                        <a:rPr sz="1250">
+                          <a:solidFill>
+                            <a:srgbClr val="5A6478"/>
+                          </a:solidFill>
+                          <a:latin typeface="Calibri"/>
+                        </a:rPr>
+                        <a:t>18.1</a:t>
+                      </a:r>
+                    </a:p>
+                  </a:txBody>
+                  <a:tcPr marL="50800" marR="50800" marT="25400" marB="25400" anchor="ctr">
+                    <a:solidFill>
+                      <a:srgbClr val="F8F9FC"/>
+                    </a:solidFill>
+                  </a:tcPr>
+                </a:tc>
+                <a:tc>
+                  <a:txBody>
+                    <a:bodyPr wrap="none"/>
+                    <a:lstStyle/>
+                    <a:p>
+                      <a:pPr algn="ctr"/>
+                      <a:r>
+                        <a:rPr sz="1250">
+                          <a:solidFill>
+                            <a:srgbClr val="5A6478"/>
+                          </a:solidFill>
+                          <a:latin typeface="Calibri"/>
+                        </a:rPr>
+                        <a:t>10.2</a:t>
+                      </a:r>
+                    </a:p>
+                  </a:txBody>
+                  <a:tcPr marL="50800" marR="50800" marT="25400" marB="25400" anchor="ctr">
+                    <a:solidFill>
+                      <a:srgbClr val="F8F9FC"/>
+                    </a:solidFill>
+                  </a:tcPr>
+                </a:tc>
+                <a:tc>
+                  <a:txBody>
+                    <a:bodyPr wrap="none"/>
+                    <a:lstStyle/>
+                    <a:p>
+                      <a:pPr algn="ctr"/>
+                      <a:r>
+                        <a:rPr sz="1250">
+                          <a:solidFill>
+                            <a:srgbClr val="5A6478"/>
+                          </a:solidFill>
+                          <a:latin typeface="Calibri"/>
+                        </a:rPr>
+                        <a:t>14.7</a:t>
+                      </a:r>
+                    </a:p>
+                  </a:txBody>
+                  <a:tcPr marL="50800" marR="50800" marT="25400" marB="25400" anchor="ctr">
+                    <a:solidFill>
+                      <a:srgbClr val="F8F9FC"/>
+                    </a:solidFill>
+                  </a:tcPr>
+                </a:tc>
+                <a:tc>
+                  <a:txBody>
+                    <a:bodyPr wrap="none"/>
+                    <a:lstStyle/>
+                    <a:p>
+                      <a:pPr algn="ctr"/>
+                      <a:r>
+                        <a:rPr sz="1250">
+                          <a:solidFill>
+                            <a:srgbClr val="5A6478"/>
+                          </a:solidFill>
+                          <a:latin typeface="Calibri"/>
+                        </a:rPr>
+                        <a:t>3.22</a:t>
+                      </a:r>
+                    </a:p>
+                  </a:txBody>
+                  <a:tcPr marL="50800" marR="50800" marT="25400" marB="25400" anchor="ctr">
+                    <a:solidFill>
+                      <a:srgbClr val="F8F9FC"/>
+                    </a:solidFill>
+                  </a:tcPr>
+                </a:tc>
+                <a:tc>
+                  <a:txBody>
+                    <a:bodyPr wrap="none"/>
+                    <a:lstStyle/>
+                    <a:p>
+                      <a:pPr algn="ctr"/>
+                      <a:r>
+                        <a:rPr sz="1250">
+                          <a:solidFill>
+                            <a:srgbClr val="5A6478"/>
+                          </a:solidFill>
+                          <a:latin typeface="Calibri"/>
+                        </a:rPr>
+                        <a:t>12.5</a:t>
+                      </a:r>
+                    </a:p>
+                  </a:txBody>
+                  <a:tcPr marL="50800" marR="50800" marT="25400" marB="25400" anchor="ctr">
+                    <a:solidFill>
+                      <a:srgbClr val="F8F9FC"/>
+                    </a:solidFill>
+                  </a:tcPr>
+                </a:tc>
+              </a:tr>
+              <a:tr h="24938">
+                <a:tc>
+                  <a:txBody>
+                    <a:bodyPr wrap="none"/>
+                    <a:lstStyle/>
+                    <a:p>
+                      <a:pPr algn="l"/>
+                      <a:r>
+                        <a:rPr sz="1250" b="1">
+                          <a:solidFill>
+                            <a:srgbClr val="5A6478"/>
+                          </a:solidFill>
+                          <a:latin typeface="Calibri"/>
+                        </a:rPr>
+                        <a:t>ETS</a:t>
+                      </a:r>
+                    </a:p>
+                  </a:txBody>
+                  <a:tcPr marL="50800" marR="50800" marT="25400" marB="25400" anchor="ctr">
+                    <a:solidFill>
+                      <a:srgbClr val="FFFFFF"/>
+                    </a:solidFill>
+                  </a:tcPr>
+                </a:tc>
+                <a:tc>
+                  <a:txBody>
+                    <a:bodyPr wrap="none"/>
+                    <a:lstStyle/>
+                    <a:p>
+                      <a:pPr algn="ctr"/>
+                      <a:r>
+                        <a:rPr sz="1250">
+                          <a:solidFill>
+                            <a:srgbClr val="5A6478"/>
+                          </a:solidFill>
+                          <a:latin typeface="Calibri"/>
+                        </a:rPr>
+                        <a:t>19.1</a:t>
+                      </a:r>
+                    </a:p>
+                  </a:txBody>
+                  <a:tcPr marL="50800" marR="50800" marT="25400" marB="25400" anchor="ctr">
+                    <a:solidFill>
+                      <a:srgbClr val="FFFFFF"/>
+                    </a:solidFill>
+                  </a:tcPr>
+                </a:tc>
+                <a:tc>
+                  <a:txBody>
+                    <a:bodyPr wrap="none"/>
+                    <a:lstStyle/>
+                    <a:p>
+                      <a:pPr algn="ctr"/>
+                      <a:r>
+                        <a:rPr sz="1250">
+                          <a:solidFill>
+                            <a:srgbClr val="5A6478"/>
+                          </a:solidFill>
+                          <a:latin typeface="Calibri"/>
+                        </a:rPr>
+                        <a:t>10.8</a:t>
+                      </a:r>
+                    </a:p>
+                  </a:txBody>
+                  <a:tcPr marL="50800" marR="50800" marT="25400" marB="25400" anchor="ctr">
+                    <a:solidFill>
+                      <a:srgbClr val="FFFFFF"/>
+                    </a:solidFill>
+                  </a:tcPr>
+                </a:tc>
+                <a:tc>
+                  <a:txBody>
+                    <a:bodyPr wrap="none"/>
+                    <a:lstStyle/>
+                    <a:p>
+                      <a:pPr algn="ctr"/>
+                      <a:r>
+                        <a:rPr sz="1250">
+                          <a:solidFill>
+                            <a:srgbClr val="5A6478"/>
+                          </a:solidFill>
+                          <a:latin typeface="Calibri"/>
+                        </a:rPr>
+                        <a:t>17.4</a:t>
+                      </a:r>
+                    </a:p>
+                  </a:txBody>
+                  <a:tcPr marL="50800" marR="50800" marT="25400" marB="25400" anchor="ctr">
+                    <a:solidFill>
+                      <a:srgbClr val="FFFFFF"/>
+                    </a:solidFill>
+                  </a:tcPr>
+                </a:tc>
+                <a:tc>
+                  <a:txBody>
+                    <a:bodyPr wrap="none"/>
+                    <a:lstStyle/>
+                    <a:p>
+                      <a:pPr algn="ctr"/>
+                      <a:r>
+                        <a:rPr sz="1250">
+                          <a:solidFill>
+                            <a:srgbClr val="5A6478"/>
+                          </a:solidFill>
+                          <a:latin typeface="Calibri"/>
+                        </a:rPr>
+                        <a:t>9.7</a:t>
+                      </a:r>
+                    </a:p>
+                  </a:txBody>
+                  <a:tcPr marL="50800" marR="50800" marT="25400" marB="25400" anchor="ctr">
+                    <a:solidFill>
+                      <a:srgbClr val="FFFFFF"/>
+                    </a:solidFill>
+                  </a:tcPr>
+                </a:tc>
+                <a:tc>
+                  <a:txBody>
+                    <a:bodyPr wrap="none"/>
+                    <a:lstStyle/>
+                    <a:p>
+                      <a:pPr algn="ctr"/>
+                      <a:r>
+                        <a:rPr sz="1250">
+                          <a:solidFill>
+                            <a:srgbClr val="5A6478"/>
+                          </a:solidFill>
+                          <a:latin typeface="Calibri"/>
+                        </a:rPr>
+                        <a:t>15.1</a:t>
+                      </a:r>
+                    </a:p>
+                  </a:txBody>
+                  <a:tcPr marL="50800" marR="50800" marT="25400" marB="25400" anchor="ctr">
+                    <a:solidFill>
+                      <a:srgbClr val="FFFFFF"/>
+                    </a:solidFill>
+                  </a:tcPr>
+                </a:tc>
+                <a:tc>
+                  <a:txBody>
+                    <a:bodyPr wrap="none"/>
+                    <a:lstStyle/>
+                    <a:p>
+                      <a:pPr algn="ctr"/>
+                      <a:r>
+                        <a:rPr sz="1250">
+                          <a:solidFill>
+                            <a:srgbClr val="5A6478"/>
+                          </a:solidFill>
+                          <a:latin typeface="Calibri"/>
+                        </a:rPr>
+                        <a:t>3.46</a:t>
+                      </a:r>
+                    </a:p>
+                  </a:txBody>
+                  <a:tcPr marL="50800" marR="50800" marT="25400" marB="25400" anchor="ctr">
+                    <a:solidFill>
+                      <a:srgbClr val="FFFFFF"/>
+                    </a:solidFill>
+                  </a:tcPr>
+                </a:tc>
+                <a:tc>
+                  <a:txBody>
+                    <a:bodyPr wrap="none"/>
+                    <a:lstStyle/>
+                    <a:p>
+                      <a:pPr algn="ctr"/>
+                      <a:r>
+                        <a:rPr sz="1250">
+                          <a:solidFill>
+                            <a:srgbClr val="5A6478"/>
+                          </a:solidFill>
+                          <a:latin typeface="Calibri"/>
+                        </a:rPr>
+                        <a:t>12.6</a:t>
+                      </a:r>
+                    </a:p>
+                  </a:txBody>
+                  <a:tcPr marL="50800" marR="50800" marT="25400" marB="25400" anchor="ctr">
+                    <a:solidFill>
+                      <a:srgbClr val="FFFFFF"/>
+                    </a:solidFill>
+                  </a:tcPr>
+                </a:tc>
+              </a:tr>
+              <a:tr h="24938">
+                <a:tc>
+                  <a:txBody>
+                    <a:bodyPr wrap="none"/>
+                    <a:lstStyle/>
+                    <a:p>
+                      <a:pPr algn="l"/>
+                      <a:r>
+                        <a:rPr sz="1250" b="1">
+                          <a:solidFill>
+                            <a:srgbClr val="5A6478"/>
+                          </a:solidFill>
+                          <a:latin typeface="Calibri"/>
+                        </a:rPr>
+                        <a:t>Seasonal Naive</a:t>
+                      </a:r>
+                    </a:p>
+                  </a:txBody>
+                  <a:tcPr marL="50800" marR="50800" marT="25400" marB="25400" anchor="ctr">
+                    <a:solidFill>
+                      <a:srgbClr val="F8F9FC"/>
+                    </a:solidFill>
+                  </a:tcPr>
+                </a:tc>
+                <a:tc>
+                  <a:txBody>
+                    <a:bodyPr wrap="none"/>
+                    <a:lstStyle/>
+                    <a:p>
+                      <a:pPr algn="ctr"/>
+                      <a:r>
+                        <a:rPr sz="1250">
+                          <a:solidFill>
+                            <a:srgbClr val="5A6478"/>
+                          </a:solidFill>
+                          <a:latin typeface="Calibri"/>
+                        </a:rPr>
+                        <a:t>17.9</a:t>
+                      </a:r>
+                    </a:p>
+                  </a:txBody>
+                  <a:tcPr marL="50800" marR="50800" marT="25400" marB="25400" anchor="ctr">
+                    <a:solidFill>
+                      <a:srgbClr val="F8F9FC"/>
+                    </a:solidFill>
+                  </a:tcPr>
+                </a:tc>
+                <a:tc>
+                  <a:txBody>
+                    <a:bodyPr wrap="none"/>
+                    <a:lstStyle/>
+                    <a:p>
+                      <a:pPr algn="ctr"/>
+                      <a:r>
+                        <a:rPr sz="1250">
+                          <a:solidFill>
+                            <a:srgbClr val="5A6478"/>
+                          </a:solidFill>
+                          <a:latin typeface="Calibri"/>
+                        </a:rPr>
+                        <a:t>11.1</a:t>
+                      </a:r>
+                    </a:p>
+                  </a:txBody>
+                  <a:tcPr marL="50800" marR="50800" marT="25400" marB="25400" anchor="ctr">
+                    <a:solidFill>
+                      <a:srgbClr val="F8F9FC"/>
+                    </a:solidFill>
+                  </a:tcPr>
+                </a:tc>
+                <a:tc>
+                  <a:txBody>
+                    <a:bodyPr wrap="none"/>
+                    <a:lstStyle/>
+                    <a:p>
+                      <a:pPr algn="ctr"/>
+                      <a:r>
+                        <a:rPr sz="1250">
+                          <a:solidFill>
+                            <a:srgbClr val="5A6478"/>
+                          </a:solidFill>
+                          <a:latin typeface="Calibri"/>
+                        </a:rPr>
+                        <a:t>17.2</a:t>
+                      </a:r>
+                    </a:p>
+                  </a:txBody>
+                  <a:tcPr marL="50800" marR="50800" marT="25400" marB="25400" anchor="ctr">
+                    <a:solidFill>
+                      <a:srgbClr val="F8F9FC"/>
+                    </a:solidFill>
+                  </a:tcPr>
+                </a:tc>
+                <a:tc>
+                  <a:txBody>
+                    <a:bodyPr wrap="none"/>
+                    <a:lstStyle/>
+                    <a:p>
+                      <a:pPr algn="ctr"/>
+                      <a:r>
+                        <a:rPr sz="1250">
+                          <a:solidFill>
+                            <a:srgbClr val="5A6478"/>
+                          </a:solidFill>
+                          <a:latin typeface="Calibri"/>
+                        </a:rPr>
+                        <a:t>12.2</a:t>
+                      </a:r>
+                    </a:p>
+                  </a:txBody>
+                  <a:tcPr marL="50800" marR="50800" marT="25400" marB="25400" anchor="ctr">
+                    <a:solidFill>
+                      <a:srgbClr val="F8F9FC"/>
+                    </a:solidFill>
+                  </a:tcPr>
+                </a:tc>
+                <a:tc>
+                  <a:txBody>
+                    <a:bodyPr wrap="none"/>
+                    <a:lstStyle/>
+                    <a:p>
+                      <a:pPr algn="ctr"/>
+                      <a:r>
+                        <a:rPr sz="1250">
+                          <a:solidFill>
+                            <a:srgbClr val="5A6478"/>
+                          </a:solidFill>
+                          <a:latin typeface="Calibri"/>
+                        </a:rPr>
+                        <a:t>15.9</a:t>
+                      </a:r>
+                    </a:p>
+                  </a:txBody>
+                  <a:tcPr marL="50800" marR="50800" marT="25400" marB="25400" anchor="ctr">
+                    <a:solidFill>
+                      <a:srgbClr val="F8F9FC"/>
+                    </a:solidFill>
+                  </a:tcPr>
+                </a:tc>
+                <a:tc>
+                  <a:txBody>
+                    <a:bodyPr wrap="none"/>
+                    <a:lstStyle/>
+                    <a:p>
+                      <a:pPr algn="ctr"/>
+                      <a:r>
+                        <a:rPr sz="1250">
+                          <a:solidFill>
+                            <a:srgbClr val="5A6478"/>
+                          </a:solidFill>
+                          <a:latin typeface="Calibri"/>
+                        </a:rPr>
+                        <a:t>4.05</a:t>
+                      </a:r>
+                    </a:p>
+                  </a:txBody>
+                  <a:tcPr marL="50800" marR="50800" marT="25400" marB="25400" anchor="ctr">
+                    <a:solidFill>
+                      <a:srgbClr val="F8F9FC"/>
+                    </a:solidFill>
+                  </a:tcPr>
+                </a:tc>
+                <a:tc>
+                  <a:txBody>
+                    <a:bodyPr wrap="none"/>
+                    <a:lstStyle/>
+                    <a:p>
+                      <a:pPr algn="ctr"/>
+                      <a:r>
+                        <a:rPr sz="1250">
+                          <a:solidFill>
+                            <a:srgbClr val="5A6478"/>
+                          </a:solidFill>
+                          <a:latin typeface="Calibri"/>
+                        </a:rPr>
+                        <a:t>13.0</a:t>
+                      </a:r>
+                    </a:p>
+                  </a:txBody>
+                  <a:tcPr marL="50800" marR="50800" marT="25400" marB="25400" anchor="ctr">
+                    <a:solidFill>
+                      <a:srgbClr val="F8F9FC"/>
+                    </a:solidFill>
+                  </a:tcPr>
+                </a:tc>
+              </a:tr>
+              <a:tr h="24938">
+                <a:tc>
+                  <a:txBody>
+                    <a:bodyPr wrap="none"/>
+                    <a:lstStyle/>
+                    <a:p>
+                      <a:pPr algn="l"/>
+                      <a:r>
+                        <a:rPr b="1" i="1" sz="1200">
+                          <a:solidFill>
+                            <a:srgbClr val="1F2A4E"/>
+                          </a:solidFill>
+                          <a:latin typeface="Calibri"/>
+                        </a:rPr>
+                        <a:t>Нейросетевые модели (с предобучением)</a:t>
+                      </a:r>
+                    </a:p>
+                  </a:txBody>
+                  <a:tcPr marL="50800" marR="50800" marT="25400" marB="25400" anchor="ctr">
+                    <a:solidFill>
+                      <a:srgbClr val="F3F5FA"/>
+                    </a:solidFill>
+                  </a:tcPr>
+                </a:tc>
+                <a:tc>
+                  <a:txBody>
+                    <a:bodyPr wrap="none"/>
+                    <a:lstStyle/>
+                    <a:p>
+                      <a:pPr algn="ctr"/>
+                      <a:r>
+                        <a:rPr b="1" i="1" sz="1200">
+                          <a:solidFill>
+                            <a:srgbClr val="1F2A4E"/>
+                          </a:solidFill>
+                          <a:latin typeface="Calibri"/>
+                        </a:rPr>
+                        <a:t/>
+                      </a:r>
+                    </a:p>
+                  </a:txBody>
+                  <a:tcPr marL="50800" marR="50800" marT="25400" marB="25400" anchor="ctr">
+                    <a:solidFill>
+                      <a:srgbClr val="F3F5FA"/>
+                    </a:solidFill>
+                  </a:tcPr>
+                </a:tc>
+                <a:tc>
+                  <a:txBody>
+                    <a:bodyPr wrap="none"/>
+                    <a:lstStyle/>
+                    <a:p>
+                      <a:pPr algn="ctr"/>
+                      <a:r>
+                        <a:rPr b="1" i="1" sz="1200">
+                          <a:solidFill>
+                            <a:srgbClr val="1F2A4E"/>
+                          </a:solidFill>
+                          <a:latin typeface="Calibri"/>
+                        </a:rPr>
+                        <a:t/>
+                      </a:r>
+                    </a:p>
+                  </a:txBody>
+                  <a:tcPr marL="50800" marR="50800" marT="25400" marB="25400" anchor="ctr">
+                    <a:solidFill>
+                      <a:srgbClr val="F3F5FA"/>
+                    </a:solidFill>
+                  </a:tcPr>
+                </a:tc>
+                <a:tc>
+                  <a:txBody>
+                    <a:bodyPr wrap="none"/>
+                    <a:lstStyle/>
+                    <a:p>
+                      <a:pPr algn="ctr"/>
+                      <a:r>
+                        <a:rPr b="1" i="1" sz="1200">
+                          <a:solidFill>
+                            <a:srgbClr val="1F2A4E"/>
+                          </a:solidFill>
+                          <a:latin typeface="Calibri"/>
+                        </a:rPr>
+                        <a:t/>
+                      </a:r>
+                    </a:p>
+                  </a:txBody>
+                  <a:tcPr marL="50800" marR="50800" marT="25400" marB="25400" anchor="ctr">
+                    <a:solidFill>
+                      <a:srgbClr val="F3F5FA"/>
+                    </a:solidFill>
+                  </a:tcPr>
+                </a:tc>
+                <a:tc>
+                  <a:txBody>
+                    <a:bodyPr wrap="none"/>
+                    <a:lstStyle/>
+                    <a:p>
+                      <a:pPr algn="ctr"/>
+                      <a:r>
+                        <a:rPr b="1" i="1" sz="1200">
+                          <a:solidFill>
+                            <a:srgbClr val="1F2A4E"/>
+                          </a:solidFill>
+                          <a:latin typeface="Calibri"/>
+                        </a:rPr>
+                        <a:t/>
+                      </a:r>
+                    </a:p>
+                  </a:txBody>
+                  <a:tcPr marL="50800" marR="50800" marT="25400" marB="25400" anchor="ctr">
+                    <a:solidFill>
+                      <a:srgbClr val="F3F5FA"/>
+                    </a:solidFill>
+                  </a:tcPr>
+                </a:tc>
+                <a:tc>
+                  <a:txBody>
+                    <a:bodyPr wrap="none"/>
+                    <a:lstStyle/>
+                    <a:p>
+                      <a:pPr algn="ctr"/>
+                      <a:r>
+                        <a:rPr b="1" i="1" sz="1200">
+                          <a:solidFill>
+                            <a:srgbClr val="1F2A4E"/>
+                          </a:solidFill>
+                          <a:latin typeface="Calibri"/>
+                        </a:rPr>
+                        <a:t/>
+                      </a:r>
+                    </a:p>
+                  </a:txBody>
+                  <a:tcPr marL="50800" marR="50800" marT="25400" marB="25400" anchor="ctr">
+                    <a:solidFill>
+                      <a:srgbClr val="F3F5FA"/>
+                    </a:solidFill>
+                  </a:tcPr>
+                </a:tc>
+                <a:tc>
+                  <a:txBody>
+                    <a:bodyPr wrap="none"/>
+                    <a:lstStyle/>
+                    <a:p>
+                      <a:pPr algn="ctr"/>
+                      <a:r>
+                        <a:rPr b="1" i="1" sz="1200">
+                          <a:solidFill>
+                            <a:srgbClr val="1F2A4E"/>
+                          </a:solidFill>
+                          <a:latin typeface="Calibri"/>
+                        </a:rPr>
+                        <a:t/>
+                      </a:r>
+                    </a:p>
+                  </a:txBody>
+                  <a:tcPr marL="50800" marR="50800" marT="25400" marB="25400" anchor="ctr">
+                    <a:solidFill>
+                      <a:srgbClr val="F3F5FA"/>
+                    </a:solidFill>
+                  </a:tcPr>
+                </a:tc>
+                <a:tc>
+                  <a:txBody>
+                    <a:bodyPr wrap="none"/>
+                    <a:lstStyle/>
+                    <a:p>
+                      <a:pPr algn="ctr"/>
+                      <a:r>
+                        <a:rPr b="1" i="1" sz="1200">
+                          <a:solidFill>
+                            <a:srgbClr val="1F2A4E"/>
+                          </a:solidFill>
+                          <a:latin typeface="Calibri"/>
+                        </a:rPr>
+                        <a:t/>
+                      </a:r>
+                    </a:p>
+                  </a:txBody>
+                  <a:tcPr marL="50800" marR="50800" marT="25400" marB="25400" anchor="ctr">
+                    <a:solidFill>
+                      <a:srgbClr val="F3F5FA"/>
+                    </a:solidFill>
+                  </a:tcPr>
+                </a:tc>
+              </a:tr>
+              <a:tr h="24938">
+                <a:tc>
+                  <a:txBody>
+                    <a:bodyPr wrap="none"/>
+                    <a:lstStyle/>
+                    <a:p>
+                      <a:pPr algn="l"/>
+                      <a:r>
+                        <a:rPr sz="1250" b="1">
+                          <a:solidFill>
+                            <a:srgbClr val="2B2B2B"/>
+                          </a:solidFill>
+                          <a:latin typeface="Calibri"/>
+                        </a:rPr>
+                        <a:t>DLinear</a:t>
+                      </a:r>
+                    </a:p>
+                  </a:txBody>
+                  <a:tcPr marL="50800" marR="50800" marT="25400" marB="25400" anchor="ctr">
+                    <a:solidFill>
+                      <a:srgbClr val="F8F9FC"/>
+                    </a:solidFill>
+                  </a:tcPr>
+                </a:tc>
+                <a:tc>
+                  <a:txBody>
+                    <a:bodyPr wrap="none"/>
+                    <a:lstStyle/>
+                    <a:p>
+                      <a:pPr algn="ctr"/>
+                      <a:r>
+                        <a:rPr sz="1250">
+                          <a:solidFill>
+                            <a:srgbClr val="2B2B2B"/>
+                          </a:solidFill>
+                          <a:latin typeface="Calibri"/>
+                        </a:rPr>
+                        <a:t>23.7</a:t>
+                      </a:r>
+                    </a:p>
+                  </a:txBody>
+                  <a:tcPr marL="50800" marR="50800" marT="25400" marB="25400" anchor="ctr">
+                    <a:solidFill>
+                      <a:srgbClr val="F8F9FC"/>
+                    </a:solidFill>
+                  </a:tcPr>
+                </a:tc>
+                <a:tc>
+                  <a:txBody>
+                    <a:bodyPr wrap="none"/>
+                    <a:lstStyle/>
+                    <a:p>
+                      <a:pPr algn="ctr"/>
+                      <a:r>
+                        <a:rPr sz="1250">
+                          <a:solidFill>
+                            <a:srgbClr val="2B2B2B"/>
+                          </a:solidFill>
+                          <a:latin typeface="Calibri"/>
+                        </a:rPr>
+                        <a:t>12.7</a:t>
+                      </a:r>
+                    </a:p>
+                  </a:txBody>
+                  <a:tcPr marL="50800" marR="50800" marT="25400" marB="25400" anchor="ctr">
+                    <a:solidFill>
+                      <a:srgbClr val="F8F9FC"/>
+                    </a:solidFill>
+                  </a:tcPr>
+                </a:tc>
+                <a:tc>
+                  <a:txBody>
+                    <a:bodyPr wrap="none"/>
+                    <a:lstStyle/>
+                    <a:p>
+                      <a:pPr algn="ctr"/>
+                      <a:r>
+                        <a:rPr sz="1250">
+                          <a:solidFill>
+                            <a:srgbClr val="2B2B2B"/>
+                          </a:solidFill>
+                          <a:latin typeface="Calibri"/>
+                        </a:rPr>
+                        <a:t>14.0</a:t>
+                      </a:r>
+                    </a:p>
+                  </a:txBody>
+                  <a:tcPr marL="50800" marR="50800" marT="25400" marB="25400" anchor="ctr">
+                    <a:solidFill>
+                      <a:srgbClr val="F8F9FC"/>
+                    </a:solidFill>
+                  </a:tcPr>
+                </a:tc>
+                <a:tc>
+                  <a:txBody>
+                    <a:bodyPr wrap="none"/>
+                    <a:lstStyle/>
+                    <a:p>
+                      <a:pPr algn="ctr"/>
+                      <a:r>
+                        <a:rPr sz="1250">
+                          <a:solidFill>
+                            <a:srgbClr val="2B2B2B"/>
+                          </a:solidFill>
+                          <a:latin typeface="Calibri"/>
+                        </a:rPr>
+                        <a:t>15.4</a:t>
+                      </a:r>
+                    </a:p>
+                  </a:txBody>
+                  <a:tcPr marL="50800" marR="50800" marT="25400" marB="25400" anchor="ctr">
+                    <a:solidFill>
+                      <a:srgbClr val="F8F9FC"/>
+                    </a:solidFill>
+                  </a:tcPr>
+                </a:tc>
+                <a:tc>
+                  <a:txBody>
+                    <a:bodyPr wrap="none"/>
+                    <a:lstStyle/>
+                    <a:p>
+                      <a:pPr algn="ctr"/>
+                      <a:r>
+                        <a:rPr sz="1250">
+                          <a:solidFill>
+                            <a:srgbClr val="2B2B2B"/>
+                          </a:solidFill>
+                          <a:latin typeface="Calibri"/>
+                        </a:rPr>
+                        <a:t>17.2</a:t>
+                      </a:r>
+                    </a:p>
+                  </a:txBody>
+                  <a:tcPr marL="50800" marR="50800" marT="25400" marB="25400" anchor="ctr">
+                    <a:solidFill>
+                      <a:srgbClr val="F8F9FC"/>
+                    </a:solidFill>
+                  </a:tcPr>
+                </a:tc>
+                <a:tc>
+                  <a:txBody>
+                    <a:bodyPr wrap="none"/>
+                    <a:lstStyle/>
+                    <a:p>
+                      <a:pPr algn="ctr"/>
+                      <a:r>
+                        <a:rPr sz="1250">
+                          <a:solidFill>
+                            <a:srgbClr val="2B2B2B"/>
+                          </a:solidFill>
+                          <a:latin typeface="Calibri"/>
+                        </a:rPr>
+                        <a:t>2.44</a:t>
+                      </a:r>
+                    </a:p>
+                  </a:txBody>
+                  <a:tcPr marL="50800" marR="50800" marT="25400" marB="25400" anchor="ctr">
+                    <a:solidFill>
+                      <a:srgbClr val="F8F9FC"/>
+                    </a:solidFill>
+                  </a:tcPr>
+                </a:tc>
+                <a:tc>
+                  <a:txBody>
+                    <a:bodyPr wrap="none"/>
+                    <a:lstStyle/>
+                    <a:p>
+                      <a:pPr algn="ctr"/>
+                      <a:r>
+                        <a:rPr sz="1250">
+                          <a:solidFill>
+                            <a:srgbClr val="2B2B2B"/>
+                          </a:solidFill>
+                          <a:latin typeface="Calibri"/>
+                        </a:rPr>
+                        <a:t>14.2</a:t>
+                      </a:r>
+                    </a:p>
+                  </a:txBody>
+                  <a:tcPr marL="50800" marR="50800" marT="25400" marB="25400" anchor="ctr">
+                    <a:solidFill>
+                      <a:srgbClr val="F8F9FC"/>
+                    </a:solidFill>
+                  </a:tcPr>
+                </a:tc>
+              </a:tr>
+              <a:tr h="24938">
+                <a:tc>
+                  <a:txBody>
+                    <a:bodyPr wrap="none"/>
+                    <a:lstStyle/>
+                    <a:p>
+                      <a:pPr algn="l"/>
+                      <a:r>
+                        <a:rPr sz="1250" b="1">
+                          <a:solidFill>
+                            <a:srgbClr val="2B2B2B"/>
+                          </a:solidFill>
+                          <a:latin typeface="Calibri"/>
+                        </a:rPr>
+                        <a:t>TimesNet</a:t>
+                      </a:r>
+                    </a:p>
+                  </a:txBody>
+                  <a:tcPr marL="50800" marR="50800" marT="25400" marB="25400" anchor="ctr">
+                    <a:solidFill>
+                      <a:srgbClr val="FFFFFF"/>
+                    </a:solidFill>
+                  </a:tcPr>
+                </a:tc>
+                <a:tc>
+                  <a:txBody>
+                    <a:bodyPr wrap="none"/>
+                    <a:lstStyle/>
+                    <a:p>
+                      <a:pPr algn="ctr"/>
+                      <a:r>
+                        <a:rPr sz="1250">
+                          <a:solidFill>
+                            <a:srgbClr val="2B2B2B"/>
+                          </a:solidFill>
+                          <a:latin typeface="Calibri"/>
+                        </a:rPr>
+                        <a:t>25.1</a:t>
+                      </a:r>
+                    </a:p>
+                  </a:txBody>
+                  <a:tcPr marL="50800" marR="50800" marT="25400" marB="25400" anchor="ctr">
+                    <a:solidFill>
+                      <a:srgbClr val="FFFFFF"/>
+                    </a:solidFill>
+                  </a:tcPr>
+                </a:tc>
+                <a:tc>
+                  <a:txBody>
+                    <a:bodyPr wrap="none"/>
+                    <a:lstStyle/>
+                    <a:p>
+                      <a:pPr algn="ctr"/>
+                      <a:r>
+                        <a:rPr sz="1250">
+                          <a:solidFill>
+                            <a:srgbClr val="2B2B2B"/>
+                          </a:solidFill>
+                          <a:latin typeface="Calibri"/>
+                        </a:rPr>
+                        <a:t>12.4</a:t>
+                      </a:r>
+                    </a:p>
+                  </a:txBody>
+                  <a:tcPr marL="50800" marR="50800" marT="25400" marB="25400" anchor="ctr">
+                    <a:solidFill>
+                      <a:srgbClr val="FFFFFF"/>
+                    </a:solidFill>
+                  </a:tcPr>
+                </a:tc>
+                <a:tc>
+                  <a:txBody>
+                    <a:bodyPr wrap="none"/>
+                    <a:lstStyle/>
+                    <a:p>
+                      <a:pPr algn="ctr"/>
+                      <a:r>
+                        <a:rPr sz="1250">
+                          <a:solidFill>
+                            <a:srgbClr val="2B2B2B"/>
+                          </a:solidFill>
+                          <a:latin typeface="Calibri"/>
+                        </a:rPr>
+                        <a:t>13.7</a:t>
+                      </a:r>
+                    </a:p>
+                  </a:txBody>
+                  <a:tcPr marL="50800" marR="50800" marT="25400" marB="25400" anchor="ctr">
+                    <a:solidFill>
+                      <a:srgbClr val="FFFFFF"/>
+                    </a:solidFill>
+                  </a:tcPr>
+                </a:tc>
+                <a:tc>
+                  <a:txBody>
+                    <a:bodyPr wrap="none"/>
+                    <a:lstStyle/>
+                    <a:p>
+                      <a:pPr algn="ctr"/>
+                      <a:r>
+                        <a:rPr sz="1250">
+                          <a:solidFill>
+                            <a:srgbClr val="2B2B2B"/>
+                          </a:solidFill>
+                          <a:latin typeface="Calibri"/>
+                        </a:rPr>
+                        <a:t>22.5</a:t>
+                      </a:r>
+                    </a:p>
+                  </a:txBody>
+                  <a:tcPr marL="50800" marR="50800" marT="25400" marB="25400" anchor="ctr">
+                    <a:solidFill>
+                      <a:srgbClr val="FFFFFF"/>
+                    </a:solidFill>
+                  </a:tcPr>
+                </a:tc>
+                <a:tc>
+                  <a:txBody>
+                    <a:bodyPr wrap="none"/>
+                    <a:lstStyle/>
+                    <a:p>
+                      <a:pPr algn="ctr"/>
+                      <a:r>
+                        <a:rPr sz="1250">
+                          <a:solidFill>
+                            <a:srgbClr val="2B2B2B"/>
+                          </a:solidFill>
+                          <a:latin typeface="Calibri"/>
+                        </a:rPr>
+                        <a:t>17.2</a:t>
+                      </a:r>
+                    </a:p>
+                  </a:txBody>
+                  <a:tcPr marL="50800" marR="50800" marT="25400" marB="25400" anchor="ctr">
+                    <a:solidFill>
+                      <a:srgbClr val="FFFFFF"/>
+                    </a:solidFill>
+                  </a:tcPr>
+                </a:tc>
+                <a:tc>
+                  <a:txBody>
+                    <a:bodyPr wrap="none"/>
+                    <a:lstStyle/>
+                    <a:p>
+                      <a:pPr algn="ctr"/>
+                      <a:r>
+                        <a:rPr sz="1250">
+                          <a:solidFill>
+                            <a:srgbClr val="2B2B2B"/>
+                          </a:solidFill>
+                          <a:latin typeface="Calibri"/>
+                        </a:rPr>
+                        <a:t>2.46</a:t>
+                      </a:r>
+                    </a:p>
+                  </a:txBody>
+                  <a:tcPr marL="50800" marR="50800" marT="25400" marB="25400" anchor="ctr">
+                    <a:solidFill>
+                      <a:srgbClr val="FFFFFF"/>
+                    </a:solidFill>
+                  </a:tcPr>
+                </a:tc>
+                <a:tc>
+                  <a:txBody>
+                    <a:bodyPr wrap="none"/>
+                    <a:lstStyle/>
+                    <a:p>
+                      <a:pPr algn="ctr"/>
+                      <a:r>
+                        <a:rPr sz="1250">
+                          <a:solidFill>
+                            <a:srgbClr val="2B2B2B"/>
+                          </a:solidFill>
+                          <a:latin typeface="Calibri"/>
+                        </a:rPr>
+                        <a:t>15.6</a:t>
+                      </a:r>
+                    </a:p>
+                  </a:txBody>
+                  <a:tcPr marL="50800" marR="50800" marT="25400" marB="25400" anchor="ctr">
+                    <a:solidFill>
+                      <a:srgbClr val="FFFFFF"/>
+                    </a:solidFill>
+                  </a:tcPr>
+                </a:tc>
+              </a:tr>
+              <a:tr h="24938">
+                <a:tc>
+                  <a:txBody>
+                    <a:bodyPr wrap="none"/>
+                    <a:lstStyle/>
+                    <a:p>
+                      <a:pPr algn="l"/>
+                      <a:r>
+                        <a:rPr sz="1250" b="1">
+                          <a:solidFill>
+                            <a:srgbClr val="2B2B2B"/>
+                          </a:solidFill>
+                          <a:latin typeface="Calibri"/>
+                        </a:rPr>
+                        <a:t>PatchTST</a:t>
+                      </a:r>
+                    </a:p>
+                  </a:txBody>
+                  <a:tcPr marL="50800" marR="50800" marT="25400" marB="25400" anchor="ctr">
+                    <a:solidFill>
+                      <a:srgbClr val="F8F9FC"/>
+                    </a:solidFill>
+                  </a:tcPr>
+                </a:tc>
+                <a:tc>
+                  <a:txBody>
+                    <a:bodyPr wrap="none"/>
+                    <a:lstStyle/>
+                    <a:p>
+                      <a:pPr algn="ctr"/>
+                      <a:r>
+                        <a:rPr sz="1250">
+                          <a:solidFill>
+                            <a:srgbClr val="2B2B2B"/>
+                          </a:solidFill>
+                          <a:latin typeface="Calibri"/>
+                        </a:rPr>
+                        <a:t>23.1</a:t>
+                      </a:r>
+                    </a:p>
+                  </a:txBody>
+                  <a:tcPr marL="50800" marR="50800" marT="25400" marB="25400" anchor="ctr">
+                    <a:solidFill>
+                      <a:srgbClr val="F8F9FC"/>
+                    </a:solidFill>
+                  </a:tcPr>
+                </a:tc>
+                <a:tc>
+                  <a:txBody>
+                    <a:bodyPr wrap="none"/>
+                    <a:lstStyle/>
+                    <a:p>
+                      <a:pPr algn="ctr"/>
+                      <a:r>
+                        <a:rPr sz="1250">
+                          <a:solidFill>
+                            <a:srgbClr val="2B2B2B"/>
+                          </a:solidFill>
+                          <a:latin typeface="Calibri"/>
+                        </a:rPr>
+                        <a:t>15.1</a:t>
+                      </a:r>
+                    </a:p>
+                  </a:txBody>
+                  <a:tcPr marL="50800" marR="50800" marT="25400" marB="25400" anchor="ctr">
+                    <a:solidFill>
+                      <a:srgbClr val="F8F9FC"/>
+                    </a:solidFill>
+                  </a:tcPr>
+                </a:tc>
+                <a:tc>
+                  <a:txBody>
+                    <a:bodyPr wrap="none"/>
+                    <a:lstStyle/>
+                    <a:p>
+                      <a:pPr algn="ctr"/>
+                      <a:r>
+                        <a:rPr sz="1250">
+                          <a:solidFill>
+                            <a:srgbClr val="2B2B2B"/>
+                          </a:solidFill>
+                          <a:latin typeface="Calibri"/>
+                        </a:rPr>
+                        <a:t>15.2</a:t>
+                      </a:r>
+                    </a:p>
+                  </a:txBody>
+                  <a:tcPr marL="50800" marR="50800" marT="25400" marB="25400" anchor="ctr">
+                    <a:solidFill>
+                      <a:srgbClr val="F8F9FC"/>
+                    </a:solidFill>
+                  </a:tcPr>
+                </a:tc>
+                <a:tc>
+                  <a:txBody>
+                    <a:bodyPr wrap="none"/>
+                    <a:lstStyle/>
+                    <a:p>
+                      <a:pPr algn="ctr"/>
+                      <a:r>
+                        <a:rPr sz="1250">
+                          <a:solidFill>
+                            <a:srgbClr val="2B2B2B"/>
+                          </a:solidFill>
+                          <a:latin typeface="Calibri"/>
+                        </a:rPr>
+                        <a:t>19.6</a:t>
+                      </a:r>
+                    </a:p>
+                  </a:txBody>
+                  <a:tcPr marL="50800" marR="50800" marT="25400" marB="25400" anchor="ctr">
+                    <a:solidFill>
+                      <a:srgbClr val="F8F9FC"/>
+                    </a:solidFill>
+                  </a:tcPr>
+                </a:tc>
+                <a:tc>
+                  <a:txBody>
+                    <a:bodyPr wrap="none"/>
+                    <a:lstStyle/>
+                    <a:p>
+                      <a:pPr algn="ctr"/>
+                      <a:r>
+                        <a:rPr sz="1250">
+                          <a:solidFill>
+                            <a:srgbClr val="2B2B2B"/>
+                          </a:solidFill>
+                          <a:latin typeface="Calibri"/>
+                        </a:rPr>
+                        <a:t>17.5</a:t>
+                      </a:r>
+                    </a:p>
+                  </a:txBody>
+                  <a:tcPr marL="50800" marR="50800" marT="25400" marB="25400" anchor="ctr">
+                    <a:solidFill>
+                      <a:srgbClr val="F8F9FC"/>
+                    </a:solidFill>
+                  </a:tcPr>
+                </a:tc>
+                <a:tc>
+                  <a:txBody>
+                    <a:bodyPr wrap="none"/>
+                    <a:lstStyle/>
+                    <a:p>
+                      <a:pPr algn="ctr"/>
+                      <a:r>
+                        <a:rPr sz="1250">
+                          <a:solidFill>
+                            <a:srgbClr val="2B2B2B"/>
+                          </a:solidFill>
+                          <a:latin typeface="Calibri"/>
+                        </a:rPr>
+                        <a:t>2.36</a:t>
+                      </a:r>
+                    </a:p>
+                  </a:txBody>
+                  <a:tcPr marL="50800" marR="50800" marT="25400" marB="25400" anchor="ctr">
+                    <a:solidFill>
+                      <a:srgbClr val="F8F9FC"/>
+                    </a:solidFill>
+                  </a:tcPr>
+                </a:tc>
+                <a:tc>
+                  <a:txBody>
+                    <a:bodyPr wrap="none"/>
+                    <a:lstStyle/>
+                    <a:p>
+                      <a:pPr algn="ctr"/>
+                      <a:r>
+                        <a:rPr sz="1250">
+                          <a:solidFill>
+                            <a:srgbClr val="2B2B2B"/>
+                          </a:solidFill>
+                          <a:latin typeface="Calibri"/>
+                        </a:rPr>
+                        <a:t>15.5</a:t>
+                      </a:r>
+                    </a:p>
+                  </a:txBody>
+                  <a:tcPr marL="50800" marR="50800" marT="25400" marB="25400" anchor="ctr">
+                    <a:solidFill>
+                      <a:srgbClr val="F8F9FC"/>
+                    </a:solidFill>
+                  </a:tcPr>
+                </a:tc>
+              </a:tr>
+              <a:tr h="24938">
+                <a:tc>
+                  <a:txBody>
+                    <a:bodyPr wrap="none"/>
+                    <a:lstStyle/>
+                    <a:p>
+                      <a:pPr algn="l"/>
+                      <a:r>
+                        <a:rPr sz="1250" b="1">
+                          <a:solidFill>
+                            <a:srgbClr val="2B2B2B"/>
+                          </a:solidFill>
+                          <a:latin typeface="Calibri"/>
+                        </a:rPr>
+                        <a:t>Autoformer</a:t>
+                      </a:r>
+                    </a:p>
+                  </a:txBody>
+                  <a:tcPr marL="50800" marR="50800" marT="25400" marB="25400" anchor="ctr">
+                    <a:solidFill>
+                      <a:srgbClr val="FFFFFF"/>
+                    </a:solidFill>
+                  </a:tcPr>
+                </a:tc>
+                <a:tc>
+                  <a:txBody>
+                    <a:bodyPr wrap="none"/>
+                    <a:lstStyle/>
+                    <a:p>
+                      <a:pPr algn="ctr"/>
+                      <a:r>
+                        <a:rPr sz="1250">
+                          <a:solidFill>
+                            <a:srgbClr val="2B2B2B"/>
+                          </a:solidFill>
+                          <a:latin typeface="Calibri"/>
+                        </a:rPr>
+                        <a:t>23.4</a:t>
+                      </a:r>
+                    </a:p>
+                  </a:txBody>
+                  <a:tcPr marL="50800" marR="50800" marT="25400" marB="25400" anchor="ctr">
+                    <a:solidFill>
+                      <a:srgbClr val="FFFFFF"/>
+                    </a:solidFill>
+                  </a:tcPr>
+                </a:tc>
+                <a:tc>
+                  <a:txBody>
+                    <a:bodyPr wrap="none"/>
+                    <a:lstStyle/>
+                    <a:p>
+                      <a:pPr algn="ctr"/>
+                      <a:r>
+                        <a:rPr sz="1250">
+                          <a:solidFill>
+                            <a:srgbClr val="2B2B2B"/>
+                          </a:solidFill>
+                          <a:latin typeface="Calibri"/>
+                        </a:rPr>
+                        <a:t>13.8</a:t>
+                      </a:r>
+                    </a:p>
+                  </a:txBody>
+                  <a:tcPr marL="50800" marR="50800" marT="25400" marB="25400" anchor="ctr">
+                    <a:solidFill>
+                      <a:srgbClr val="FFFFFF"/>
+                    </a:solidFill>
+                  </a:tcPr>
+                </a:tc>
+                <a:tc>
+                  <a:txBody>
+                    <a:bodyPr wrap="none"/>
+                    <a:lstStyle/>
+                    <a:p>
+                      <a:pPr algn="ctr"/>
+                      <a:r>
+                        <a:rPr sz="1250">
+                          <a:solidFill>
+                            <a:srgbClr val="2B2B2B"/>
+                          </a:solidFill>
+                          <a:latin typeface="Calibri"/>
+                        </a:rPr>
+                        <a:t>15.1</a:t>
+                      </a:r>
+                    </a:p>
+                  </a:txBody>
+                  <a:tcPr marL="50800" marR="50800" marT="25400" marB="25400" anchor="ctr">
+                    <a:solidFill>
+                      <a:srgbClr val="FFFFFF"/>
+                    </a:solidFill>
+                  </a:tcPr>
+                </a:tc>
+                <a:tc>
+                  <a:txBody>
+                    <a:bodyPr wrap="none"/>
+                    <a:lstStyle/>
+                    <a:p>
+                      <a:pPr algn="ctr"/>
+                      <a:r>
+                        <a:rPr sz="1250">
+                          <a:solidFill>
+                            <a:srgbClr val="2B2B2B"/>
+                          </a:solidFill>
+                          <a:latin typeface="Calibri"/>
+                        </a:rPr>
+                        <a:t>20.1</a:t>
+                      </a:r>
+                    </a:p>
+                  </a:txBody>
+                  <a:tcPr marL="50800" marR="50800" marT="25400" marB="25400" anchor="ctr">
+                    <a:solidFill>
+                      <a:srgbClr val="FFFFFF"/>
+                    </a:solidFill>
+                  </a:tcPr>
+                </a:tc>
+                <a:tc>
+                  <a:txBody>
+                    <a:bodyPr wrap="none"/>
+                    <a:lstStyle/>
+                    <a:p>
+                      <a:pPr algn="ctr"/>
+                      <a:r>
+                        <a:rPr sz="1250">
+                          <a:solidFill>
+                            <a:srgbClr val="2B2B2B"/>
+                          </a:solidFill>
+                          <a:latin typeface="Calibri"/>
+                        </a:rPr>
+                        <a:t>16.3</a:t>
+                      </a:r>
+                    </a:p>
+                  </a:txBody>
+                  <a:tcPr marL="50800" marR="50800" marT="25400" marB="25400" anchor="ctr">
+                    <a:solidFill>
+                      <a:srgbClr val="FFFFFF"/>
+                    </a:solidFill>
+                  </a:tcPr>
+                </a:tc>
+                <a:tc>
+                  <a:txBody>
+                    <a:bodyPr wrap="none"/>
+                    <a:lstStyle/>
+                    <a:p>
+                      <a:pPr algn="ctr"/>
+                      <a:r>
+                        <a:rPr sz="1250">
+                          <a:solidFill>
+                            <a:srgbClr val="2B2B2B"/>
+                          </a:solidFill>
+                          <a:latin typeface="Calibri"/>
+                        </a:rPr>
+                        <a:t>2.81</a:t>
+                      </a:r>
+                    </a:p>
+                  </a:txBody>
+                  <a:tcPr marL="50800" marR="50800" marT="25400" marB="25400" anchor="ctr">
+                    <a:solidFill>
+                      <a:srgbClr val="FFFFFF"/>
+                    </a:solidFill>
+                  </a:tcPr>
+                </a:tc>
+                <a:tc>
+                  <a:txBody>
+                    <a:bodyPr wrap="none"/>
+                    <a:lstStyle/>
+                    <a:p>
+                      <a:pPr algn="ctr"/>
+                      <a:r>
+                        <a:rPr sz="1250">
+                          <a:solidFill>
+                            <a:srgbClr val="2B2B2B"/>
+                          </a:solidFill>
+                          <a:latin typeface="Calibri"/>
+                        </a:rPr>
+                        <a:t>15.3</a:t>
+                      </a:r>
+                    </a:p>
+                  </a:txBody>
+                  <a:tcPr marL="50800" marR="50800" marT="25400" marB="25400" anchor="ctr">
+                    <a:solidFill>
+                      <a:srgbClr val="FFFFFF"/>
+                    </a:solidFill>
+                  </a:tcPr>
+                </a:tc>
+              </a:tr>
+              <a:tr h="24940">
+                <a:tc>
+                  <a:txBody>
+                    <a:bodyPr wrap="none"/>
+                    <a:lstStyle/>
+                    <a:p>
+                      <a:pPr algn="l"/>
+                      <a:r>
+                        <a:rPr sz="1250" b="1">
+                          <a:solidFill>
+                            <a:srgbClr val="2B2B2B"/>
+                          </a:solidFill>
+                          <a:latin typeface="Calibri"/>
+                        </a:rPr>
+                        <a:t>FEDformer</a:t>
+                      </a:r>
+                    </a:p>
+                  </a:txBody>
+                  <a:tcPr marL="50800" marR="50800" marT="25400" marB="25400" anchor="ctr">
+                    <a:solidFill>
+                      <a:srgbClr val="F8F9FC"/>
+                    </a:solidFill>
+                  </a:tcPr>
+                </a:tc>
+                <a:tc>
+                  <a:txBody>
+                    <a:bodyPr wrap="none"/>
+                    <a:lstStyle/>
+                    <a:p>
+                      <a:pPr algn="ctr"/>
+                      <a:r>
+                        <a:rPr sz="1250">
+                          <a:solidFill>
+                            <a:srgbClr val="2B2B2B"/>
+                          </a:solidFill>
+                          <a:latin typeface="Calibri"/>
+                        </a:rPr>
+                        <a:t>22.8</a:t>
+                      </a:r>
+                    </a:p>
+                  </a:txBody>
+                  <a:tcPr marL="50800" marR="50800" marT="25400" marB="25400" anchor="ctr">
+                    <a:solidFill>
+                      <a:srgbClr val="F8F9FC"/>
+                    </a:solidFill>
+                  </a:tcPr>
+                </a:tc>
+                <a:tc>
+                  <a:txBody>
+                    <a:bodyPr wrap="none"/>
+                    <a:lstStyle/>
+                    <a:p>
+                      <a:pPr algn="ctr"/>
+                      <a:r>
+                        <a:rPr sz="1250">
+                          <a:solidFill>
+                            <a:srgbClr val="2B2B2B"/>
+                          </a:solidFill>
+                          <a:latin typeface="Calibri"/>
+                        </a:rPr>
+                        <a:t>15.8</a:t>
+                      </a:r>
+                    </a:p>
+                  </a:txBody>
+                  <a:tcPr marL="50800" marR="50800" marT="25400" marB="25400" anchor="ctr">
+                    <a:solidFill>
+                      <a:srgbClr val="F8F9FC"/>
+                    </a:solidFill>
+                  </a:tcPr>
+                </a:tc>
+                <a:tc>
+                  <a:txBody>
+                    <a:bodyPr wrap="none"/>
+                    <a:lstStyle/>
+                    <a:p>
+                      <a:pPr algn="ctr"/>
+                      <a:r>
+                        <a:rPr sz="1250">
+                          <a:solidFill>
+                            <a:srgbClr val="2B2B2B"/>
+                          </a:solidFill>
+                          <a:latin typeface="Calibri"/>
+                        </a:rPr>
+                        <a:t>16.3</a:t>
+                      </a:r>
+                    </a:p>
+                  </a:txBody>
+                  <a:tcPr marL="50800" marR="50800" marT="25400" marB="25400" anchor="ctr">
+                    <a:solidFill>
+                      <a:srgbClr val="F8F9FC"/>
+                    </a:solidFill>
+                  </a:tcPr>
+                </a:tc>
+                <a:tc>
+                  <a:txBody>
+                    <a:bodyPr wrap="none"/>
+                    <a:lstStyle/>
+                    <a:p>
+                      <a:pPr algn="ctr"/>
+                      <a:r>
+                        <a:rPr sz="1250">
+                          <a:solidFill>
+                            <a:srgbClr val="2B2B2B"/>
+                          </a:solidFill>
+                          <a:latin typeface="Calibri"/>
+                        </a:rPr>
+                        <a:t>19.6</a:t>
+                      </a:r>
+                    </a:p>
+                  </a:txBody>
+                  <a:tcPr marL="50800" marR="50800" marT="25400" marB="25400" anchor="ctr">
+                    <a:solidFill>
+                      <a:srgbClr val="F8F9FC"/>
+                    </a:solidFill>
+                  </a:tcPr>
+                </a:tc>
+                <a:tc>
+                  <a:txBody>
+                    <a:bodyPr wrap="none"/>
+                    <a:lstStyle/>
+                    <a:p>
+                      <a:pPr algn="ctr"/>
+                      <a:r>
+                        <a:rPr sz="1250">
+                          <a:solidFill>
+                            <a:srgbClr val="2B2B2B"/>
+                          </a:solidFill>
+                          <a:latin typeface="Calibri"/>
+                        </a:rPr>
+                        <a:t>15.6</a:t>
+                      </a:r>
+                    </a:p>
+                  </a:txBody>
+                  <a:tcPr marL="50800" marR="50800" marT="25400" marB="25400" anchor="ctr">
+                    <a:solidFill>
+                      <a:srgbClr val="F8F9FC"/>
+                    </a:solidFill>
+                  </a:tcPr>
+                </a:tc>
+                <a:tc>
+                  <a:txBody>
+                    <a:bodyPr wrap="none"/>
+                    <a:lstStyle/>
+                    <a:p>
+                      <a:pPr algn="ctr"/>
+                      <a:r>
+                        <a:rPr sz="1250">
+                          <a:solidFill>
+                            <a:srgbClr val="2B2B2B"/>
+                          </a:solidFill>
+                          <a:latin typeface="Calibri"/>
+                        </a:rPr>
+                        <a:t>4.16</a:t>
+                      </a:r>
+                    </a:p>
+                  </a:txBody>
+                  <a:tcPr marL="50800" marR="50800" marT="25400" marB="25400" anchor="ctr">
+                    <a:solidFill>
+                      <a:srgbClr val="F8F9FC"/>
+                    </a:solidFill>
+                  </a:tcPr>
+                </a:tc>
+                <a:tc>
+                  <a:txBody>
+                    <a:bodyPr wrap="none"/>
+                    <a:lstStyle/>
+                    <a:p>
+                      <a:pPr algn="ctr"/>
+                      <a:r>
+                        <a:rPr sz="1250">
+                          <a:solidFill>
+                            <a:srgbClr val="2B2B2B"/>
+                          </a:solidFill>
+                          <a:latin typeface="Calibri"/>
+                        </a:rPr>
+                        <a:t>15.7</a:t>
+                      </a:r>
+                    </a:p>
+                  </a:txBody>
+                  <a:tcPr marL="50800" marR="50800" marT="25400" marB="25400" anchor="ctr">
+                    <a:solidFill>
+                      <a:srgbClr val="F8F9FC"/>
+                    </a:solidFill>
+                  </a:tcPr>
+                </a:tc>
+              </a:tr>
+            </a:tbl>
+          </a:graphicData>
+        </a:graphic>
+      </p:graphicFrame>
+      <p:sp>
+        <p:nvSpPr>
+          <p:cNvPr id="10" name="Rectangle 9"/>
+          <p:cNvSpPr/>
+          <p:nvPr/>
+        </p:nvSpPr>
+        <p:spPr>
+          <a:xfrm>
+            <a:off x="640080" y="5806440"/>
+            <a:ext cx="38100" cy="384048"/>
+          </a:xfrm>
+          <a:prstGeom prst="rect">
+            <a:avLst/>
+          </a:prstGeom>
+          <a:solidFill>
+            <a:srgbClr val="E07A5F"/>
+          </a:solidFill>
+          <a:ln>
+            <a:noFill/>
+          </a:ln>
+          <a:effectLst/>
+        </p:spPr>
+        <p:style>
+          <a:lnRef idx="1">
+            <a:schemeClr val="accent1"/>
+          </a:lnRef>
+          <a:fillRef idx="3">
+            <a:schemeClr val="accent1"/>
+          </a:fillRef>
+          <a:effectRef idx="2">
+            <a:schemeClr val="accent1"/>
+          </a:effectRef>
+          <a:fontRef idx="minor">
+            <a:schemeClr val="lt1"/>
+          </a:fontRef>
+        </p:style>
+        <p:txBody>
+          <a:bodyPr rtlCol="0" anchor="ctr"/>
+          <a:lstStyle/>
+          <a:p>
+            <a:pPr algn="ctr"/>
           </a:p>
         </p:txBody>
       </p:sp>
@@ -9124,8 +12312,8 @@
         </p:nvSpPr>
         <p:spPr>
           <a:xfrm>
-            <a:off x="8503920" y="2606040"/>
-            <a:ext cx="2743200" cy="640080"/>
+            <a:off x="804672" y="5806440"/>
+            <a:ext cx="10881360" cy="457200"/>
           </a:xfrm>
           <a:prstGeom prst="rect">
             <a:avLst/>
@@ -9144,93 +12332,22 @@
               </a:lnSpc>
             </a:pPr>
             <a:r>
-              <a:rPr sz="1300" b="0" i="0">
-                <a:solidFill>
-                  <a:srgbClr val="5A6478"/>
-                </a:solidFill>
-                <a:latin typeface="Calibri"/>
-              </a:rPr>
-              <a:t>из 1000 ежедневных рядов
-нейросеть лучше классики</a:t>
-            </a:r>
-          </a:p>
-        </p:txBody>
-      </p:sp>
-      <p:sp>
-        <p:nvSpPr>
-          <p:cNvPr id="12" name="TextBox 11"/>
-          <p:cNvSpPr txBox="1"/>
-          <p:nvPr/>
-        </p:nvSpPr>
-        <p:spPr>
-          <a:xfrm>
-            <a:off x="8503920" y="3657600"/>
-            <a:ext cx="2743200" cy="868680"/>
-          </a:xfrm>
-          <a:prstGeom prst="rect">
-            <a:avLst/>
-          </a:prstGeom>
-          <a:noFill/>
-        </p:spPr>
-        <p:txBody>
-          <a:bodyPr wrap="square" anchor="t" lIns="0" rIns="0" tIns="0" bIns="0">
-            <a:spAutoFit/>
-          </a:bodyPr>
-          <a:lstStyle/>
-          <a:p>
-            <a:pPr algn="l">
-              <a:lnSpc>
-                <a:spcPct val="100000"/>
-              </a:lnSpc>
-            </a:pPr>
-            <a:r>
-              <a:rPr sz="4000" b="1" i="0">
+              <a:rPr sz="1500" b="1" i="0">
                 <a:solidFill>
                   <a:srgbClr val="E07A5F"/>
                 </a:solidFill>
                 <a:latin typeface="Calibri"/>
               </a:rPr>
-              <a:t>295</a:t>
-            </a:r>
-          </a:p>
-        </p:txBody>
-      </p:sp>
-      <p:sp>
-        <p:nvSpPr>
-          <p:cNvPr id="13" name="TextBox 12"/>
-          <p:cNvSpPr txBox="1"/>
-          <p:nvPr/>
-        </p:nvSpPr>
-        <p:spPr>
-          <a:xfrm>
-            <a:off x="8503920" y="4434840"/>
-            <a:ext cx="2743200" cy="640080"/>
-          </a:xfrm>
-          <a:prstGeom prst="rect">
-            <a:avLst/>
-          </a:prstGeom>
-          <a:noFill/>
-        </p:spPr>
-        <p:txBody>
-          <a:bodyPr wrap="square" anchor="t" lIns="0" rIns="0" tIns="0" bIns="0">
-            <a:spAutoFit/>
-          </a:bodyPr>
-          <a:lstStyle/>
-          <a:p>
-            <a:pPr algn="l">
-              <a:lnSpc>
-                <a:spcPct val="105000"/>
-              </a:lnSpc>
-            </a:pPr>
-            <a:r>
-              <a:rPr sz="1300" b="0" i="0">
-                <a:solidFill>
-                  <a:srgbClr val="5A6478"/>
-                </a:solidFill>
-                <a:latin typeface="Calibri"/>
-              </a:rPr>
-              <a:t>рядов, где побеждают
-3+ нейросетевых модели</a:t>
+              <a:t>Главное:  </a:t>
+            </a:r>
+            <a:r>
+              <a:rPr sz="1500" b="0" i="0">
+                <a:solidFill>
+                  <a:srgbClr val="2B2B2B"/>
+                </a:solidFill>
+                <a:latin typeface="Calibri"/>
+              </a:rPr>
+              <a:t>на M3 monthly и M4 daily предобученные нейросети уверенно точнее лучшей классики; на коротких рядах классика впереди.</a:t>
             </a:r>
           </a:p>
         </p:txBody>

--- a/docs/Презентация_Лазарев_ВКР.pptx
+++ b/docs/Презентация_Лазарев_ВКР.pptx
@@ -3978,7 +3978,7 @@
                 <a:gridCol w="1101852"/>
                 <a:gridCol w="1101852"/>
               </a:tblGrid>
-              <a:tr h="24938">
+              <a:tr h="21101">
                 <a:tc>
                   <a:txBody>
                     <a:bodyPr/>
@@ -4164,7 +4164,7 @@
                   </a:tcPr>
                 </a:tc>
               </a:tr>
-              <a:tr h="24938">
+              <a:tr h="21101">
                 <a:tc gridSpan="8">
                   <a:txBody>
                     <a:bodyPr/>
@@ -4350,7 +4350,7 @@
                   </a:tcPr>
                 </a:tc>
               </a:tr>
-              <a:tr h="24938">
+              <a:tr h="21101">
                 <a:tc>
                   <a:txBody>
                     <a:bodyPr/>
@@ -4536,7 +4536,7 @@
                   </a:tcPr>
                 </a:tc>
               </a:tr>
-              <a:tr h="24938">
+              <a:tr h="21101">
                 <a:tc>
                   <a:txBody>
                     <a:bodyPr/>
@@ -4722,7 +4722,7 @@
                   </a:tcPr>
                 </a:tc>
               </a:tr>
-              <a:tr h="24938">
+              <a:tr h="21101">
                 <a:tc>
                   <a:txBody>
                     <a:bodyPr/>
@@ -4908,7 +4908,7 @@
                   </a:tcPr>
                 </a:tc>
               </a:tr>
-              <a:tr h="24938">
+              <a:tr h="21101">
                 <a:tc gridSpan="8">
                   <a:txBody>
                     <a:bodyPr/>
@@ -5094,7 +5094,7 @@
                   </a:tcPr>
                 </a:tc>
               </a:tr>
-              <a:tr h="24938">
+              <a:tr h="21101">
                 <a:tc>
                   <a:txBody>
                     <a:bodyPr/>
@@ -5280,7 +5280,7 @@
                   </a:tcPr>
                 </a:tc>
               </a:tr>
-              <a:tr h="24938">
+              <a:tr h="21101">
                 <a:tc>
                   <a:txBody>
                     <a:bodyPr/>
@@ -5466,7 +5466,7 @@
                   </a:tcPr>
                 </a:tc>
               </a:tr>
-              <a:tr h="24938">
+              <a:tr h="21101">
                 <a:tc>
                   <a:txBody>
                     <a:bodyPr/>
@@ -5652,7 +5652,7 @@
                   </a:tcPr>
                 </a:tc>
               </a:tr>
-              <a:tr h="24938">
+              <a:tr h="21101">
                 <a:tc>
                   <a:txBody>
                     <a:bodyPr/>
@@ -5838,7 +5838,7 @@
                   </a:tcPr>
                 </a:tc>
               </a:tr>
-              <a:tr h="24940">
+              <a:tr h="21101">
                 <a:tc>
                   <a:txBody>
                     <a:bodyPr/>
@@ -6014,6 +6014,378 @@
                           <a:latin typeface="Calibri"/>
                         </a:rPr>
                         <a:t>15.7</a:t>
+                      </a:r>
+                    </a:p>
+                  </a:txBody>
+                  <a:tcPr marL="63500" marR="50800" marT="25400" marB="25400" anchor="ctr">
+                    <a:solidFill>
+                      <a:srgbClr val="F6F7FB"/>
+                    </a:solidFill>
+                  </a:tcPr>
+                </a:tc>
+              </a:tr>
+              <a:tr h="21101">
+                <a:tc>
+                  <a:txBody>
+                    <a:bodyPr/>
+                    <a:lstStyle/>
+                    <a:p>
+                      <a:pPr algn="l"/>
+                      <a:r>
+                        <a:rPr sz="1300" b="1">
+                          <a:solidFill>
+                            <a:srgbClr val="292E3A"/>
+                          </a:solidFill>
+                          <a:latin typeface="Calibri"/>
+                        </a:rPr>
+                        <a:t>N-BEATS</a:t>
+                      </a:r>
+                    </a:p>
+                  </a:txBody>
+                  <a:tcPr marL="63500" marR="50800" marT="25400" marB="25400" anchor="ctr">
+                    <a:solidFill>
+                      <a:srgbClr val="FFFFFF"/>
+                    </a:solidFill>
+                  </a:tcPr>
+                </a:tc>
+                <a:tc>
+                  <a:txBody>
+                    <a:bodyPr/>
+                    <a:lstStyle/>
+                    <a:p>
+                      <a:pPr algn="ctr"/>
+                      <a:r>
+                        <a:rPr sz="1300">
+                          <a:solidFill>
+                            <a:srgbClr val="292E3A"/>
+                          </a:solidFill>
+                          <a:latin typeface="Calibri"/>
+                        </a:rPr>
+                        <a:t>23.8</a:t>
+                      </a:r>
+                    </a:p>
+                  </a:txBody>
+                  <a:tcPr marL="63500" marR="50800" marT="25400" marB="25400" anchor="ctr">
+                    <a:solidFill>
+                      <a:srgbClr val="FFFFFF"/>
+                    </a:solidFill>
+                  </a:tcPr>
+                </a:tc>
+                <a:tc>
+                  <a:txBody>
+                    <a:bodyPr/>
+                    <a:lstStyle/>
+                    <a:p>
+                      <a:pPr algn="ctr"/>
+                      <a:r>
+                        <a:rPr sz="1300">
+                          <a:solidFill>
+                            <a:srgbClr val="292E3A"/>
+                          </a:solidFill>
+                          <a:latin typeface="Calibri"/>
+                        </a:rPr>
+                        <a:t>14.4</a:t>
+                      </a:r>
+                    </a:p>
+                  </a:txBody>
+                  <a:tcPr marL="63500" marR="50800" marT="25400" marB="25400" anchor="ctr">
+                    <a:solidFill>
+                      <a:srgbClr val="FFFFFF"/>
+                    </a:solidFill>
+                  </a:tcPr>
+                </a:tc>
+                <a:tc>
+                  <a:txBody>
+                    <a:bodyPr/>
+                    <a:lstStyle/>
+                    <a:p>
+                      <a:pPr algn="ctr"/>
+                      <a:r>
+                        <a:rPr sz="1300" b="1">
+                          <a:solidFill>
+                            <a:srgbClr val="C25A40"/>
+                          </a:solidFill>
+                          <a:latin typeface="Calibri"/>
+                        </a:rPr>
+                        <a:t>17.3</a:t>
+                      </a:r>
+                    </a:p>
+                  </a:txBody>
+                  <a:tcPr marL="63500" marR="50800" marT="25400" marB="25400" anchor="ctr">
+                    <a:solidFill>
+                      <a:srgbClr val="FCE9E2"/>
+                    </a:solidFill>
+                  </a:tcPr>
+                </a:tc>
+                <a:tc>
+                  <a:txBody>
+                    <a:bodyPr/>
+                    <a:lstStyle/>
+                    <a:p>
+                      <a:pPr algn="ctr"/>
+                      <a:r>
+                        <a:rPr sz="1300">
+                          <a:solidFill>
+                            <a:srgbClr val="292E3A"/>
+                          </a:solidFill>
+                          <a:latin typeface="Calibri"/>
+                        </a:rPr>
+                        <a:t>21.5</a:t>
+                      </a:r>
+                    </a:p>
+                  </a:txBody>
+                  <a:tcPr marL="63500" marR="50800" marT="25400" marB="25400" anchor="ctr">
+                    <a:solidFill>
+                      <a:srgbClr val="FFFFFF"/>
+                    </a:solidFill>
+                  </a:tcPr>
+                </a:tc>
+                <a:tc>
+                  <a:txBody>
+                    <a:bodyPr/>
+                    <a:lstStyle/>
+                    <a:p>
+                      <a:pPr algn="ctr"/>
+                      <a:r>
+                        <a:rPr sz="1300">
+                          <a:solidFill>
+                            <a:srgbClr val="292E3A"/>
+                          </a:solidFill>
+                          <a:latin typeface="Calibri"/>
+                        </a:rPr>
+                        <a:t>18.3</a:t>
+                      </a:r>
+                    </a:p>
+                  </a:txBody>
+                  <a:tcPr marL="63500" marR="50800" marT="25400" marB="25400" anchor="ctr">
+                    <a:solidFill>
+                      <a:srgbClr val="FFFFFF"/>
+                    </a:solidFill>
+                  </a:tcPr>
+                </a:tc>
+                <a:tc>
+                  <a:txBody>
+                    <a:bodyPr/>
+                    <a:lstStyle/>
+                    <a:p>
+                      <a:pPr algn="ctr"/>
+                      <a:r>
+                        <a:rPr sz="1300" b="1">
+                          <a:solidFill>
+                            <a:srgbClr val="C25A40"/>
+                          </a:solidFill>
+                          <a:latin typeface="Calibri"/>
+                        </a:rPr>
+                        <a:t>3.20</a:t>
+                      </a:r>
+                    </a:p>
+                  </a:txBody>
+                  <a:tcPr marL="63500" marR="50800" marT="25400" marB="25400" anchor="ctr">
+                    <a:solidFill>
+                      <a:srgbClr val="FCE9E2"/>
+                    </a:solidFill>
+                  </a:tcPr>
+                </a:tc>
+                <a:tc>
+                  <a:txBody>
+                    <a:bodyPr/>
+                    <a:lstStyle/>
+                    <a:p>
+                      <a:pPr algn="ctr"/>
+                      <a:r>
+                        <a:rPr sz="1300">
+                          <a:solidFill>
+                            <a:srgbClr val="292E3A"/>
+                          </a:solidFill>
+                          <a:latin typeface="Calibri"/>
+                        </a:rPr>
+                        <a:t>16.4</a:t>
+                      </a:r>
+                    </a:p>
+                  </a:txBody>
+                  <a:tcPr marL="63500" marR="50800" marT="25400" marB="25400" anchor="ctr">
+                    <a:solidFill>
+                      <a:srgbClr val="FFFFFF"/>
+                    </a:solidFill>
+                  </a:tcPr>
+                </a:tc>
+              </a:tr>
+              <a:tr h="21108">
+                <a:tc>
+                  <a:txBody>
+                    <a:bodyPr/>
+                    <a:lstStyle/>
+                    <a:p>
+                      <a:pPr algn="l"/>
+                      <a:r>
+                        <a:rPr sz="1300" b="1">
+                          <a:solidFill>
+                            <a:srgbClr val="292E3A"/>
+                          </a:solidFill>
+                          <a:latin typeface="Calibri"/>
+                        </a:rPr>
+                        <a:t>Helformer</a:t>
+                      </a:r>
+                    </a:p>
+                  </a:txBody>
+                  <a:tcPr marL="63500" marR="50800" marT="25400" marB="25400" anchor="ctr">
+                    <a:solidFill>
+                      <a:srgbClr val="F6F7FB"/>
+                    </a:solidFill>
+                  </a:tcPr>
+                </a:tc>
+                <a:tc>
+                  <a:txBody>
+                    <a:bodyPr/>
+                    <a:lstStyle/>
+                    <a:p>
+                      <a:pPr algn="ctr"/>
+                      <a:r>
+                        <a:rPr sz="1300">
+                          <a:solidFill>
+                            <a:srgbClr val="292E3A"/>
+                          </a:solidFill>
+                          <a:latin typeface="Calibri"/>
+                        </a:rPr>
+                        <a:t>29.8</a:t>
+                      </a:r>
+                    </a:p>
+                  </a:txBody>
+                  <a:tcPr marL="63500" marR="50800" marT="25400" marB="25400" anchor="ctr">
+                    <a:solidFill>
+                      <a:srgbClr val="F6F7FB"/>
+                    </a:solidFill>
+                  </a:tcPr>
+                </a:tc>
+                <a:tc>
+                  <a:txBody>
+                    <a:bodyPr/>
+                    <a:lstStyle/>
+                    <a:p>
+                      <a:pPr algn="ctr"/>
+                      <a:r>
+                        <a:rPr sz="1300">
+                          <a:solidFill>
+                            <a:srgbClr val="292E3A"/>
+                          </a:solidFill>
+                          <a:latin typeface="Calibri"/>
+                        </a:rPr>
+                        <a:t>21.4</a:t>
+                      </a:r>
+                    </a:p>
+                  </a:txBody>
+                  <a:tcPr marL="63500" marR="50800" marT="25400" marB="25400" anchor="ctr">
+                    <a:solidFill>
+                      <a:srgbClr val="F6F7FB"/>
+                    </a:solidFill>
+                  </a:tcPr>
+                </a:tc>
+                <a:tc>
+                  <a:txBody>
+                    <a:bodyPr/>
+                    <a:lstStyle/>
+                    <a:p>
+                      <a:pPr algn="ctr"/>
+                      <a:r>
+                        <a:rPr sz="1300" b="1">
+                          <a:solidFill>
+                            <a:srgbClr val="C25A40"/>
+                          </a:solidFill>
+                          <a:latin typeface="Calibri"/>
+                        </a:rPr>
+                        <a:t>23.0</a:t>
+                      </a:r>
+                    </a:p>
+                  </a:txBody>
+                  <a:tcPr marL="63500" marR="50800" marT="25400" marB="25400" anchor="ctr">
+                    <a:solidFill>
+                      <a:srgbClr val="FCE9E2"/>
+                    </a:solidFill>
+                  </a:tcPr>
+                </a:tc>
+                <a:tc>
+                  <a:txBody>
+                    <a:bodyPr/>
+                    <a:lstStyle/>
+                    <a:p>
+                      <a:pPr algn="ctr"/>
+                      <a:r>
+                        <a:rPr sz="1300">
+                          <a:solidFill>
+                            <a:srgbClr val="292E3A"/>
+                          </a:solidFill>
+                          <a:latin typeface="Calibri"/>
+                        </a:rPr>
+                        <a:t>20.5</a:t>
+                      </a:r>
+                    </a:p>
+                  </a:txBody>
+                  <a:tcPr marL="63500" marR="50800" marT="25400" marB="25400" anchor="ctr">
+                    <a:solidFill>
+                      <a:srgbClr val="F6F7FB"/>
+                    </a:solidFill>
+                  </a:tcPr>
+                </a:tc>
+                <a:tc>
+                  <a:txBody>
+                    <a:bodyPr/>
+                    <a:lstStyle/>
+                    <a:p>
+                      <a:pPr algn="ctr"/>
+                      <a:r>
+                        <a:rPr sz="1300">
+                          <a:solidFill>
+                            <a:srgbClr val="292E3A"/>
+                          </a:solidFill>
+                          <a:latin typeface="Calibri"/>
+                        </a:rPr>
+                        <a:t>46.3</a:t>
+                      </a:r>
+                    </a:p>
+                  </a:txBody>
+                  <a:tcPr marL="63500" marR="50800" marT="25400" marB="25400" anchor="ctr">
+                    <a:solidFill>
+                      <a:srgbClr val="F6F7FB"/>
+                    </a:solidFill>
+                  </a:tcPr>
+                </a:tc>
+                <a:tc>
+                  <a:txBody>
+                    <a:bodyPr/>
+                    <a:lstStyle/>
+                    <a:p>
+                      <a:pPr algn="ctr"/>
+                      <a:r>
+                        <a:rPr sz="1300" b="1">
+                          <a:solidFill>
+                            <a:srgbClr val="C25A40"/>
+                          </a:solidFill>
+                          <a:latin typeface="Calibri"/>
+                        </a:rPr>
+                        <a:t>2.87</a:t>
+                      </a:r>
+                    </a:p>
+                  </a:txBody>
+                  <a:tcPr marL="63500" marR="50800" marT="25400" marB="25400" anchor="ctr">
+                    <a:solidFill>
+                      <a:srgbClr val="FCE9E2"/>
+                    </a:solidFill>
+                  </a:tcPr>
+                </a:tc>
+                <a:tc>
+                  <a:txBody>
+                    <a:bodyPr/>
+                    <a:lstStyle/>
+                    <a:p>
+                      <a:pPr algn="ctr"/>
+                      <a:r>
+                        <a:rPr sz="1300">
+                          <a:solidFill>
+                            <a:srgbClr val="292E3A"/>
+                          </a:solidFill>
+                          <a:latin typeface="Calibri"/>
+                        </a:rPr>
+                        <a:t>24.0</a:t>
                       </a:r>
                     </a:p>
                   </a:txBody>

--- a/docs/Презентация_Лазарев_ВКР.pptx
+++ b/docs/Презентация_Лазарев_ВКР.pptx
@@ -7788,16 +7788,40 @@
           </a:p>
         </p:txBody>
       </p:sp>
-      <p:sp>
-        <p:nvSpPr>
-          <p:cNvPr id="11" name="Rectangle 10"/>
+      <p:pic>
+        <p:nvPicPr>
+          <p:cNvPr id="11" name="Picture 10" descr="rollout_m3_quarterly_T478.png"/>
+          <p:cNvPicPr>
+            <a:picLocks noChangeAspect="1"/>
+          </p:cNvPicPr>
+          <p:nvPr/>
+        </p:nvPicPr>
+        <p:blipFill>
+          <a:blip r:embed="rId2"/>
+          <a:stretch>
+            <a:fillRect/>
+          </a:stretch>
+        </p:blipFill>
+        <p:spPr>
+          <a:xfrm>
+            <a:off x="640080" y="1973457"/>
+            <a:ext cx="7178040" cy="3185406"/>
+          </a:xfrm>
+          <a:prstGeom prst="rect">
+            <a:avLst/>
+          </a:prstGeom>
+        </p:spPr>
+      </p:pic>
+      <p:sp>
+        <p:nvSpPr>
+          <p:cNvPr id="12" name="Rectangle 11"/>
           <p:cNvSpPr/>
           <p:nvPr/>
         </p:nvSpPr>
         <p:spPr>
           <a:xfrm>
-            <a:off x="640080" y="1627632"/>
-            <a:ext cx="6675120" cy="3977639"/>
+            <a:off x="7955279" y="1554480"/>
+            <a:ext cx="3593592" cy="4023360"/>
           </a:xfrm>
           <a:prstGeom prst="rect">
             <a:avLst/>
@@ -7834,14 +7858,14 @@
       </p:sp>
       <p:sp>
         <p:nvSpPr>
-          <p:cNvPr id="12" name="Rectangle 11"/>
+          <p:cNvPr id="13" name="Rectangle 12"/>
           <p:cNvSpPr/>
           <p:nvPr/>
         </p:nvSpPr>
         <p:spPr>
           <a:xfrm>
-            <a:off x="640080" y="1627632"/>
-            <a:ext cx="50800" cy="3977639"/>
+            <a:off x="7955279" y="1554480"/>
+            <a:ext cx="50800" cy="4023360"/>
           </a:xfrm>
           <a:prstGeom prst="rect">
             <a:avLst/>
@@ -7878,14 +7902,14 @@
       </p:sp>
       <p:sp>
         <p:nvSpPr>
-          <p:cNvPr id="13" name="TextBox 12"/>
+          <p:cNvPr id="14" name="TextBox 13"/>
           <p:cNvSpPr txBox="1"/>
           <p:nvPr/>
         </p:nvSpPr>
         <p:spPr>
           <a:xfrm>
-            <a:off x="896112" y="1792224"/>
-            <a:ext cx="6309360" cy="365760"/>
+            <a:off x="8211311" y="1719072"/>
+            <a:ext cx="3227832" cy="365760"/>
           </a:xfrm>
           <a:prstGeom prst="rect">
             <a:avLst/>
@@ -7910,21 +7934,21 @@
                 </a:solidFill>
                 <a:latin typeface="Calibri"/>
               </a:rPr>
-              <a:t>Деградация при переходе от прямого режима к итеративному</a:t>
-            </a:r>
-          </a:p>
-        </p:txBody>
-      </p:sp>
-      <p:sp>
-        <p:nvSpPr>
-          <p:cNvPr id="14" name="TextBox 13"/>
+              <a:t>Прямой против итеративного</a:t>
+            </a:r>
+          </a:p>
+        </p:txBody>
+      </p:sp>
+      <p:sp>
+        <p:nvSpPr>
+          <p:cNvPr id="15" name="TextBox 14"/>
           <p:cNvSpPr txBox="1"/>
           <p:nvPr/>
         </p:nvSpPr>
         <p:spPr>
           <a:xfrm>
-            <a:off x="896112" y="2231136"/>
-            <a:ext cx="6217920" cy="3246119"/>
+            <a:off x="8211311" y="2157984"/>
+            <a:ext cx="3136392" cy="3291840"/>
           </a:xfrm>
           <a:prstGeom prst="rect">
             <a:avLst/>
@@ -7942,11 +7966,11 @@
                 <a:spcPct val="110000"/>
               </a:lnSpc>
               <a:spcAft>
-                <a:spcPts val="1300"/>
+                <a:spcPts val="1100"/>
               </a:spcAft>
             </a:pPr>
             <a:r>
-              <a:rPr sz="1450" b="1" i="0">
+              <a:rPr sz="1300" b="1" i="0">
                 <a:solidFill>
                   <a:srgbClr val="E07A5F"/>
                 </a:solidFill>
@@ -7955,22 +7979,22 @@
               <a:t>▪  </a:t>
             </a:r>
             <a:r>
-              <a:rPr sz="1450" b="1" i="0">
+              <a:rPr sz="1300" b="1" i="0">
                 <a:solidFill>
                   <a:srgbClr val="292E3A"/>
                 </a:solidFill>
                 <a:latin typeface="Calibri"/>
               </a:rPr>
-              <a:t>Обучаемая декомпозиция уязвима. </a:t>
-            </a:r>
-            <a:r>
-              <a:rPr sz="1450" b="0" i="0">
+              <a:t>На графике </a:t>
+            </a:r>
+            <a:r>
+              <a:rPr sz="1300" b="0" i="0">
                 <a:solidFill>
                   <a:srgbClr val="292E3A"/>
                 </a:solidFill>
                 <a:latin typeface="Calibri"/>
               </a:rPr>
-              <a:t>FEDformer и TimesNet теряют около 5 п.п. sMAPE — выделенные компоненты искажаются на собственных прогнозах.</a:t>
+              <a:t>пунктир — прямой прогноз, сплошная — итеративный.</a:t>
             </a:r>
           </a:p>
           <a:p>
@@ -7979,11 +8003,11 @@
                 <a:spcPct val="110000"/>
               </a:lnSpc>
               <a:spcAft>
-                <a:spcPts val="1300"/>
+                <a:spcPts val="1100"/>
               </a:spcAft>
             </a:pPr>
             <a:r>
-              <a:rPr sz="1450" b="1" i="0">
+              <a:rPr sz="1300" b="1" i="0">
                 <a:solidFill>
                   <a:srgbClr val="E07A5F"/>
                 </a:solidFill>
@@ -7992,22 +8016,22 @@
               <a:t>▪  </a:t>
             </a:r>
             <a:r>
-              <a:rPr sz="1450" b="1" i="0">
+              <a:rPr sz="1300" b="1" i="0">
                 <a:solidFill>
                   <a:srgbClr val="292E3A"/>
                 </a:solidFill>
                 <a:latin typeface="Calibri"/>
               </a:rPr>
-              <a:t>PatchTST устойчив. </a:t>
-            </a:r>
-            <a:r>
-              <a:rPr sz="1450" b="0" i="0">
+              <a:t>Обучаемая декомпозиция уязвима. </a:t>
+            </a:r>
+            <a:r>
+              <a:rPr sz="1300" b="0" i="0">
                 <a:solidFill>
                   <a:srgbClr val="292E3A"/>
                 </a:solidFill>
                 <a:latin typeface="Calibri"/>
               </a:rPr>
-              <a:t>Наименьшая деградация среди трансформеров: модель работает с патчами без явного разделения на компоненты.</a:t>
+              <a:t>FEDformer и TimesNet теряют около 5 п.п. sMAPE.</a:t>
             </a:r>
           </a:p>
           <a:p>
@@ -8016,11 +8040,11 @@
                 <a:spcPct val="110000"/>
               </a:lnSpc>
               <a:spcAft>
-                <a:spcPts val="1300"/>
+                <a:spcPts val="1100"/>
               </a:spcAft>
             </a:pPr>
             <a:r>
-              <a:rPr sz="1450" b="1" i="0">
+              <a:rPr sz="1300" b="1" i="0">
                 <a:solidFill>
                   <a:srgbClr val="E07A5F"/>
                 </a:solidFill>
@@ -8029,22 +8053,22 @@
               <a:t>▪  </a:t>
             </a:r>
             <a:r>
-              <a:rPr sz="1450" b="1" i="0">
+              <a:rPr sz="1300" b="1" i="0">
                 <a:solidFill>
                   <a:srgbClr val="292E3A"/>
                 </a:solidFill>
                 <a:latin typeface="Calibri"/>
               </a:rPr>
-              <a:t>Классические модели стабильны. </a:t>
-            </a:r>
-            <a:r>
-              <a:rPr sz="1450" b="0" i="0">
+              <a:t>PatchTST устойчив. </a:t>
+            </a:r>
+            <a:r>
+              <a:rPr sz="1300" b="0" i="0">
                 <a:solidFill>
                   <a:srgbClr val="292E3A"/>
                 </a:solidFill>
                 <a:latin typeface="Calibri"/>
               </a:rPr>
-              <a:t>ETS и Auto-ARIMA практически нечувствительны к режиму — рекуррентная структура заложена в самой модели.</a:t>
+              <a:t>Наименьшая деградация среди трансформеров.</a:t>
             </a:r>
           </a:p>
           <a:p>
@@ -8053,11 +8077,11 @@
                 <a:spcPct val="110000"/>
               </a:lnSpc>
               <a:spcAft>
-                <a:spcPts val="1300"/>
+                <a:spcPts val="1100"/>
               </a:spcAft>
             </a:pPr>
             <a:r>
-              <a:rPr sz="1450" b="1" i="0">
+              <a:rPr sz="1300" b="1" i="0">
                 <a:solidFill>
                   <a:srgbClr val="E07A5F"/>
                 </a:solidFill>
@@ -8066,42 +8090,42 @@
               <a:t>▪  </a:t>
             </a:r>
             <a:r>
-              <a:rPr sz="1450" b="1" i="0">
+              <a:rPr sz="1300" b="1" i="0">
                 <a:solidFill>
                   <a:srgbClr val="292E3A"/>
                 </a:solidFill>
                 <a:latin typeface="Calibri"/>
               </a:rPr>
-              <a:t>Закономерность. </a:t>
-            </a:r>
-            <a:r>
-              <a:rPr sz="1450" b="0" i="0">
+              <a:t>Классика стабильна. </a:t>
+            </a:r>
+            <a:r>
+              <a:rPr sz="1300" b="0" i="0">
                 <a:solidFill>
                   <a:srgbClr val="292E3A"/>
                 </a:solidFill>
                 <a:latin typeface="Calibri"/>
               </a:rPr>
-              <a:t>Чем сложнее обучаемое разложение, тем сильнее накопление ошибки на горизонте.</a:t>
-            </a:r>
-          </a:p>
-        </p:txBody>
-      </p:sp>
-      <p:sp>
-        <p:nvSpPr>
-          <p:cNvPr id="15" name="Rectangle 14"/>
+              <a:t>ETS и Auto-ARIMA нечувствительны к режиму.</a:t>
+            </a:r>
+          </a:p>
+        </p:txBody>
+      </p:sp>
+      <p:sp>
+        <p:nvSpPr>
+          <p:cNvPr id="16" name="Rectangle 15"/>
           <p:cNvSpPr/>
           <p:nvPr/>
         </p:nvSpPr>
         <p:spPr>
           <a:xfrm>
-            <a:off x="7543800" y="1627632"/>
-            <a:ext cx="4005072" cy="3977639"/>
+            <a:off x="640080" y="5779008"/>
+            <a:ext cx="10908792" cy="566928"/>
           </a:xfrm>
           <a:prstGeom prst="rect">
             <a:avLst/>
           </a:prstGeom>
           <a:solidFill>
-            <a:srgbClr val="1B2649"/>
+            <a:srgbClr val="EEF1F7"/>
           </a:solidFill>
           <a:ln>
             <a:noFill/>
@@ -8132,14 +8156,14 @@
       </p:sp>
       <p:sp>
         <p:nvSpPr>
-          <p:cNvPr id="16" name="Rectangle 15"/>
+          <p:cNvPr id="17" name="Rectangle 16"/>
           <p:cNvSpPr/>
           <p:nvPr/>
         </p:nvSpPr>
         <p:spPr>
           <a:xfrm>
-            <a:off x="7543800" y="1627632"/>
-            <a:ext cx="50800" cy="3977639"/>
+            <a:off x="640080" y="5779008"/>
+            <a:ext cx="50800" cy="566928"/>
           </a:xfrm>
           <a:prstGeom prst="rect">
             <a:avLst/>
@@ -8176,14 +8200,14 @@
       </p:sp>
       <p:sp>
         <p:nvSpPr>
-          <p:cNvPr id="17" name="TextBox 16"/>
+          <p:cNvPr id="18" name="TextBox 17"/>
           <p:cNvSpPr txBox="1"/>
           <p:nvPr/>
         </p:nvSpPr>
         <p:spPr>
           <a:xfrm>
-            <a:off x="7772400" y="1847088"/>
-            <a:ext cx="3566160" cy="365760"/>
+            <a:off x="914400" y="5852160"/>
+            <a:ext cx="1554480" cy="420624"/>
           </a:xfrm>
           <a:prstGeom prst="rect">
             <a:avLst/>
@@ -8191,7 +8215,7 @@
           <a:noFill/>
         </p:spPr>
         <p:txBody>
-          <a:bodyPr wrap="square" anchor="t" lIns="0" rIns="0" tIns="0" bIns="0">
+          <a:bodyPr wrap="square" anchor="ctr" lIns="0" rIns="0" tIns="0" bIns="0">
             <a:spAutoFit/>
           </a:bodyPr>
           <a:lstStyle/>
@@ -8204,264 +8228,6 @@
             <a:r>
               <a:rPr sz="1300" b="1" i="0">
                 <a:solidFill>
-                  <a:srgbClr val="E07A5F"/>
-                </a:solidFill>
-                <a:latin typeface="Calibri"/>
-              </a:rPr>
-              <a:t>СЛЕДСТВИЕ</a:t>
-            </a:r>
-          </a:p>
-        </p:txBody>
-      </p:sp>
-      <p:sp>
-        <p:nvSpPr>
-          <p:cNvPr id="18" name="TextBox 17"/>
-          <p:cNvSpPr txBox="1"/>
-          <p:nvPr/>
-        </p:nvSpPr>
-        <p:spPr>
-          <a:xfrm>
-            <a:off x="7772400" y="2286000"/>
-            <a:ext cx="3611880" cy="2286000"/>
-          </a:xfrm>
-          <a:prstGeom prst="rect">
-            <a:avLst/>
-          </a:prstGeom>
-          <a:noFill/>
-        </p:spPr>
-        <p:txBody>
-          <a:bodyPr wrap="square" anchor="t" lIns="0" rIns="0" tIns="0" bIns="0">
-            <a:spAutoFit/>
-          </a:bodyPr>
-          <a:lstStyle/>
-          <a:p>
-            <a:pPr algn="l">
-              <a:lnSpc>
-                <a:spcPct val="122000"/>
-              </a:lnSpc>
-            </a:pPr>
-            <a:r>
-              <a:rPr sz="1500" b="0" i="0">
-                <a:solidFill>
-                  <a:srgbClr val="FFFFFF"/>
-                </a:solidFill>
-                <a:latin typeface="Calibri"/>
-              </a:rPr>
-              <a:t>Сложная обучаемая декомпозиция повышает риск накопления ошибки при многошаговом прогнозе. В задачах с итеративным прогнозированием простые и классические модели предпочтительнее.</a:t>
-            </a:r>
-          </a:p>
-        </p:txBody>
-      </p:sp>
-      <p:sp>
-        <p:nvSpPr>
-          <p:cNvPr id="19" name="Rectangle 18"/>
-          <p:cNvSpPr/>
-          <p:nvPr/>
-        </p:nvSpPr>
-        <p:spPr>
-          <a:xfrm>
-            <a:off x="7772400" y="4526280"/>
-            <a:ext cx="3383280" cy="12700"/>
-          </a:xfrm>
-          <a:prstGeom prst="rect">
-            <a:avLst/>
-          </a:prstGeom>
-          <a:solidFill>
-            <a:srgbClr val="2E3D6B"/>
-          </a:solidFill>
-          <a:ln>
-            <a:noFill/>
-          </a:ln>
-          <a:effectLst/>
-        </p:spPr>
-        <p:style>
-          <a:lnRef idx="1">
-            <a:schemeClr val="accent1"/>
-          </a:lnRef>
-          <a:fillRef idx="3">
-            <a:schemeClr val="accent1"/>
-          </a:fillRef>
-          <a:effectRef idx="2">
-            <a:schemeClr val="accent1"/>
-          </a:effectRef>
-          <a:fontRef idx="minor">
-            <a:schemeClr val="lt1"/>
-          </a:fontRef>
-        </p:style>
-        <p:txBody>
-          <a:bodyPr rtlCol="0" anchor="ctr"/>
-          <a:lstStyle/>
-          <a:p>
-            <a:pPr algn="ctr"/>
-          </a:p>
-        </p:txBody>
-      </p:sp>
-      <p:sp>
-        <p:nvSpPr>
-          <p:cNvPr id="20" name="TextBox 19"/>
-          <p:cNvSpPr txBox="1"/>
-          <p:nvPr/>
-        </p:nvSpPr>
-        <p:spPr>
-          <a:xfrm>
-            <a:off x="7772400" y="4681728"/>
-            <a:ext cx="3611880" cy="914400"/>
-          </a:xfrm>
-          <a:prstGeom prst="rect">
-            <a:avLst/>
-          </a:prstGeom>
-          <a:noFill/>
-        </p:spPr>
-        <p:txBody>
-          <a:bodyPr wrap="square" anchor="t" lIns="0" rIns="0" tIns="0" bIns="0">
-            <a:spAutoFit/>
-          </a:bodyPr>
-          <a:lstStyle/>
-          <a:p>
-            <a:pPr algn="l">
-              <a:lnSpc>
-                <a:spcPct val="118000"/>
-              </a:lnSpc>
-            </a:pPr>
-            <a:r>
-              <a:rPr sz="1400" b="1" i="0">
-                <a:solidFill>
-                  <a:srgbClr val="E07A5F"/>
-                </a:solidFill>
-                <a:latin typeface="Calibri"/>
-              </a:rPr>
-              <a:t>Рекомендация: </a:t>
-            </a:r>
-            <a:r>
-              <a:rPr sz="1400" b="0" i="0">
-                <a:solidFill>
-                  <a:srgbClr val="B7C2DE"/>
-                </a:solidFill>
-                <a:latin typeface="Calibri"/>
-              </a:rPr>
-              <a:t>выбор модели должен учитывать не только точность, но и режим её применения.</a:t>
-            </a:r>
-          </a:p>
-        </p:txBody>
-      </p:sp>
-      <p:sp>
-        <p:nvSpPr>
-          <p:cNvPr id="21" name="Rectangle 20"/>
-          <p:cNvSpPr/>
-          <p:nvPr/>
-        </p:nvSpPr>
-        <p:spPr>
-          <a:xfrm>
-            <a:off x="640080" y="5779008"/>
-            <a:ext cx="10908792" cy="566928"/>
-          </a:xfrm>
-          <a:prstGeom prst="rect">
-            <a:avLst/>
-          </a:prstGeom>
-          <a:solidFill>
-            <a:srgbClr val="EEF1F7"/>
-          </a:solidFill>
-          <a:ln>
-            <a:noFill/>
-          </a:ln>
-          <a:effectLst/>
-        </p:spPr>
-        <p:style>
-          <a:lnRef idx="1">
-            <a:schemeClr val="accent1"/>
-          </a:lnRef>
-          <a:fillRef idx="3">
-            <a:schemeClr val="accent1"/>
-          </a:fillRef>
-          <a:effectRef idx="2">
-            <a:schemeClr val="accent1"/>
-          </a:effectRef>
-          <a:fontRef idx="minor">
-            <a:schemeClr val="lt1"/>
-          </a:fontRef>
-        </p:style>
-        <p:txBody>
-          <a:bodyPr rtlCol="0" anchor="ctr"/>
-          <a:lstStyle/>
-          <a:p>
-            <a:pPr algn="ctr"/>
-          </a:p>
-        </p:txBody>
-      </p:sp>
-      <p:sp>
-        <p:nvSpPr>
-          <p:cNvPr id="22" name="Rectangle 21"/>
-          <p:cNvSpPr/>
-          <p:nvPr/>
-        </p:nvSpPr>
-        <p:spPr>
-          <a:xfrm>
-            <a:off x="640080" y="5779008"/>
-            <a:ext cx="50800" cy="566928"/>
-          </a:xfrm>
-          <a:prstGeom prst="rect">
-            <a:avLst/>
-          </a:prstGeom>
-          <a:solidFill>
-            <a:srgbClr val="E07A5F"/>
-          </a:solidFill>
-          <a:ln>
-            <a:noFill/>
-          </a:ln>
-          <a:effectLst/>
-        </p:spPr>
-        <p:style>
-          <a:lnRef idx="1">
-            <a:schemeClr val="accent1"/>
-          </a:lnRef>
-          <a:fillRef idx="3">
-            <a:schemeClr val="accent1"/>
-          </a:fillRef>
-          <a:effectRef idx="2">
-            <a:schemeClr val="accent1"/>
-          </a:effectRef>
-          <a:fontRef idx="minor">
-            <a:schemeClr val="lt1"/>
-          </a:fontRef>
-        </p:style>
-        <p:txBody>
-          <a:bodyPr rtlCol="0" anchor="ctr"/>
-          <a:lstStyle/>
-          <a:p>
-            <a:pPr algn="ctr"/>
-          </a:p>
-        </p:txBody>
-      </p:sp>
-      <p:sp>
-        <p:nvSpPr>
-          <p:cNvPr id="23" name="TextBox 22"/>
-          <p:cNvSpPr txBox="1"/>
-          <p:nvPr/>
-        </p:nvSpPr>
-        <p:spPr>
-          <a:xfrm>
-            <a:off x="914400" y="5852160"/>
-            <a:ext cx="1554480" cy="420624"/>
-          </a:xfrm>
-          <a:prstGeom prst="rect">
-            <a:avLst/>
-          </a:prstGeom>
-          <a:noFill/>
-        </p:spPr>
-        <p:txBody>
-          <a:bodyPr wrap="square" anchor="ctr" lIns="0" rIns="0" tIns="0" bIns="0">
-            <a:spAutoFit/>
-          </a:bodyPr>
-          <a:lstStyle/>
-          <a:p>
-            <a:pPr algn="l">
-              <a:lnSpc>
-                <a:spcPct val="100000"/>
-              </a:lnSpc>
-            </a:pPr>
-            <a:r>
-              <a:rPr sz="1300" b="1" i="0">
-                <a:solidFill>
                   <a:srgbClr val="C25A40"/>
                 </a:solidFill>
                 <a:latin typeface="Calibri"/>
@@ -8473,7 +8239,7 @@
       </p:sp>
       <p:sp>
         <p:nvSpPr>
-          <p:cNvPr id="24" name="TextBox 23"/>
+          <p:cNvPr id="19" name="TextBox 18"/>
           <p:cNvSpPr txBox="1"/>
           <p:nvPr/>
         </p:nvSpPr>
@@ -8505,7 +8271,7 @@
                 </a:solidFill>
                 <a:latin typeface="Calibri"/>
               </a:rPr>
-              <a:t>Тип декомпозиции должен соответствовать режиму прогнозирования.</a:t>
+              <a:t>Сложная обучаемая декомпозиция повышает риск накопления ошибки; тип декомпозиции должен соответствовать режиму прогнозирования.</a:t>
             </a:r>
           </a:p>
         </p:txBody>
@@ -17950,7 +17716,7 @@
                 </a:solidFill>
                 <a:latin typeface="Calibri"/>
               </a:rPr>
-              <a:t>Предобученные нейросети и классические модели</a:t>
+              <a:t>Предобучение: эффект на прогнозе ряда</a:t>
             </a:r>
           </a:p>
         </p:txBody>
@@ -17989,7 +17755,7 @@
                 </a:solidFill>
                 <a:latin typeface="Calibri"/>
               </a:rPr>
-              <a:t>Раздел 3. Превосходство на среднечастотных и длинных рядах</a:t>
+              <a:t>Раздел 3. Одна модель: обучение с нуля против предобучения</a:t>
             </a:r>
           </a:p>
         </p:txBody>
@@ -18162,7 +17928,7 @@
       </p:sp>
       <p:pic>
         <p:nvPicPr>
-          <p:cNvPr id="11" name="Picture 10" descr="cherry_pretrained_D2111.png"/>
+          <p:cNvPr id="11" name="Picture 10" descr="pretrain_forecast_autoformer_D2111.png"/>
           <p:cNvPicPr>
             <a:picLocks noChangeAspect="1"/>
           </p:cNvPicPr>
@@ -18176,8 +17942,8 @@
         </p:blipFill>
         <p:spPr>
           <a:xfrm>
-            <a:off x="640080" y="2061364"/>
-            <a:ext cx="7132320" cy="3009591"/>
+            <a:off x="640080" y="2303046"/>
+            <a:ext cx="7223760" cy="2526228"/>
           </a:xfrm>
           <a:prstGeom prst="rect">
             <a:avLst/>
@@ -18192,8 +17958,8 @@
         </p:nvSpPr>
         <p:spPr>
           <a:xfrm>
-            <a:off x="7909560" y="1554480"/>
-            <a:ext cx="3639312" cy="4023360"/>
+            <a:off x="8001000" y="1554480"/>
+            <a:ext cx="3547872" cy="4023360"/>
           </a:xfrm>
           <a:prstGeom prst="rect">
             <a:avLst/>
@@ -18236,7 +18002,7 @@
         </p:nvSpPr>
         <p:spPr>
           <a:xfrm>
-            <a:off x="7909560" y="1554480"/>
+            <a:off x="8001000" y="1554480"/>
             <a:ext cx="50800" cy="4023360"/>
           </a:xfrm>
           <a:prstGeom prst="rect">
@@ -18280,8 +18046,8 @@
         </p:nvSpPr>
         <p:spPr>
           <a:xfrm>
-            <a:off x="8165592" y="1719072"/>
-            <a:ext cx="3273552" cy="365760"/>
+            <a:off x="8257032" y="1719072"/>
+            <a:ext cx="3182112" cy="365760"/>
           </a:xfrm>
           <a:prstGeom prst="rect">
             <a:avLst/>
@@ -18306,7 +18072,7 @@
                 </a:solidFill>
                 <a:latin typeface="Calibri"/>
               </a:rPr>
-              <a:t>Ключевые сопоставления</a:t>
+              <a:t>Что показывает график</a:t>
             </a:r>
           </a:p>
         </p:txBody>
@@ -18319,8 +18085,8 @@
         </p:nvSpPr>
         <p:spPr>
           <a:xfrm>
-            <a:off x="8165592" y="2157984"/>
-            <a:ext cx="3182112" cy="3291840"/>
+            <a:off x="8257032" y="2157984"/>
+            <a:ext cx="3090672" cy="3291840"/>
           </a:xfrm>
           <a:prstGeom prst="rect">
             <a:avLst/>
@@ -18338,7 +18104,7 @@
                 <a:spcPct val="110000"/>
               </a:lnSpc>
               <a:spcAft>
-                <a:spcPts val="1100"/>
+                <a:spcPts val="1200"/>
               </a:spcAft>
             </a:pPr>
             <a:r>
@@ -18357,7 +18123,7 @@
                 </a:solidFill>
                 <a:latin typeface="Calibri"/>
               </a:rPr>
-              <a:t>M3 monthly. </a:t>
+              <a:t>Серая линия — </a:t>
             </a:r>
             <a:r>
               <a:rPr sz="1350" b="0" i="0">
@@ -18366,7 +18132,7 @@
                 </a:solidFill>
                 <a:latin typeface="Calibri"/>
               </a:rPr>
-              <a:t>Предобученный TimesNet (13.68) точнее ETS (17.42).</a:t>
+              <a:t>обучающая история, чёрная — фактические значения.</a:t>
             </a:r>
           </a:p>
           <a:p>
@@ -18375,7 +18141,7 @@
                 <a:spcPct val="110000"/>
               </a:lnSpc>
               <a:spcAft>
-                <a:spcPts val="1100"/>
+                <a:spcPts val="1200"/>
               </a:spcAft>
             </a:pPr>
             <a:r>
@@ -18394,7 +18160,7 @@
                 </a:solidFill>
                 <a:latin typeface="Calibri"/>
               </a:rPr>
-              <a:t>M4 daily. </a:t>
+              <a:t>Пунктир (с нуля). </a:t>
             </a:r>
             <a:r>
               <a:rPr sz="1350" b="0" i="0">
@@ -18403,7 +18169,7 @@
                 </a:solidFill>
                 <a:latin typeface="Calibri"/>
               </a:rPr>
-              <a:t>Предобученный PatchTST (2.36) точнее Auto-ARIMA (3.22) и ETS (3.46).</a:t>
+              <a:t>Прогноз Autoformer без предобучения, sMAPE 3.8 %.</a:t>
             </a:r>
           </a:p>
           <a:p>
@@ -18412,7 +18178,7 @@
                 <a:spcPct val="110000"/>
               </a:lnSpc>
               <a:spcAft>
-                <a:spcPts val="1100"/>
+                <a:spcPts val="1200"/>
               </a:spcAft>
             </a:pPr>
             <a:r>
@@ -18431,7 +18197,7 @@
                 </a:solidFill>
                 <a:latin typeface="Calibri"/>
               </a:rPr>
-              <a:t>Прогнозы нейросетей </a:t>
+              <a:t>Сплошная (предобучен). </a:t>
             </a:r>
             <a:r>
               <a:rPr sz="1350" b="0" i="0">
@@ -18440,7 +18206,7 @@
                 </a:solidFill>
                 <a:latin typeface="Calibri"/>
               </a:rPr>
-              <a:t>плотно следуют фактической траектории.</a:t>
+              <a:t>После предобучения sMAPE 1.0 % — прогноз плотно следует факту.</a:t>
             </a:r>
           </a:p>
         </p:txBody>
@@ -18606,7 +18372,7 @@
                 </a:solidFill>
                 <a:latin typeface="Calibri"/>
               </a:rPr>
-              <a:t>При достаточном объёме данных предобученные нейросетевые модели обеспечивают точность выше лучших классических моделей.</a:t>
+              <a:t>Предобучение на корпусе рядов существенно повышает точность прогноза одной и той же модели.</a:t>
             </a:r>
           </a:p>
         </p:txBody>

--- a/docs/Презентация_Лазарев_ВКР.pptx
+++ b/docs/Презентация_Лазарев_ВКР.pptx
@@ -19,6 +19,7 @@
     <p:sldId id="267" r:id="rId18"/>
     <p:sldId id="268" r:id="rId19"/>
     <p:sldId id="269" r:id="rId20"/>
+    <p:sldId id="270" r:id="rId21"/>
   </p:sldIdLst>
   <p:sldSz cx="12191695" cy="6858000" type="screen4x3"/>
   <p:notesSz cx="6858000" cy="9144000"/>
@@ -3862,7 +3863,7 @@
                 </a:solidFill>
                 <a:latin typeface="Calibri"/>
               </a:rPr>
-              <a:t>10 / 14</a:t>
+              <a:t>10 / 15</a:t>
             </a:r>
           </a:p>
         </p:txBody>
@@ -6872,7 +6873,7 @@
                 </a:solidFill>
                 <a:latin typeface="Calibri"/>
               </a:rPr>
-              <a:t>11 / 14</a:t>
+              <a:t>11 / 15</a:t>
             </a:r>
           </a:p>
         </p:txBody>
@@ -7700,7 +7701,7 @@
                 </a:solidFill>
                 <a:latin typeface="Calibri"/>
               </a:rPr>
-              <a:t>12 / 14</a:t>
+              <a:t>12 / 15</a:t>
             </a:r>
           </a:p>
         </p:txBody>
@@ -7788,40 +7789,16 @@
           </a:p>
         </p:txBody>
       </p:sp>
-      <p:pic>
-        <p:nvPicPr>
-          <p:cNvPr id="11" name="Picture 10" descr="rollout_m3_quarterly_T478.png"/>
-          <p:cNvPicPr>
-            <a:picLocks noChangeAspect="1"/>
-          </p:cNvPicPr>
-          <p:nvPr/>
-        </p:nvPicPr>
-        <p:blipFill>
-          <a:blip r:embed="rId2"/>
-          <a:stretch>
-            <a:fillRect/>
-          </a:stretch>
-        </p:blipFill>
-        <p:spPr>
-          <a:xfrm>
-            <a:off x="640080" y="1973457"/>
-            <a:ext cx="7178040" cy="3185406"/>
-          </a:xfrm>
-          <a:prstGeom prst="rect">
-            <a:avLst/>
-          </a:prstGeom>
-        </p:spPr>
-      </p:pic>
-      <p:sp>
-        <p:nvSpPr>
-          <p:cNvPr id="12" name="Rectangle 11"/>
+      <p:sp>
+        <p:nvSpPr>
+          <p:cNvPr id="11" name="Rectangle 10"/>
           <p:cNvSpPr/>
           <p:nvPr/>
         </p:nvSpPr>
         <p:spPr>
           <a:xfrm>
-            <a:off x="7955279" y="1554480"/>
-            <a:ext cx="3593592" cy="4023360"/>
+            <a:off x="640080" y="1627632"/>
+            <a:ext cx="6675120" cy="3977639"/>
           </a:xfrm>
           <a:prstGeom prst="rect">
             <a:avLst/>
@@ -7858,14 +7835,14 @@
       </p:sp>
       <p:sp>
         <p:nvSpPr>
-          <p:cNvPr id="13" name="Rectangle 12"/>
+          <p:cNvPr id="12" name="Rectangle 11"/>
           <p:cNvSpPr/>
           <p:nvPr/>
         </p:nvSpPr>
         <p:spPr>
           <a:xfrm>
-            <a:off x="7955279" y="1554480"/>
-            <a:ext cx="50800" cy="4023360"/>
+            <a:off x="640080" y="1627632"/>
+            <a:ext cx="50800" cy="3977639"/>
           </a:xfrm>
           <a:prstGeom prst="rect">
             <a:avLst/>
@@ -7902,14 +7879,14 @@
       </p:sp>
       <p:sp>
         <p:nvSpPr>
-          <p:cNvPr id="14" name="TextBox 13"/>
+          <p:cNvPr id="13" name="TextBox 12"/>
           <p:cNvSpPr txBox="1"/>
           <p:nvPr/>
         </p:nvSpPr>
         <p:spPr>
           <a:xfrm>
-            <a:off x="8211311" y="1719072"/>
-            <a:ext cx="3227832" cy="365760"/>
+            <a:off x="896112" y="1792224"/>
+            <a:ext cx="6309360" cy="365760"/>
           </a:xfrm>
           <a:prstGeom prst="rect">
             <a:avLst/>
@@ -7934,21 +7911,21 @@
                 </a:solidFill>
                 <a:latin typeface="Calibri"/>
               </a:rPr>
-              <a:t>Прямой против итеративного</a:t>
-            </a:r>
-          </a:p>
-        </p:txBody>
-      </p:sp>
-      <p:sp>
-        <p:nvSpPr>
-          <p:cNvPr id="15" name="TextBox 14"/>
+              <a:t>Деградация при переходе от прямого режима к итеративному</a:t>
+            </a:r>
+          </a:p>
+        </p:txBody>
+      </p:sp>
+      <p:sp>
+        <p:nvSpPr>
+          <p:cNvPr id="14" name="TextBox 13"/>
           <p:cNvSpPr txBox="1"/>
           <p:nvPr/>
         </p:nvSpPr>
         <p:spPr>
           <a:xfrm>
-            <a:off x="8211311" y="2157984"/>
-            <a:ext cx="3136392" cy="3291840"/>
+            <a:off x="896112" y="2231136"/>
+            <a:ext cx="6217920" cy="3246119"/>
           </a:xfrm>
           <a:prstGeom prst="rect">
             <a:avLst/>
@@ -7966,11 +7943,11 @@
                 <a:spcPct val="110000"/>
               </a:lnSpc>
               <a:spcAft>
-                <a:spcPts val="1100"/>
+                <a:spcPts val="1300"/>
               </a:spcAft>
             </a:pPr>
             <a:r>
-              <a:rPr sz="1300" b="1" i="0">
+              <a:rPr sz="1450" b="1" i="0">
                 <a:solidFill>
                   <a:srgbClr val="E07A5F"/>
                 </a:solidFill>
@@ -7979,22 +7956,22 @@
               <a:t>▪  </a:t>
             </a:r>
             <a:r>
-              <a:rPr sz="1300" b="1" i="0">
+              <a:rPr sz="1450" b="1" i="0">
                 <a:solidFill>
                   <a:srgbClr val="292E3A"/>
                 </a:solidFill>
                 <a:latin typeface="Calibri"/>
               </a:rPr>
-              <a:t>На графике </a:t>
-            </a:r>
-            <a:r>
-              <a:rPr sz="1300" b="0" i="0">
+              <a:t>Обучаемая декомпозиция уязвима. </a:t>
+            </a:r>
+            <a:r>
+              <a:rPr sz="1450" b="0" i="0">
                 <a:solidFill>
                   <a:srgbClr val="292E3A"/>
                 </a:solidFill>
                 <a:latin typeface="Calibri"/>
               </a:rPr>
-              <a:t>пунктир — прямой прогноз, сплошная — итеративный.</a:t>
+              <a:t>FEDformer и TimesNet теряют около 5 п.п. sMAPE — выделенные компоненты искажаются на собственных прогнозах.</a:t>
             </a:r>
           </a:p>
           <a:p>
@@ -8003,11 +7980,11 @@
                 <a:spcPct val="110000"/>
               </a:lnSpc>
               <a:spcAft>
-                <a:spcPts val="1100"/>
+                <a:spcPts val="1300"/>
               </a:spcAft>
             </a:pPr>
             <a:r>
-              <a:rPr sz="1300" b="1" i="0">
+              <a:rPr sz="1450" b="1" i="0">
                 <a:solidFill>
                   <a:srgbClr val="E07A5F"/>
                 </a:solidFill>
@@ -8016,22 +7993,22 @@
               <a:t>▪  </a:t>
             </a:r>
             <a:r>
-              <a:rPr sz="1300" b="1" i="0">
+              <a:rPr sz="1450" b="1" i="0">
                 <a:solidFill>
                   <a:srgbClr val="292E3A"/>
                 </a:solidFill>
                 <a:latin typeface="Calibri"/>
               </a:rPr>
-              <a:t>Обучаемая декомпозиция уязвима. </a:t>
-            </a:r>
-            <a:r>
-              <a:rPr sz="1300" b="0" i="0">
+              <a:t>PatchTST устойчив. </a:t>
+            </a:r>
+            <a:r>
+              <a:rPr sz="1450" b="0" i="0">
                 <a:solidFill>
                   <a:srgbClr val="292E3A"/>
                 </a:solidFill>
                 <a:latin typeface="Calibri"/>
               </a:rPr>
-              <a:t>FEDformer и TimesNet теряют около 5 п.п. sMAPE.</a:t>
+              <a:t>Наименьшая деградация среди трансформеров: модель работает с патчами без явного разделения на компоненты.</a:t>
             </a:r>
           </a:p>
           <a:p>
@@ -8040,11 +8017,11 @@
                 <a:spcPct val="110000"/>
               </a:lnSpc>
               <a:spcAft>
-                <a:spcPts val="1100"/>
+                <a:spcPts val="1300"/>
               </a:spcAft>
             </a:pPr>
             <a:r>
-              <a:rPr sz="1300" b="1" i="0">
+              <a:rPr sz="1450" b="1" i="0">
                 <a:solidFill>
                   <a:srgbClr val="E07A5F"/>
                 </a:solidFill>
@@ -8053,22 +8030,22 @@
               <a:t>▪  </a:t>
             </a:r>
             <a:r>
-              <a:rPr sz="1300" b="1" i="0">
+              <a:rPr sz="1450" b="1" i="0">
                 <a:solidFill>
                   <a:srgbClr val="292E3A"/>
                 </a:solidFill>
                 <a:latin typeface="Calibri"/>
               </a:rPr>
-              <a:t>PatchTST устойчив. </a:t>
-            </a:r>
-            <a:r>
-              <a:rPr sz="1300" b="0" i="0">
+              <a:t>Классические модели стабильны. </a:t>
+            </a:r>
+            <a:r>
+              <a:rPr sz="1450" b="0" i="0">
                 <a:solidFill>
                   <a:srgbClr val="292E3A"/>
                 </a:solidFill>
                 <a:latin typeface="Calibri"/>
               </a:rPr>
-              <a:t>Наименьшая деградация среди трансформеров.</a:t>
+              <a:t>ETS и Auto-ARIMA практически нечувствительны к режиму — рекуррентная структура заложена в самой модели.</a:t>
             </a:r>
           </a:p>
           <a:p>
@@ -8077,42 +8054,300 @@
                 <a:spcPct val="110000"/>
               </a:lnSpc>
               <a:spcAft>
-                <a:spcPts val="1100"/>
+                <a:spcPts val="1300"/>
               </a:spcAft>
             </a:pPr>
             <a:r>
+              <a:rPr sz="1450" b="1" i="0">
+                <a:solidFill>
+                  <a:srgbClr val="E07A5F"/>
+                </a:solidFill>
+                <a:latin typeface="Calibri"/>
+              </a:rPr>
+              <a:t>▪  </a:t>
+            </a:r>
+            <a:r>
+              <a:rPr sz="1450" b="1" i="0">
+                <a:solidFill>
+                  <a:srgbClr val="292E3A"/>
+                </a:solidFill>
+                <a:latin typeface="Calibri"/>
+              </a:rPr>
+              <a:t>Закономерность. </a:t>
+            </a:r>
+            <a:r>
+              <a:rPr sz="1450" b="0" i="0">
+                <a:solidFill>
+                  <a:srgbClr val="292E3A"/>
+                </a:solidFill>
+                <a:latin typeface="Calibri"/>
+              </a:rPr>
+              <a:t>Чем сложнее обучаемое разложение, тем сильнее накопление ошибки на горизонте.</a:t>
+            </a:r>
+          </a:p>
+        </p:txBody>
+      </p:sp>
+      <p:sp>
+        <p:nvSpPr>
+          <p:cNvPr id="15" name="Rectangle 14"/>
+          <p:cNvSpPr/>
+          <p:nvPr/>
+        </p:nvSpPr>
+        <p:spPr>
+          <a:xfrm>
+            <a:off x="7543800" y="1627632"/>
+            <a:ext cx="4005072" cy="3977639"/>
+          </a:xfrm>
+          <a:prstGeom prst="rect">
+            <a:avLst/>
+          </a:prstGeom>
+          <a:solidFill>
+            <a:srgbClr val="1B2649"/>
+          </a:solidFill>
+          <a:ln>
+            <a:noFill/>
+          </a:ln>
+          <a:effectLst/>
+        </p:spPr>
+        <p:style>
+          <a:lnRef idx="1">
+            <a:schemeClr val="accent1"/>
+          </a:lnRef>
+          <a:fillRef idx="3">
+            <a:schemeClr val="accent1"/>
+          </a:fillRef>
+          <a:effectRef idx="2">
+            <a:schemeClr val="accent1"/>
+          </a:effectRef>
+          <a:fontRef idx="minor">
+            <a:schemeClr val="lt1"/>
+          </a:fontRef>
+        </p:style>
+        <p:txBody>
+          <a:bodyPr rtlCol="0" anchor="ctr"/>
+          <a:lstStyle/>
+          <a:p>
+            <a:pPr algn="ctr"/>
+          </a:p>
+        </p:txBody>
+      </p:sp>
+      <p:sp>
+        <p:nvSpPr>
+          <p:cNvPr id="16" name="Rectangle 15"/>
+          <p:cNvSpPr/>
+          <p:nvPr/>
+        </p:nvSpPr>
+        <p:spPr>
+          <a:xfrm>
+            <a:off x="7543800" y="1627632"/>
+            <a:ext cx="50800" cy="3977639"/>
+          </a:xfrm>
+          <a:prstGeom prst="rect">
+            <a:avLst/>
+          </a:prstGeom>
+          <a:solidFill>
+            <a:srgbClr val="E07A5F"/>
+          </a:solidFill>
+          <a:ln>
+            <a:noFill/>
+          </a:ln>
+          <a:effectLst/>
+        </p:spPr>
+        <p:style>
+          <a:lnRef idx="1">
+            <a:schemeClr val="accent1"/>
+          </a:lnRef>
+          <a:fillRef idx="3">
+            <a:schemeClr val="accent1"/>
+          </a:fillRef>
+          <a:effectRef idx="2">
+            <a:schemeClr val="accent1"/>
+          </a:effectRef>
+          <a:fontRef idx="minor">
+            <a:schemeClr val="lt1"/>
+          </a:fontRef>
+        </p:style>
+        <p:txBody>
+          <a:bodyPr rtlCol="0" anchor="ctr"/>
+          <a:lstStyle/>
+          <a:p>
+            <a:pPr algn="ctr"/>
+          </a:p>
+        </p:txBody>
+      </p:sp>
+      <p:sp>
+        <p:nvSpPr>
+          <p:cNvPr id="17" name="TextBox 16"/>
+          <p:cNvSpPr txBox="1"/>
+          <p:nvPr/>
+        </p:nvSpPr>
+        <p:spPr>
+          <a:xfrm>
+            <a:off x="7772400" y="1847088"/>
+            <a:ext cx="3566160" cy="365760"/>
+          </a:xfrm>
+          <a:prstGeom prst="rect">
+            <a:avLst/>
+          </a:prstGeom>
+          <a:noFill/>
+        </p:spPr>
+        <p:txBody>
+          <a:bodyPr wrap="square" anchor="t" lIns="0" rIns="0" tIns="0" bIns="0">
+            <a:spAutoFit/>
+          </a:bodyPr>
+          <a:lstStyle/>
+          <a:p>
+            <a:pPr algn="l">
+              <a:lnSpc>
+                <a:spcPct val="100000"/>
+              </a:lnSpc>
+            </a:pPr>
+            <a:r>
               <a:rPr sz="1300" b="1" i="0">
                 <a:solidFill>
                   <a:srgbClr val="E07A5F"/>
                 </a:solidFill>
                 <a:latin typeface="Calibri"/>
               </a:rPr>
-              <a:t>▪  </a:t>
-            </a:r>
-            <a:r>
-              <a:rPr sz="1300" b="1" i="0">
-                <a:solidFill>
-                  <a:srgbClr val="292E3A"/>
-                </a:solidFill>
-                <a:latin typeface="Calibri"/>
-              </a:rPr>
-              <a:t>Классика стабильна. </a:t>
-            </a:r>
-            <a:r>
-              <a:rPr sz="1300" b="0" i="0">
-                <a:solidFill>
-                  <a:srgbClr val="292E3A"/>
-                </a:solidFill>
-                <a:latin typeface="Calibri"/>
-              </a:rPr>
-              <a:t>ETS и Auto-ARIMA нечувствительны к режиму.</a:t>
-            </a:r>
-          </a:p>
-        </p:txBody>
-      </p:sp>
-      <p:sp>
-        <p:nvSpPr>
-          <p:cNvPr id="16" name="Rectangle 15"/>
+              <a:t>СЛЕДСТВИЕ</a:t>
+            </a:r>
+          </a:p>
+        </p:txBody>
+      </p:sp>
+      <p:sp>
+        <p:nvSpPr>
+          <p:cNvPr id="18" name="TextBox 17"/>
+          <p:cNvSpPr txBox="1"/>
+          <p:nvPr/>
+        </p:nvSpPr>
+        <p:spPr>
+          <a:xfrm>
+            <a:off x="7772400" y="2286000"/>
+            <a:ext cx="3611880" cy="2286000"/>
+          </a:xfrm>
+          <a:prstGeom prst="rect">
+            <a:avLst/>
+          </a:prstGeom>
+          <a:noFill/>
+        </p:spPr>
+        <p:txBody>
+          <a:bodyPr wrap="square" anchor="t" lIns="0" rIns="0" tIns="0" bIns="0">
+            <a:spAutoFit/>
+          </a:bodyPr>
+          <a:lstStyle/>
+          <a:p>
+            <a:pPr algn="l">
+              <a:lnSpc>
+                <a:spcPct val="122000"/>
+              </a:lnSpc>
+            </a:pPr>
+            <a:r>
+              <a:rPr sz="1500" b="0" i="0">
+                <a:solidFill>
+                  <a:srgbClr val="FFFFFF"/>
+                </a:solidFill>
+                <a:latin typeface="Calibri"/>
+              </a:rPr>
+              <a:t>Сложная обучаемая декомпозиция повышает риск накопления ошибки при многошаговом прогнозе. В задачах с итеративным прогнозированием простые и классические модели предпочтительнее.</a:t>
+            </a:r>
+          </a:p>
+        </p:txBody>
+      </p:sp>
+      <p:sp>
+        <p:nvSpPr>
+          <p:cNvPr id="19" name="Rectangle 18"/>
+          <p:cNvSpPr/>
+          <p:nvPr/>
+        </p:nvSpPr>
+        <p:spPr>
+          <a:xfrm>
+            <a:off x="7772400" y="4526280"/>
+            <a:ext cx="3383280" cy="12700"/>
+          </a:xfrm>
+          <a:prstGeom prst="rect">
+            <a:avLst/>
+          </a:prstGeom>
+          <a:solidFill>
+            <a:srgbClr val="2E3D6B"/>
+          </a:solidFill>
+          <a:ln>
+            <a:noFill/>
+          </a:ln>
+          <a:effectLst/>
+        </p:spPr>
+        <p:style>
+          <a:lnRef idx="1">
+            <a:schemeClr val="accent1"/>
+          </a:lnRef>
+          <a:fillRef idx="3">
+            <a:schemeClr val="accent1"/>
+          </a:fillRef>
+          <a:effectRef idx="2">
+            <a:schemeClr val="accent1"/>
+          </a:effectRef>
+          <a:fontRef idx="minor">
+            <a:schemeClr val="lt1"/>
+          </a:fontRef>
+        </p:style>
+        <p:txBody>
+          <a:bodyPr rtlCol="0" anchor="ctr"/>
+          <a:lstStyle/>
+          <a:p>
+            <a:pPr algn="ctr"/>
+          </a:p>
+        </p:txBody>
+      </p:sp>
+      <p:sp>
+        <p:nvSpPr>
+          <p:cNvPr id="20" name="TextBox 19"/>
+          <p:cNvSpPr txBox="1"/>
+          <p:nvPr/>
+        </p:nvSpPr>
+        <p:spPr>
+          <a:xfrm>
+            <a:off x="7772400" y="4681728"/>
+            <a:ext cx="3611880" cy="914400"/>
+          </a:xfrm>
+          <a:prstGeom prst="rect">
+            <a:avLst/>
+          </a:prstGeom>
+          <a:noFill/>
+        </p:spPr>
+        <p:txBody>
+          <a:bodyPr wrap="square" anchor="t" lIns="0" rIns="0" tIns="0" bIns="0">
+            <a:spAutoFit/>
+          </a:bodyPr>
+          <a:lstStyle/>
+          <a:p>
+            <a:pPr algn="l">
+              <a:lnSpc>
+                <a:spcPct val="118000"/>
+              </a:lnSpc>
+            </a:pPr>
+            <a:r>
+              <a:rPr sz="1400" b="1" i="0">
+                <a:solidFill>
+                  <a:srgbClr val="E07A5F"/>
+                </a:solidFill>
+                <a:latin typeface="Calibri"/>
+              </a:rPr>
+              <a:t>Рекомендация: </a:t>
+            </a:r>
+            <a:r>
+              <a:rPr sz="1400" b="0" i="0">
+                <a:solidFill>
+                  <a:srgbClr val="B7C2DE"/>
+                </a:solidFill>
+                <a:latin typeface="Calibri"/>
+              </a:rPr>
+              <a:t>выбор модели должен учитывать не только точность, но и режим её применения.</a:t>
+            </a:r>
+          </a:p>
+        </p:txBody>
+      </p:sp>
+      <p:sp>
+        <p:nvSpPr>
+          <p:cNvPr id="21" name="Rectangle 20"/>
           <p:cNvSpPr/>
           <p:nvPr/>
         </p:nvSpPr>
@@ -8156,7 +8391,7 @@
       </p:sp>
       <p:sp>
         <p:nvSpPr>
-          <p:cNvPr id="17" name="Rectangle 16"/>
+          <p:cNvPr id="22" name="Rectangle 21"/>
           <p:cNvSpPr/>
           <p:nvPr/>
         </p:nvSpPr>
@@ -8200,7 +8435,7 @@
       </p:sp>
       <p:sp>
         <p:nvSpPr>
-          <p:cNvPr id="18" name="TextBox 17"/>
+          <p:cNvPr id="23" name="TextBox 22"/>
           <p:cNvSpPr txBox="1"/>
           <p:nvPr/>
         </p:nvSpPr>
@@ -8239,7 +8474,7 @@
       </p:sp>
       <p:sp>
         <p:nvSpPr>
-          <p:cNvPr id="19" name="TextBox 18"/>
+          <p:cNvPr id="24" name="TextBox 23"/>
           <p:cNvSpPr txBox="1"/>
           <p:nvPr/>
         </p:nvSpPr>
@@ -8271,7 +8506,7 @@
                 </a:solidFill>
                 <a:latin typeface="Calibri"/>
               </a:rPr>
-              <a:t>Сложная обучаемая декомпозиция повышает риск накопления ошибки; тип декомпозиции должен соответствовать режиму прогнозирования.</a:t>
+              <a:t>Тип декомпозиции должен соответствовать режиму прогнозирования.</a:t>
             </a:r>
           </a:p>
         </p:txBody>
@@ -8460,7 +8695,7 @@
                 </a:solidFill>
                 <a:latin typeface="Calibri"/>
               </a:rPr>
-              <a:t>Выводы и практические рекомендации</a:t>
+              <a:t>Итеративное прогнозирование: прямой vs итеративный</a:t>
             </a:r>
           </a:p>
         </p:txBody>
@@ -8499,7 +8734,7 @@
                 </a:solidFill>
                 <a:latin typeface="Calibri"/>
               </a:rPr>
-              <a:t>Раздел 4. Основные результаты исследования</a:t>
+              <a:t>Раздел 3. Прогноз на квартальном ряде M3 (T478)</a:t>
             </a:r>
           </a:p>
         </p:txBody>
@@ -8582,7 +8817,7 @@
                 </a:solidFill>
                 <a:latin typeface="Calibri"/>
               </a:rPr>
-              <a:t>13 / 14</a:t>
+              <a:t>13 / 15</a:t>
             </a:r>
           </a:p>
         </p:txBody>
@@ -8670,16 +8905,40 @@
           </a:p>
         </p:txBody>
       </p:sp>
-      <p:sp>
-        <p:nvSpPr>
-          <p:cNvPr id="11" name="Rectangle 10"/>
+      <p:pic>
+        <p:nvPicPr>
+          <p:cNvPr id="11" name="Picture 10" descr="rollout_m3_quarterly_T478.png"/>
+          <p:cNvPicPr>
+            <a:picLocks noChangeAspect="1"/>
+          </p:cNvPicPr>
+          <p:nvPr/>
+        </p:nvPicPr>
+        <p:blipFill>
+          <a:blip r:embed="rId2"/>
+          <a:stretch>
+            <a:fillRect/>
+          </a:stretch>
+        </p:blipFill>
+        <p:spPr>
+          <a:xfrm>
+            <a:off x="640080" y="1953168"/>
+            <a:ext cx="7269480" cy="3225984"/>
+          </a:xfrm>
+          <a:prstGeom prst="rect">
+            <a:avLst/>
+          </a:prstGeom>
+        </p:spPr>
+      </p:pic>
+      <p:sp>
+        <p:nvSpPr>
+          <p:cNvPr id="12" name="Rectangle 11"/>
           <p:cNvSpPr/>
           <p:nvPr/>
         </p:nvSpPr>
         <p:spPr>
           <a:xfrm>
-            <a:off x="640080" y="1591056"/>
-            <a:ext cx="10908792" cy="859536"/>
+            <a:off x="8046720" y="1554480"/>
+            <a:ext cx="3502152" cy="4023360"/>
           </a:xfrm>
           <a:prstGeom prst="rect">
             <a:avLst/>
@@ -8716,14 +8975,14 @@
       </p:sp>
       <p:sp>
         <p:nvSpPr>
-          <p:cNvPr id="12" name="Rectangle 11"/>
+          <p:cNvPr id="13" name="Rectangle 12"/>
           <p:cNvSpPr/>
           <p:nvPr/>
         </p:nvSpPr>
         <p:spPr>
           <a:xfrm>
-            <a:off x="640080" y="1591056"/>
-            <a:ext cx="50800" cy="859536"/>
+            <a:off x="8046720" y="1554480"/>
+            <a:ext cx="50800" cy="4023360"/>
           </a:xfrm>
           <a:prstGeom prst="rect">
             <a:avLst/>
@@ -8760,20 +9019,230 @@
       </p:sp>
       <p:sp>
         <p:nvSpPr>
-          <p:cNvPr id="13" name="Oval 12"/>
+          <p:cNvPr id="14" name="TextBox 13"/>
+          <p:cNvSpPr txBox="1"/>
+          <p:nvPr/>
+        </p:nvSpPr>
+        <p:spPr>
+          <a:xfrm>
+            <a:off x="8302752" y="1719072"/>
+            <a:ext cx="3136392" cy="365760"/>
+          </a:xfrm>
+          <a:prstGeom prst="rect">
+            <a:avLst/>
+          </a:prstGeom>
+          <a:noFill/>
+        </p:spPr>
+        <p:txBody>
+          <a:bodyPr wrap="square" anchor="t" lIns="0" rIns="0" tIns="0" bIns="0">
+            <a:spAutoFit/>
+          </a:bodyPr>
+          <a:lstStyle/>
+          <a:p>
+            <a:pPr algn="l">
+              <a:lnSpc>
+                <a:spcPct val="100000"/>
+              </a:lnSpc>
+            </a:pPr>
+            <a:r>
+              <a:rPr sz="1500" b="1" i="0">
+                <a:solidFill>
+                  <a:srgbClr val="1B2649"/>
+                </a:solidFill>
+                <a:latin typeface="Calibri"/>
+              </a:rPr>
+              <a:t>Как читать график</a:t>
+            </a:r>
+          </a:p>
+        </p:txBody>
+      </p:sp>
+      <p:sp>
+        <p:nvSpPr>
+          <p:cNvPr id="15" name="TextBox 14"/>
+          <p:cNvSpPr txBox="1"/>
+          <p:nvPr/>
+        </p:nvSpPr>
+        <p:spPr>
+          <a:xfrm>
+            <a:off x="8302752" y="2157984"/>
+            <a:ext cx="3044952" cy="3291840"/>
+          </a:xfrm>
+          <a:prstGeom prst="rect">
+            <a:avLst/>
+          </a:prstGeom>
+          <a:noFill/>
+        </p:spPr>
+        <p:txBody>
+          <a:bodyPr wrap="square" anchor="t" lIns="0" rIns="0" tIns="0" bIns="0">
+            <a:spAutoFit/>
+          </a:bodyPr>
+          <a:lstStyle/>
+          <a:p>
+            <a:pPr algn="l">
+              <a:lnSpc>
+                <a:spcPct val="110000"/>
+              </a:lnSpc>
+              <a:spcAft>
+                <a:spcPts val="1200"/>
+              </a:spcAft>
+            </a:pPr>
+            <a:r>
+              <a:rPr sz="1350" b="1" i="0">
+                <a:solidFill>
+                  <a:srgbClr val="E07A5F"/>
+                </a:solidFill>
+                <a:latin typeface="Calibri"/>
+              </a:rPr>
+              <a:t>▪  </a:t>
+            </a:r>
+            <a:r>
+              <a:rPr sz="1350" b="1" i="0">
+                <a:solidFill>
+                  <a:srgbClr val="292E3A"/>
+                </a:solidFill>
+                <a:latin typeface="Calibri"/>
+              </a:rPr>
+              <a:t>Чёрная линия — </a:t>
+            </a:r>
+            <a:r>
+              <a:rPr sz="1350" b="0" i="0">
+                <a:solidFill>
+                  <a:srgbClr val="292E3A"/>
+                </a:solidFill>
+                <a:latin typeface="Calibri"/>
+              </a:rPr>
+              <a:t>фактические значения.</a:t>
+            </a:r>
+          </a:p>
+          <a:p>
+            <a:pPr algn="l">
+              <a:lnSpc>
+                <a:spcPct val="110000"/>
+              </a:lnSpc>
+              <a:spcAft>
+                <a:spcPts val="1200"/>
+              </a:spcAft>
+            </a:pPr>
+            <a:r>
+              <a:rPr sz="1350" b="1" i="0">
+                <a:solidFill>
+                  <a:srgbClr val="E07A5F"/>
+                </a:solidFill>
+                <a:latin typeface="Calibri"/>
+              </a:rPr>
+              <a:t>▪  </a:t>
+            </a:r>
+            <a:r>
+              <a:rPr sz="1350" b="1" i="0">
+                <a:solidFill>
+                  <a:srgbClr val="292E3A"/>
+                </a:solidFill>
+                <a:latin typeface="Calibri"/>
+              </a:rPr>
+              <a:t>Пунктир </a:t>
+            </a:r>
+            <a:r>
+              <a:rPr sz="1350" b="0" i="0">
+                <a:solidFill>
+                  <a:srgbClr val="292E3A"/>
+                </a:solidFill>
+                <a:latin typeface="Calibri"/>
+              </a:rPr>
+              <a:t>— прямой прогноз модели.</a:t>
+            </a:r>
+          </a:p>
+          <a:p>
+            <a:pPr algn="l">
+              <a:lnSpc>
+                <a:spcPct val="110000"/>
+              </a:lnSpc>
+              <a:spcAft>
+                <a:spcPts val="1200"/>
+              </a:spcAft>
+            </a:pPr>
+            <a:r>
+              <a:rPr sz="1350" b="1" i="0">
+                <a:solidFill>
+                  <a:srgbClr val="E07A5F"/>
+                </a:solidFill>
+                <a:latin typeface="Calibri"/>
+              </a:rPr>
+              <a:t>▪  </a:t>
+            </a:r>
+            <a:r>
+              <a:rPr sz="1350" b="1" i="0">
+                <a:solidFill>
+                  <a:srgbClr val="292E3A"/>
+                </a:solidFill>
+                <a:latin typeface="Calibri"/>
+              </a:rPr>
+              <a:t>Сплошная </a:t>
+            </a:r>
+            <a:r>
+              <a:rPr sz="1350" b="0" i="0">
+                <a:solidFill>
+                  <a:srgbClr val="292E3A"/>
+                </a:solidFill>
+                <a:latin typeface="Calibri"/>
+              </a:rPr>
+              <a:t>— итеративный прогноз той же модели.</a:t>
+            </a:r>
+          </a:p>
+          <a:p>
+            <a:pPr algn="l">
+              <a:lnSpc>
+                <a:spcPct val="110000"/>
+              </a:lnSpc>
+              <a:spcAft>
+                <a:spcPts val="1200"/>
+              </a:spcAft>
+            </a:pPr>
+            <a:r>
+              <a:rPr sz="1350" b="1" i="0">
+                <a:solidFill>
+                  <a:srgbClr val="E07A5F"/>
+                </a:solidFill>
+                <a:latin typeface="Calibri"/>
+              </a:rPr>
+              <a:t>▪  </a:t>
+            </a:r>
+            <a:r>
+              <a:rPr sz="1350" b="1" i="0">
+                <a:solidFill>
+                  <a:srgbClr val="292E3A"/>
+                </a:solidFill>
+                <a:latin typeface="Calibri"/>
+              </a:rPr>
+              <a:t>Расхождение </a:t>
+            </a:r>
+            <a:r>
+              <a:rPr sz="1350" b="0" i="0">
+                <a:solidFill>
+                  <a:srgbClr val="292E3A"/>
+                </a:solidFill>
+                <a:latin typeface="Calibri"/>
+              </a:rPr>
+              <a:t>пунктира и сплошной линии показывает деградацию модели в итеративном режиме.</a:t>
+            </a:r>
+          </a:p>
+        </p:txBody>
+      </p:sp>
+      <p:sp>
+        <p:nvSpPr>
+          <p:cNvPr id="16" name="Rectangle 15"/>
           <p:cNvSpPr/>
           <p:nvPr/>
         </p:nvSpPr>
         <p:spPr>
           <a:xfrm>
-            <a:off x="868680" y="1783080"/>
-            <a:ext cx="512064" cy="512064"/>
-          </a:xfrm>
-          <a:prstGeom prst="ellipse">
+            <a:off x="640080" y="5779008"/>
+            <a:ext cx="10908792" cy="566928"/>
+          </a:xfrm>
+          <a:prstGeom prst="rect">
             <a:avLst/>
           </a:prstGeom>
           <a:solidFill>
-            <a:srgbClr val="1B2649"/>
+            <a:srgbClr val="EEF1F7"/>
           </a:solidFill>
           <a:ln>
             <a:noFill/>
@@ -8804,175 +9273,14 @@
       </p:sp>
       <p:sp>
         <p:nvSpPr>
-          <p:cNvPr id="14" name="TextBox 13"/>
-          <p:cNvSpPr txBox="1"/>
-          <p:nvPr/>
-        </p:nvSpPr>
-        <p:spPr>
-          <a:xfrm>
-            <a:off x="868680" y="1856232"/>
-            <a:ext cx="512064" cy="365760"/>
-          </a:xfrm>
-          <a:prstGeom prst="rect">
-            <a:avLst/>
-          </a:prstGeom>
-          <a:noFill/>
-        </p:spPr>
-        <p:txBody>
-          <a:bodyPr wrap="square" anchor="t" lIns="0" rIns="0" tIns="0" bIns="0">
-            <a:spAutoFit/>
-          </a:bodyPr>
-          <a:lstStyle/>
-          <a:p>
-            <a:pPr algn="ctr">
-              <a:lnSpc>
-                <a:spcPct val="100000"/>
-              </a:lnSpc>
-            </a:pPr>
-            <a:r>
-              <a:rPr sz="1900" b="1" i="0">
-                <a:solidFill>
-                  <a:srgbClr val="FFFFFF"/>
-                </a:solidFill>
-                <a:latin typeface="Calibri"/>
-              </a:rPr>
-              <a:t>1</a:t>
-            </a:r>
-          </a:p>
-        </p:txBody>
-      </p:sp>
-      <p:sp>
-        <p:nvSpPr>
-          <p:cNvPr id="15" name="TextBox 14"/>
-          <p:cNvSpPr txBox="1"/>
-          <p:nvPr/>
-        </p:nvSpPr>
-        <p:spPr>
-          <a:xfrm>
-            <a:off x="1600200" y="1709928"/>
-            <a:ext cx="3200400" cy="640080"/>
-          </a:xfrm>
-          <a:prstGeom prst="rect">
-            <a:avLst/>
-          </a:prstGeom>
-          <a:noFill/>
-        </p:spPr>
-        <p:txBody>
-          <a:bodyPr wrap="square" anchor="ctr" lIns="0" rIns="0" tIns="0" bIns="0">
-            <a:spAutoFit/>
-          </a:bodyPr>
-          <a:lstStyle/>
-          <a:p>
-            <a:pPr algn="l">
-              <a:lnSpc>
-                <a:spcPct val="100000"/>
-              </a:lnSpc>
-            </a:pPr>
-            <a:r>
-              <a:rPr sz="1550" b="1" i="0">
-                <a:solidFill>
-                  <a:srgbClr val="1B2649"/>
-                </a:solidFill>
-                <a:latin typeface="Calibri"/>
-              </a:rPr>
-              <a:t>Длина обучающей выборки</a:t>
-            </a:r>
-          </a:p>
-        </p:txBody>
-      </p:sp>
-      <p:sp>
-        <p:nvSpPr>
-          <p:cNvPr id="16" name="TextBox 15"/>
-          <p:cNvSpPr txBox="1"/>
-          <p:nvPr/>
-        </p:nvSpPr>
-        <p:spPr>
-          <a:xfrm>
-            <a:off x="4892040" y="1682496"/>
-            <a:ext cx="6492240" cy="749808"/>
-          </a:xfrm>
-          <a:prstGeom prst="rect">
-            <a:avLst/>
-          </a:prstGeom>
-          <a:noFill/>
-        </p:spPr>
-        <p:txBody>
-          <a:bodyPr wrap="square" anchor="ctr" lIns="0" rIns="0" tIns="0" bIns="0">
-            <a:spAutoFit/>
-          </a:bodyPr>
-          <a:lstStyle/>
-          <a:p>
-            <a:pPr algn="l">
-              <a:lnSpc>
-                <a:spcPct val="110000"/>
-              </a:lnSpc>
-            </a:pPr>
-            <a:r>
-              <a:rPr sz="1350" b="0" i="0">
-                <a:solidFill>
-                  <a:srgbClr val="292E3A"/>
-                </a:solidFill>
-                <a:latin typeface="Calibri"/>
-              </a:rPr>
-              <a:t>Определяющий фактор. Ниже ≈ 50–100 наблюдений предпочтительны ETS и Auto-ARIMA; выше — нейросети конкурентоспособны.</a:t>
-            </a:r>
-          </a:p>
-        </p:txBody>
-      </p:sp>
-      <p:sp>
-        <p:nvSpPr>
           <p:cNvPr id="17" name="Rectangle 16"/>
           <p:cNvSpPr/>
           <p:nvPr/>
         </p:nvSpPr>
         <p:spPr>
           <a:xfrm>
-            <a:off x="640080" y="2505456"/>
-            <a:ext cx="10908792" cy="859536"/>
-          </a:xfrm>
-          <a:prstGeom prst="rect">
-            <a:avLst/>
-          </a:prstGeom>
-          <a:solidFill>
-            <a:srgbClr val="F6F7FB"/>
-          </a:solidFill>
-          <a:ln>
-            <a:noFill/>
-          </a:ln>
-          <a:effectLst/>
-        </p:spPr>
-        <p:style>
-          <a:lnRef idx="1">
-            <a:schemeClr val="accent1"/>
-          </a:lnRef>
-          <a:fillRef idx="3">
-            <a:schemeClr val="accent1"/>
-          </a:fillRef>
-          <a:effectRef idx="2">
-            <a:schemeClr val="accent1"/>
-          </a:effectRef>
-          <a:fontRef idx="minor">
-            <a:schemeClr val="lt1"/>
-          </a:fontRef>
-        </p:style>
-        <p:txBody>
-          <a:bodyPr rtlCol="0" anchor="ctr"/>
-          <a:lstStyle/>
-          <a:p>
-            <a:pPr algn="ctr"/>
-          </a:p>
-        </p:txBody>
-      </p:sp>
-      <p:sp>
-        <p:nvSpPr>
-          <p:cNvPr id="18" name="Rectangle 17"/>
-          <p:cNvSpPr/>
-          <p:nvPr/>
-        </p:nvSpPr>
-        <p:spPr>
-          <a:xfrm>
-            <a:off x="640080" y="2505456"/>
-            <a:ext cx="50800" cy="859536"/>
+            <a:off x="640080" y="5779008"/>
+            <a:ext cx="50800" cy="566928"/>
           </a:xfrm>
           <a:prstGeom prst="rect">
             <a:avLst/>
@@ -9009,97 +9317,14 @@
       </p:sp>
       <p:sp>
         <p:nvSpPr>
-          <p:cNvPr id="19" name="Oval 18"/>
-          <p:cNvSpPr/>
-          <p:nvPr/>
-        </p:nvSpPr>
-        <p:spPr>
-          <a:xfrm>
-            <a:off x="868680" y="2697480"/>
-            <a:ext cx="512064" cy="512064"/>
-          </a:xfrm>
-          <a:prstGeom prst="ellipse">
-            <a:avLst/>
-          </a:prstGeom>
-          <a:solidFill>
-            <a:srgbClr val="1B2649"/>
-          </a:solidFill>
-          <a:ln>
-            <a:noFill/>
-          </a:ln>
-          <a:effectLst/>
-        </p:spPr>
-        <p:style>
-          <a:lnRef idx="1">
-            <a:schemeClr val="accent1"/>
-          </a:lnRef>
-          <a:fillRef idx="3">
-            <a:schemeClr val="accent1"/>
-          </a:fillRef>
-          <a:effectRef idx="2">
-            <a:schemeClr val="accent1"/>
-          </a:effectRef>
-          <a:fontRef idx="minor">
-            <a:schemeClr val="lt1"/>
-          </a:fontRef>
-        </p:style>
-        <p:txBody>
-          <a:bodyPr rtlCol="0" anchor="ctr"/>
-          <a:lstStyle/>
-          <a:p>
-            <a:pPr algn="ctr"/>
-          </a:p>
-        </p:txBody>
-      </p:sp>
-      <p:sp>
-        <p:nvSpPr>
-          <p:cNvPr id="20" name="TextBox 19"/>
+          <p:cNvPr id="18" name="TextBox 17"/>
           <p:cNvSpPr txBox="1"/>
           <p:nvPr/>
         </p:nvSpPr>
         <p:spPr>
           <a:xfrm>
-            <a:off x="868680" y="2770632"/>
-            <a:ext cx="512064" cy="365760"/>
-          </a:xfrm>
-          <a:prstGeom prst="rect">
-            <a:avLst/>
-          </a:prstGeom>
-          <a:noFill/>
-        </p:spPr>
-        <p:txBody>
-          <a:bodyPr wrap="square" anchor="t" lIns="0" rIns="0" tIns="0" bIns="0">
-            <a:spAutoFit/>
-          </a:bodyPr>
-          <a:lstStyle/>
-          <a:p>
-            <a:pPr algn="ctr">
-              <a:lnSpc>
-                <a:spcPct val="100000"/>
-              </a:lnSpc>
-            </a:pPr>
-            <a:r>
-              <a:rPr sz="1900" b="1" i="0">
-                <a:solidFill>
-                  <a:srgbClr val="FFFFFF"/>
-                </a:solidFill>
-                <a:latin typeface="Calibri"/>
-              </a:rPr>
-              <a:t>2</a:t>
-            </a:r>
-          </a:p>
-        </p:txBody>
-      </p:sp>
-      <p:sp>
-        <p:nvSpPr>
-          <p:cNvPr id="21" name="TextBox 20"/>
-          <p:cNvSpPr txBox="1"/>
-          <p:nvPr/>
-        </p:nvSpPr>
-        <p:spPr>
-          <a:xfrm>
-            <a:off x="1600200" y="2624328"/>
-            <a:ext cx="3200400" cy="640080"/>
+            <a:off x="914400" y="5852160"/>
+            <a:ext cx="1554480" cy="420624"/>
           </a:xfrm>
           <a:prstGeom prst="rect">
             <a:avLst/>
@@ -9118,27 +9343,27 @@
               </a:lnSpc>
             </a:pPr>
             <a:r>
-              <a:rPr sz="1550" b="1" i="0">
-                <a:solidFill>
-                  <a:srgbClr val="1B2649"/>
-                </a:solidFill>
-                <a:latin typeface="Calibri"/>
-              </a:rPr>
-              <a:t>TimesNet — лучшая нейросеть</a:t>
-            </a:r>
-          </a:p>
-        </p:txBody>
-      </p:sp>
-      <p:sp>
-        <p:nvSpPr>
-          <p:cNvPr id="22" name="TextBox 21"/>
+              <a:rPr sz="1300" b="1" i="0">
+                <a:solidFill>
+                  <a:srgbClr val="C25A40"/>
+                </a:solidFill>
+                <a:latin typeface="Calibri"/>
+              </a:rPr>
+              <a:t>ВЫВОД</a:t>
+            </a:r>
+          </a:p>
+        </p:txBody>
+      </p:sp>
+      <p:sp>
+        <p:nvSpPr>
+          <p:cNvPr id="19" name="TextBox 18"/>
           <p:cNvSpPr txBox="1"/>
           <p:nvPr/>
         </p:nvSpPr>
         <p:spPr>
           <a:xfrm>
-            <a:off x="4892040" y="2596896"/>
-            <a:ext cx="6492240" cy="749808"/>
+            <a:off x="1965960" y="5779008"/>
+            <a:ext cx="9418320" cy="566928"/>
           </a:xfrm>
           <a:prstGeom prst="rect">
             <a:avLst/>
@@ -9153,764 +9378,17 @@
           <a:p>
             <a:pPr algn="l">
               <a:lnSpc>
-                <a:spcPct val="110000"/>
+                <a:spcPct val="105000"/>
               </a:lnSpc>
             </a:pPr>
             <a:r>
-              <a:rPr sz="1350" b="0" i="0">
+              <a:rPr sz="1450" b="0" i="0">
                 <a:solidFill>
                   <a:srgbClr val="292E3A"/>
                 </a:solidFill>
                 <a:latin typeface="Calibri"/>
               </a:rPr>
-              <a:t>В режиме обучения на одном ряде; обучаемая 2D-декомпозиция эффективна при достаточном объёме данных.</a:t>
-            </a:r>
-          </a:p>
-        </p:txBody>
-      </p:sp>
-      <p:sp>
-        <p:nvSpPr>
-          <p:cNvPr id="23" name="Rectangle 22"/>
-          <p:cNvSpPr/>
-          <p:nvPr/>
-        </p:nvSpPr>
-        <p:spPr>
-          <a:xfrm>
-            <a:off x="640080" y="3419856"/>
-            <a:ext cx="10908792" cy="859536"/>
-          </a:xfrm>
-          <a:prstGeom prst="rect">
-            <a:avLst/>
-          </a:prstGeom>
-          <a:solidFill>
-            <a:srgbClr val="EEF1F7"/>
-          </a:solidFill>
-          <a:ln>
-            <a:noFill/>
-          </a:ln>
-          <a:effectLst/>
-        </p:spPr>
-        <p:style>
-          <a:lnRef idx="1">
-            <a:schemeClr val="accent1"/>
-          </a:lnRef>
-          <a:fillRef idx="3">
-            <a:schemeClr val="accent1"/>
-          </a:fillRef>
-          <a:effectRef idx="2">
-            <a:schemeClr val="accent1"/>
-          </a:effectRef>
-          <a:fontRef idx="minor">
-            <a:schemeClr val="lt1"/>
-          </a:fontRef>
-        </p:style>
-        <p:txBody>
-          <a:bodyPr rtlCol="0" anchor="ctr"/>
-          <a:lstStyle/>
-          <a:p>
-            <a:pPr algn="ctr"/>
-          </a:p>
-        </p:txBody>
-      </p:sp>
-      <p:sp>
-        <p:nvSpPr>
-          <p:cNvPr id="24" name="Rectangle 23"/>
-          <p:cNvSpPr/>
-          <p:nvPr/>
-        </p:nvSpPr>
-        <p:spPr>
-          <a:xfrm>
-            <a:off x="640080" y="3419856"/>
-            <a:ext cx="50800" cy="859536"/>
-          </a:xfrm>
-          <a:prstGeom prst="rect">
-            <a:avLst/>
-          </a:prstGeom>
-          <a:solidFill>
-            <a:srgbClr val="E07A5F"/>
-          </a:solidFill>
-          <a:ln>
-            <a:noFill/>
-          </a:ln>
-          <a:effectLst/>
-        </p:spPr>
-        <p:style>
-          <a:lnRef idx="1">
-            <a:schemeClr val="accent1"/>
-          </a:lnRef>
-          <a:fillRef idx="3">
-            <a:schemeClr val="accent1"/>
-          </a:fillRef>
-          <a:effectRef idx="2">
-            <a:schemeClr val="accent1"/>
-          </a:effectRef>
-          <a:fontRef idx="minor">
-            <a:schemeClr val="lt1"/>
-          </a:fontRef>
-        </p:style>
-        <p:txBody>
-          <a:bodyPr rtlCol="0" anchor="ctr"/>
-          <a:lstStyle/>
-          <a:p>
-            <a:pPr algn="ctr"/>
-          </a:p>
-        </p:txBody>
-      </p:sp>
-      <p:sp>
-        <p:nvSpPr>
-          <p:cNvPr id="25" name="Oval 24"/>
-          <p:cNvSpPr/>
-          <p:nvPr/>
-        </p:nvSpPr>
-        <p:spPr>
-          <a:xfrm>
-            <a:off x="868680" y="3611880"/>
-            <a:ext cx="512064" cy="512064"/>
-          </a:xfrm>
-          <a:prstGeom prst="ellipse">
-            <a:avLst/>
-          </a:prstGeom>
-          <a:solidFill>
-            <a:srgbClr val="1B2649"/>
-          </a:solidFill>
-          <a:ln>
-            <a:noFill/>
-          </a:ln>
-          <a:effectLst/>
-        </p:spPr>
-        <p:style>
-          <a:lnRef idx="1">
-            <a:schemeClr val="accent1"/>
-          </a:lnRef>
-          <a:fillRef idx="3">
-            <a:schemeClr val="accent1"/>
-          </a:fillRef>
-          <a:effectRef idx="2">
-            <a:schemeClr val="accent1"/>
-          </a:effectRef>
-          <a:fontRef idx="minor">
-            <a:schemeClr val="lt1"/>
-          </a:fontRef>
-        </p:style>
-        <p:txBody>
-          <a:bodyPr rtlCol="0" anchor="ctr"/>
-          <a:lstStyle/>
-          <a:p>
-            <a:pPr algn="ctr"/>
-          </a:p>
-        </p:txBody>
-      </p:sp>
-      <p:sp>
-        <p:nvSpPr>
-          <p:cNvPr id="26" name="TextBox 25"/>
-          <p:cNvSpPr txBox="1"/>
-          <p:nvPr/>
-        </p:nvSpPr>
-        <p:spPr>
-          <a:xfrm>
-            <a:off x="868680" y="3685032"/>
-            <a:ext cx="512064" cy="365760"/>
-          </a:xfrm>
-          <a:prstGeom prst="rect">
-            <a:avLst/>
-          </a:prstGeom>
-          <a:noFill/>
-        </p:spPr>
-        <p:txBody>
-          <a:bodyPr wrap="square" anchor="t" lIns="0" rIns="0" tIns="0" bIns="0">
-            <a:spAutoFit/>
-          </a:bodyPr>
-          <a:lstStyle/>
-          <a:p>
-            <a:pPr algn="ctr">
-              <a:lnSpc>
-                <a:spcPct val="100000"/>
-              </a:lnSpc>
-            </a:pPr>
-            <a:r>
-              <a:rPr sz="1900" b="1" i="0">
-                <a:solidFill>
-                  <a:srgbClr val="FFFFFF"/>
-                </a:solidFill>
-                <a:latin typeface="Calibri"/>
-              </a:rPr>
-              <a:t>3</a:t>
-            </a:r>
-          </a:p>
-        </p:txBody>
-      </p:sp>
-      <p:sp>
-        <p:nvSpPr>
-          <p:cNvPr id="27" name="TextBox 26"/>
-          <p:cNvSpPr txBox="1"/>
-          <p:nvPr/>
-        </p:nvSpPr>
-        <p:spPr>
-          <a:xfrm>
-            <a:off x="1600200" y="3538728"/>
-            <a:ext cx="3200400" cy="640080"/>
-          </a:xfrm>
-          <a:prstGeom prst="rect">
-            <a:avLst/>
-          </a:prstGeom>
-          <a:noFill/>
-        </p:spPr>
-        <p:txBody>
-          <a:bodyPr wrap="square" anchor="ctr" lIns="0" rIns="0" tIns="0" bIns="0">
-            <a:spAutoFit/>
-          </a:bodyPr>
-          <a:lstStyle/>
-          <a:p>
-            <a:pPr algn="l">
-              <a:lnSpc>
-                <a:spcPct val="100000"/>
-              </a:lnSpc>
-            </a:pPr>
-            <a:r>
-              <a:rPr sz="1550" b="1" i="0">
-                <a:solidFill>
-                  <a:srgbClr val="1B2649"/>
-                </a:solidFill>
-                <a:latin typeface="Calibri"/>
-              </a:rPr>
-              <a:t>Предобучение</a:t>
-            </a:r>
-          </a:p>
-        </p:txBody>
-      </p:sp>
-      <p:sp>
-        <p:nvSpPr>
-          <p:cNvPr id="28" name="TextBox 27"/>
-          <p:cNvSpPr txBox="1"/>
-          <p:nvPr/>
-        </p:nvSpPr>
-        <p:spPr>
-          <a:xfrm>
-            <a:off x="4892040" y="3511296"/>
-            <a:ext cx="6492240" cy="749808"/>
-          </a:xfrm>
-          <a:prstGeom prst="rect">
-            <a:avLst/>
-          </a:prstGeom>
-          <a:noFill/>
-        </p:spPr>
-        <p:txBody>
-          <a:bodyPr wrap="square" anchor="ctr" lIns="0" rIns="0" tIns="0" bIns="0">
-            <a:spAutoFit/>
-          </a:bodyPr>
-          <a:lstStyle/>
-          <a:p>
-            <a:pPr algn="l">
-              <a:lnSpc>
-                <a:spcPct val="110000"/>
-              </a:lnSpc>
-            </a:pPr>
-            <a:r>
-              <a:rPr sz="1350" b="0" i="0">
-                <a:solidFill>
-                  <a:srgbClr val="292E3A"/>
-                </a:solidFill>
-                <a:latin typeface="Calibri"/>
-              </a:rPr>
-              <a:t>Повышает качество нейросетей на 18–32 % и выводит их на уровень и выше классики на M3 monthly и M4 daily.</a:t>
-            </a:r>
-          </a:p>
-        </p:txBody>
-      </p:sp>
-      <p:sp>
-        <p:nvSpPr>
-          <p:cNvPr id="29" name="Rectangle 28"/>
-          <p:cNvSpPr/>
-          <p:nvPr/>
-        </p:nvSpPr>
-        <p:spPr>
-          <a:xfrm>
-            <a:off x="640080" y="4334256"/>
-            <a:ext cx="10908792" cy="859536"/>
-          </a:xfrm>
-          <a:prstGeom prst="rect">
-            <a:avLst/>
-          </a:prstGeom>
-          <a:solidFill>
-            <a:srgbClr val="F6F7FB"/>
-          </a:solidFill>
-          <a:ln>
-            <a:noFill/>
-          </a:ln>
-          <a:effectLst/>
-        </p:spPr>
-        <p:style>
-          <a:lnRef idx="1">
-            <a:schemeClr val="accent1"/>
-          </a:lnRef>
-          <a:fillRef idx="3">
-            <a:schemeClr val="accent1"/>
-          </a:fillRef>
-          <a:effectRef idx="2">
-            <a:schemeClr val="accent1"/>
-          </a:effectRef>
-          <a:fontRef idx="minor">
-            <a:schemeClr val="lt1"/>
-          </a:fontRef>
-        </p:style>
-        <p:txBody>
-          <a:bodyPr rtlCol="0" anchor="ctr"/>
-          <a:lstStyle/>
-          <a:p>
-            <a:pPr algn="ctr"/>
-          </a:p>
-        </p:txBody>
-      </p:sp>
-      <p:sp>
-        <p:nvSpPr>
-          <p:cNvPr id="30" name="Rectangle 29"/>
-          <p:cNvSpPr/>
-          <p:nvPr/>
-        </p:nvSpPr>
-        <p:spPr>
-          <a:xfrm>
-            <a:off x="640080" y="4334256"/>
-            <a:ext cx="50800" cy="859536"/>
-          </a:xfrm>
-          <a:prstGeom prst="rect">
-            <a:avLst/>
-          </a:prstGeom>
-          <a:solidFill>
-            <a:srgbClr val="E07A5F"/>
-          </a:solidFill>
-          <a:ln>
-            <a:noFill/>
-          </a:ln>
-          <a:effectLst/>
-        </p:spPr>
-        <p:style>
-          <a:lnRef idx="1">
-            <a:schemeClr val="accent1"/>
-          </a:lnRef>
-          <a:fillRef idx="3">
-            <a:schemeClr val="accent1"/>
-          </a:fillRef>
-          <a:effectRef idx="2">
-            <a:schemeClr val="accent1"/>
-          </a:effectRef>
-          <a:fontRef idx="minor">
-            <a:schemeClr val="lt1"/>
-          </a:fontRef>
-        </p:style>
-        <p:txBody>
-          <a:bodyPr rtlCol="0" anchor="ctr"/>
-          <a:lstStyle/>
-          <a:p>
-            <a:pPr algn="ctr"/>
-          </a:p>
-        </p:txBody>
-      </p:sp>
-      <p:sp>
-        <p:nvSpPr>
-          <p:cNvPr id="31" name="Oval 30"/>
-          <p:cNvSpPr/>
-          <p:nvPr/>
-        </p:nvSpPr>
-        <p:spPr>
-          <a:xfrm>
-            <a:off x="868680" y="4526280"/>
-            <a:ext cx="512064" cy="512064"/>
-          </a:xfrm>
-          <a:prstGeom prst="ellipse">
-            <a:avLst/>
-          </a:prstGeom>
-          <a:solidFill>
-            <a:srgbClr val="1B2649"/>
-          </a:solidFill>
-          <a:ln>
-            <a:noFill/>
-          </a:ln>
-          <a:effectLst/>
-        </p:spPr>
-        <p:style>
-          <a:lnRef idx="1">
-            <a:schemeClr val="accent1"/>
-          </a:lnRef>
-          <a:fillRef idx="3">
-            <a:schemeClr val="accent1"/>
-          </a:fillRef>
-          <a:effectRef idx="2">
-            <a:schemeClr val="accent1"/>
-          </a:effectRef>
-          <a:fontRef idx="minor">
-            <a:schemeClr val="lt1"/>
-          </a:fontRef>
-        </p:style>
-        <p:txBody>
-          <a:bodyPr rtlCol="0" anchor="ctr"/>
-          <a:lstStyle/>
-          <a:p>
-            <a:pPr algn="ctr"/>
-          </a:p>
-        </p:txBody>
-      </p:sp>
-      <p:sp>
-        <p:nvSpPr>
-          <p:cNvPr id="32" name="TextBox 31"/>
-          <p:cNvSpPr txBox="1"/>
-          <p:nvPr/>
-        </p:nvSpPr>
-        <p:spPr>
-          <a:xfrm>
-            <a:off x="868680" y="4599432"/>
-            <a:ext cx="512064" cy="365760"/>
-          </a:xfrm>
-          <a:prstGeom prst="rect">
-            <a:avLst/>
-          </a:prstGeom>
-          <a:noFill/>
-        </p:spPr>
-        <p:txBody>
-          <a:bodyPr wrap="square" anchor="t" lIns="0" rIns="0" tIns="0" bIns="0">
-            <a:spAutoFit/>
-          </a:bodyPr>
-          <a:lstStyle/>
-          <a:p>
-            <a:pPr algn="ctr">
-              <a:lnSpc>
-                <a:spcPct val="100000"/>
-              </a:lnSpc>
-            </a:pPr>
-            <a:r>
-              <a:rPr sz="1900" b="1" i="0">
-                <a:solidFill>
-                  <a:srgbClr val="FFFFFF"/>
-                </a:solidFill>
-                <a:latin typeface="Calibri"/>
-              </a:rPr>
-              <a:t>4</a:t>
-            </a:r>
-          </a:p>
-        </p:txBody>
-      </p:sp>
-      <p:sp>
-        <p:nvSpPr>
-          <p:cNvPr id="33" name="TextBox 32"/>
-          <p:cNvSpPr txBox="1"/>
-          <p:nvPr/>
-        </p:nvSpPr>
-        <p:spPr>
-          <a:xfrm>
-            <a:off x="1600200" y="4453128"/>
-            <a:ext cx="3200400" cy="640080"/>
-          </a:xfrm>
-          <a:prstGeom prst="rect">
-            <a:avLst/>
-          </a:prstGeom>
-          <a:noFill/>
-        </p:spPr>
-        <p:txBody>
-          <a:bodyPr wrap="square" anchor="ctr" lIns="0" rIns="0" tIns="0" bIns="0">
-            <a:spAutoFit/>
-          </a:bodyPr>
-          <a:lstStyle/>
-          <a:p>
-            <a:pPr algn="l">
-              <a:lnSpc>
-                <a:spcPct val="100000"/>
-              </a:lnSpc>
-            </a:pPr>
-            <a:r>
-              <a:rPr sz="1550" b="1" i="0">
-                <a:solidFill>
-                  <a:srgbClr val="1B2649"/>
-                </a:solidFill>
-                <a:latin typeface="Calibri"/>
-              </a:rPr>
-              <a:t>Тип декомпозиции и режим</a:t>
-            </a:r>
-          </a:p>
-        </p:txBody>
-      </p:sp>
-      <p:sp>
-        <p:nvSpPr>
-          <p:cNvPr id="34" name="TextBox 33"/>
-          <p:cNvSpPr txBox="1"/>
-          <p:nvPr/>
-        </p:nvSpPr>
-        <p:spPr>
-          <a:xfrm>
-            <a:off x="4892040" y="4425696"/>
-            <a:ext cx="6492240" cy="749808"/>
-          </a:xfrm>
-          <a:prstGeom prst="rect">
-            <a:avLst/>
-          </a:prstGeom>
-          <a:noFill/>
-        </p:spPr>
-        <p:txBody>
-          <a:bodyPr wrap="square" anchor="ctr" lIns="0" rIns="0" tIns="0" bIns="0">
-            <a:spAutoFit/>
-          </a:bodyPr>
-          <a:lstStyle/>
-          <a:p>
-            <a:pPr algn="l">
-              <a:lnSpc>
-                <a:spcPct val="110000"/>
-              </a:lnSpc>
-            </a:pPr>
-            <a:r>
-              <a:rPr sz="1350" b="0" i="0">
-                <a:solidFill>
-                  <a:srgbClr val="292E3A"/>
-                </a:solidFill>
-                <a:latin typeface="Calibri"/>
-              </a:rPr>
-              <a:t>Фиксированная декомпозиция устойчивее, обучаемая адаптивнее, но хрупка при итеративном прогнозировании.</a:t>
-            </a:r>
-          </a:p>
-        </p:txBody>
-      </p:sp>
-      <p:sp>
-        <p:nvSpPr>
-          <p:cNvPr id="35" name="Rectangle 34"/>
-          <p:cNvSpPr/>
-          <p:nvPr/>
-        </p:nvSpPr>
-        <p:spPr>
-          <a:xfrm>
-            <a:off x="640080" y="5248656"/>
-            <a:ext cx="10908792" cy="859536"/>
-          </a:xfrm>
-          <a:prstGeom prst="rect">
-            <a:avLst/>
-          </a:prstGeom>
-          <a:solidFill>
-            <a:srgbClr val="EEF1F7"/>
-          </a:solidFill>
-          <a:ln>
-            <a:noFill/>
-          </a:ln>
-          <a:effectLst/>
-        </p:spPr>
-        <p:style>
-          <a:lnRef idx="1">
-            <a:schemeClr val="accent1"/>
-          </a:lnRef>
-          <a:fillRef idx="3">
-            <a:schemeClr val="accent1"/>
-          </a:fillRef>
-          <a:effectRef idx="2">
-            <a:schemeClr val="accent1"/>
-          </a:effectRef>
-          <a:fontRef idx="minor">
-            <a:schemeClr val="lt1"/>
-          </a:fontRef>
-        </p:style>
-        <p:txBody>
-          <a:bodyPr rtlCol="0" anchor="ctr"/>
-          <a:lstStyle/>
-          <a:p>
-            <a:pPr algn="ctr"/>
-          </a:p>
-        </p:txBody>
-      </p:sp>
-      <p:sp>
-        <p:nvSpPr>
-          <p:cNvPr id="36" name="Rectangle 35"/>
-          <p:cNvSpPr/>
-          <p:nvPr/>
-        </p:nvSpPr>
-        <p:spPr>
-          <a:xfrm>
-            <a:off x="640080" y="5248656"/>
-            <a:ext cx="50800" cy="859536"/>
-          </a:xfrm>
-          <a:prstGeom prst="rect">
-            <a:avLst/>
-          </a:prstGeom>
-          <a:solidFill>
-            <a:srgbClr val="E07A5F"/>
-          </a:solidFill>
-          <a:ln>
-            <a:noFill/>
-          </a:ln>
-          <a:effectLst/>
-        </p:spPr>
-        <p:style>
-          <a:lnRef idx="1">
-            <a:schemeClr val="accent1"/>
-          </a:lnRef>
-          <a:fillRef idx="3">
-            <a:schemeClr val="accent1"/>
-          </a:fillRef>
-          <a:effectRef idx="2">
-            <a:schemeClr val="accent1"/>
-          </a:effectRef>
-          <a:fontRef idx="minor">
-            <a:schemeClr val="lt1"/>
-          </a:fontRef>
-        </p:style>
-        <p:txBody>
-          <a:bodyPr rtlCol="0" anchor="ctr"/>
-          <a:lstStyle/>
-          <a:p>
-            <a:pPr algn="ctr"/>
-          </a:p>
-        </p:txBody>
-      </p:sp>
-      <p:sp>
-        <p:nvSpPr>
-          <p:cNvPr id="37" name="Oval 36"/>
-          <p:cNvSpPr/>
-          <p:nvPr/>
-        </p:nvSpPr>
-        <p:spPr>
-          <a:xfrm>
-            <a:off x="868680" y="5440680"/>
-            <a:ext cx="512064" cy="512064"/>
-          </a:xfrm>
-          <a:prstGeom prst="ellipse">
-            <a:avLst/>
-          </a:prstGeom>
-          <a:solidFill>
-            <a:srgbClr val="1B2649"/>
-          </a:solidFill>
-          <a:ln>
-            <a:noFill/>
-          </a:ln>
-          <a:effectLst/>
-        </p:spPr>
-        <p:style>
-          <a:lnRef idx="1">
-            <a:schemeClr val="accent1"/>
-          </a:lnRef>
-          <a:fillRef idx="3">
-            <a:schemeClr val="accent1"/>
-          </a:fillRef>
-          <a:effectRef idx="2">
-            <a:schemeClr val="accent1"/>
-          </a:effectRef>
-          <a:fontRef idx="minor">
-            <a:schemeClr val="lt1"/>
-          </a:fontRef>
-        </p:style>
-        <p:txBody>
-          <a:bodyPr rtlCol="0" anchor="ctr"/>
-          <a:lstStyle/>
-          <a:p>
-            <a:pPr algn="ctr"/>
-          </a:p>
-        </p:txBody>
-      </p:sp>
-      <p:sp>
-        <p:nvSpPr>
-          <p:cNvPr id="38" name="TextBox 37"/>
-          <p:cNvSpPr txBox="1"/>
-          <p:nvPr/>
-        </p:nvSpPr>
-        <p:spPr>
-          <a:xfrm>
-            <a:off x="868680" y="5513832"/>
-            <a:ext cx="512064" cy="365760"/>
-          </a:xfrm>
-          <a:prstGeom prst="rect">
-            <a:avLst/>
-          </a:prstGeom>
-          <a:noFill/>
-        </p:spPr>
-        <p:txBody>
-          <a:bodyPr wrap="square" anchor="t" lIns="0" rIns="0" tIns="0" bIns="0">
-            <a:spAutoFit/>
-          </a:bodyPr>
-          <a:lstStyle/>
-          <a:p>
-            <a:pPr algn="ctr">
-              <a:lnSpc>
-                <a:spcPct val="100000"/>
-              </a:lnSpc>
-            </a:pPr>
-            <a:r>
-              <a:rPr sz="1900" b="1" i="0">
-                <a:solidFill>
-                  <a:srgbClr val="FFFFFF"/>
-                </a:solidFill>
-                <a:latin typeface="Calibri"/>
-              </a:rPr>
-              <a:t>5</a:t>
-            </a:r>
-          </a:p>
-        </p:txBody>
-      </p:sp>
-      <p:sp>
-        <p:nvSpPr>
-          <p:cNvPr id="39" name="TextBox 38"/>
-          <p:cNvSpPr txBox="1"/>
-          <p:nvPr/>
-        </p:nvSpPr>
-        <p:spPr>
-          <a:xfrm>
-            <a:off x="1600200" y="5367528"/>
-            <a:ext cx="3200400" cy="640080"/>
-          </a:xfrm>
-          <a:prstGeom prst="rect">
-            <a:avLst/>
-          </a:prstGeom>
-          <a:noFill/>
-        </p:spPr>
-        <p:txBody>
-          <a:bodyPr wrap="square" anchor="ctr" lIns="0" rIns="0" tIns="0" bIns="0">
-            <a:spAutoFit/>
-          </a:bodyPr>
-          <a:lstStyle/>
-          <a:p>
-            <a:pPr algn="l">
-              <a:lnSpc>
-                <a:spcPct val="100000"/>
-              </a:lnSpc>
-            </a:pPr>
-            <a:r>
-              <a:rPr sz="1550" b="1" i="0">
-                <a:solidFill>
-                  <a:srgbClr val="1B2649"/>
-                </a:solidFill>
-                <a:latin typeface="Calibri"/>
-              </a:rPr>
-              <a:t>Общий вывод</a:t>
-            </a:r>
-          </a:p>
-        </p:txBody>
-      </p:sp>
-      <p:sp>
-        <p:nvSpPr>
-          <p:cNvPr id="40" name="TextBox 39"/>
-          <p:cNvSpPr txBox="1"/>
-          <p:nvPr/>
-        </p:nvSpPr>
-        <p:spPr>
-          <a:xfrm>
-            <a:off x="4892040" y="5340096"/>
-            <a:ext cx="6492240" cy="749808"/>
-          </a:xfrm>
-          <a:prstGeom prst="rect">
-            <a:avLst/>
-          </a:prstGeom>
-          <a:noFill/>
-        </p:spPr>
-        <p:txBody>
-          <a:bodyPr wrap="square" anchor="ctr" lIns="0" rIns="0" tIns="0" bIns="0">
-            <a:spAutoFit/>
-          </a:bodyPr>
-          <a:lstStyle/>
-          <a:p>
-            <a:pPr algn="l">
-              <a:lnSpc>
-                <a:spcPct val="110000"/>
-              </a:lnSpc>
-            </a:pPr>
-            <a:r>
-              <a:rPr sz="1350" b="0" i="0">
-                <a:solidFill>
-                  <a:srgbClr val="292E3A"/>
-                </a:solidFill>
-                <a:latin typeface="Calibri"/>
-              </a:rPr>
-              <a:t>Эффективность нейросетевых механизмов не абсолютна — она определяется длиной ряда, режимом обучения и объёмом данных.</a:t>
+              <a:t>Модели с обучаемой декомпозицией заметно отклоняются от факта в итеративном режиме; классические — нет.</a:t>
             </a:r>
           </a:p>
         </p:txBody>
@@ -9948,6 +9426,1645 @@
             <a:avLst/>
           </a:prstGeom>
           <a:solidFill>
+            <a:srgbClr val="FFFFFF"/>
+          </a:solidFill>
+          <a:ln>
+            <a:noFill/>
+          </a:ln>
+          <a:effectLst/>
+        </p:spPr>
+        <p:style>
+          <a:lnRef idx="1">
+            <a:schemeClr val="accent1"/>
+          </a:lnRef>
+          <a:fillRef idx="3">
+            <a:schemeClr val="accent1"/>
+          </a:fillRef>
+          <a:effectRef idx="2">
+            <a:schemeClr val="accent1"/>
+          </a:effectRef>
+          <a:fontRef idx="minor">
+            <a:schemeClr val="lt1"/>
+          </a:fontRef>
+        </p:style>
+        <p:txBody>
+          <a:bodyPr rtlCol="0" anchor="ctr"/>
+          <a:lstStyle/>
+          <a:p>
+            <a:pPr algn="ctr"/>
+          </a:p>
+        </p:txBody>
+      </p:sp>
+      <p:sp>
+        <p:nvSpPr>
+          <p:cNvPr id="3" name="Rectangle 2"/>
+          <p:cNvSpPr/>
+          <p:nvPr/>
+        </p:nvSpPr>
+        <p:spPr>
+          <a:xfrm>
+            <a:off x="0" y="0"/>
+            <a:ext cx="12191695" cy="1335024"/>
+          </a:xfrm>
+          <a:prstGeom prst="rect">
+            <a:avLst/>
+          </a:prstGeom>
+          <a:solidFill>
+            <a:srgbClr val="1B2649"/>
+          </a:solidFill>
+          <a:ln>
+            <a:noFill/>
+          </a:ln>
+          <a:effectLst/>
+        </p:spPr>
+        <p:style>
+          <a:lnRef idx="1">
+            <a:schemeClr val="accent1"/>
+          </a:lnRef>
+          <a:fillRef idx="3">
+            <a:schemeClr val="accent1"/>
+          </a:fillRef>
+          <a:effectRef idx="2">
+            <a:schemeClr val="accent1"/>
+          </a:effectRef>
+          <a:fontRef idx="minor">
+            <a:schemeClr val="lt1"/>
+          </a:fontRef>
+        </p:style>
+        <p:txBody>
+          <a:bodyPr rtlCol="0" anchor="ctr"/>
+          <a:lstStyle/>
+          <a:p>
+            <a:pPr algn="ctr"/>
+          </a:p>
+        </p:txBody>
+      </p:sp>
+      <p:sp>
+        <p:nvSpPr>
+          <p:cNvPr id="4" name="Rectangle 3"/>
+          <p:cNvSpPr/>
+          <p:nvPr/>
+        </p:nvSpPr>
+        <p:spPr>
+          <a:xfrm>
+            <a:off x="0" y="1335024"/>
+            <a:ext cx="12191695" cy="38100"/>
+          </a:xfrm>
+          <a:prstGeom prst="rect">
+            <a:avLst/>
+          </a:prstGeom>
+          <a:solidFill>
+            <a:srgbClr val="E07A5F"/>
+          </a:solidFill>
+          <a:ln>
+            <a:noFill/>
+          </a:ln>
+          <a:effectLst/>
+        </p:spPr>
+        <p:style>
+          <a:lnRef idx="1">
+            <a:schemeClr val="accent1"/>
+          </a:lnRef>
+          <a:fillRef idx="3">
+            <a:schemeClr val="accent1"/>
+          </a:fillRef>
+          <a:effectRef idx="2">
+            <a:schemeClr val="accent1"/>
+          </a:effectRef>
+          <a:fontRef idx="minor">
+            <a:schemeClr val="lt1"/>
+          </a:fontRef>
+        </p:style>
+        <p:txBody>
+          <a:bodyPr rtlCol="0" anchor="ctr"/>
+          <a:lstStyle/>
+          <a:p>
+            <a:pPr algn="ctr"/>
+          </a:p>
+        </p:txBody>
+      </p:sp>
+      <p:sp>
+        <p:nvSpPr>
+          <p:cNvPr id="5" name="TextBox 4"/>
+          <p:cNvSpPr txBox="1"/>
+          <p:nvPr/>
+        </p:nvSpPr>
+        <p:spPr>
+          <a:xfrm>
+            <a:off x="640080" y="237744"/>
+            <a:ext cx="9326880" cy="658368"/>
+          </a:xfrm>
+          <a:prstGeom prst="rect">
+            <a:avLst/>
+          </a:prstGeom>
+          <a:noFill/>
+        </p:spPr>
+        <p:txBody>
+          <a:bodyPr wrap="square" anchor="t" lIns="0" rIns="0" tIns="0" bIns="0">
+            <a:spAutoFit/>
+          </a:bodyPr>
+          <a:lstStyle/>
+          <a:p>
+            <a:pPr algn="l">
+              <a:lnSpc>
+                <a:spcPct val="100000"/>
+              </a:lnSpc>
+            </a:pPr>
+            <a:r>
+              <a:rPr sz="2700" b="1" i="0">
+                <a:solidFill>
+                  <a:srgbClr val="FFFFFF"/>
+                </a:solidFill>
+                <a:latin typeface="Calibri"/>
+              </a:rPr>
+              <a:t>Выводы и практические рекомендации</a:t>
+            </a:r>
+          </a:p>
+        </p:txBody>
+      </p:sp>
+      <p:sp>
+        <p:nvSpPr>
+          <p:cNvPr id="6" name="TextBox 5"/>
+          <p:cNvSpPr txBox="1"/>
+          <p:nvPr/>
+        </p:nvSpPr>
+        <p:spPr>
+          <a:xfrm>
+            <a:off x="658368" y="896112"/>
+            <a:ext cx="9144000" cy="365760"/>
+          </a:xfrm>
+          <a:prstGeom prst="rect">
+            <a:avLst/>
+          </a:prstGeom>
+          <a:noFill/>
+        </p:spPr>
+        <p:txBody>
+          <a:bodyPr wrap="square" anchor="t" lIns="0" rIns="0" tIns="0" bIns="0">
+            <a:spAutoFit/>
+          </a:bodyPr>
+          <a:lstStyle/>
+          <a:p>
+            <a:pPr algn="l">
+              <a:lnSpc>
+                <a:spcPct val="100000"/>
+              </a:lnSpc>
+            </a:pPr>
+            <a:r>
+              <a:rPr sz="1400" b="0" i="1">
+                <a:solidFill>
+                  <a:srgbClr val="B7C2DE"/>
+                </a:solidFill>
+                <a:latin typeface="Calibri"/>
+              </a:rPr>
+              <a:t>Раздел 4. Основные результаты исследования</a:t>
+            </a:r>
+          </a:p>
+        </p:txBody>
+      </p:sp>
+      <p:sp>
+        <p:nvSpPr>
+          <p:cNvPr id="7" name="Rounded Rectangle 6"/>
+          <p:cNvSpPr/>
+          <p:nvPr/>
+        </p:nvSpPr>
+        <p:spPr>
+          <a:xfrm>
+            <a:off x="10927080" y="384048"/>
+            <a:ext cx="868680" cy="457200"/>
+          </a:xfrm>
+          <a:prstGeom prst="roundRect">
+            <a:avLst/>
+          </a:prstGeom>
+          <a:solidFill>
+            <a:srgbClr val="2E3D6B"/>
+          </a:solidFill>
+          <a:ln>
+            <a:noFill/>
+          </a:ln>
+          <a:effectLst/>
+        </p:spPr>
+        <p:style>
+          <a:lnRef idx="1">
+            <a:schemeClr val="accent1"/>
+          </a:lnRef>
+          <a:fillRef idx="3">
+            <a:schemeClr val="accent1"/>
+          </a:fillRef>
+          <a:effectRef idx="2">
+            <a:schemeClr val="accent1"/>
+          </a:effectRef>
+          <a:fontRef idx="minor">
+            <a:schemeClr val="lt1"/>
+          </a:fontRef>
+        </p:style>
+        <p:txBody>
+          <a:bodyPr rtlCol="0" anchor="ctr"/>
+          <a:lstStyle/>
+          <a:p>
+            <a:pPr algn="ctr"/>
+          </a:p>
+        </p:txBody>
+      </p:sp>
+      <p:sp>
+        <p:nvSpPr>
+          <p:cNvPr id="8" name="TextBox 7"/>
+          <p:cNvSpPr txBox="1"/>
+          <p:nvPr/>
+        </p:nvSpPr>
+        <p:spPr>
+          <a:xfrm>
+            <a:off x="10927080" y="475488"/>
+            <a:ext cx="868680" cy="310896"/>
+          </a:xfrm>
+          <a:prstGeom prst="rect">
+            <a:avLst/>
+          </a:prstGeom>
+          <a:noFill/>
+        </p:spPr>
+        <p:txBody>
+          <a:bodyPr wrap="square" anchor="t" lIns="0" rIns="0" tIns="0" bIns="0">
+            <a:spAutoFit/>
+          </a:bodyPr>
+          <a:lstStyle/>
+          <a:p>
+            <a:pPr algn="ctr">
+              <a:lnSpc>
+                <a:spcPct val="100000"/>
+              </a:lnSpc>
+            </a:pPr>
+            <a:r>
+              <a:rPr sz="1300" b="1" i="0">
+                <a:solidFill>
+                  <a:srgbClr val="FFFFFF"/>
+                </a:solidFill>
+                <a:latin typeface="Calibri"/>
+              </a:rPr>
+              <a:t>14 / 15</a:t>
+            </a:r>
+          </a:p>
+        </p:txBody>
+      </p:sp>
+      <p:sp>
+        <p:nvSpPr>
+          <p:cNvPr id="9" name="Rectangle 8"/>
+          <p:cNvSpPr/>
+          <p:nvPr/>
+        </p:nvSpPr>
+        <p:spPr>
+          <a:xfrm>
+            <a:off x="640080" y="6437376"/>
+            <a:ext cx="10908792" cy="9525"/>
+          </a:xfrm>
+          <a:prstGeom prst="rect">
+            <a:avLst/>
+          </a:prstGeom>
+          <a:solidFill>
+            <a:srgbClr val="D7DDEA"/>
+          </a:solidFill>
+          <a:ln>
+            <a:noFill/>
+          </a:ln>
+          <a:effectLst/>
+        </p:spPr>
+        <p:style>
+          <a:lnRef idx="1">
+            <a:schemeClr val="accent1"/>
+          </a:lnRef>
+          <a:fillRef idx="3">
+            <a:schemeClr val="accent1"/>
+          </a:fillRef>
+          <a:effectRef idx="2">
+            <a:schemeClr val="accent1"/>
+          </a:effectRef>
+          <a:fontRef idx="minor">
+            <a:schemeClr val="lt1"/>
+          </a:fontRef>
+        </p:style>
+        <p:txBody>
+          <a:bodyPr rtlCol="0" anchor="ctr"/>
+          <a:lstStyle/>
+          <a:p>
+            <a:pPr algn="ctr"/>
+          </a:p>
+        </p:txBody>
+      </p:sp>
+      <p:sp>
+        <p:nvSpPr>
+          <p:cNvPr id="10" name="TextBox 9"/>
+          <p:cNvSpPr txBox="1"/>
+          <p:nvPr/>
+        </p:nvSpPr>
+        <p:spPr>
+          <a:xfrm>
+            <a:off x="640080" y="6492240"/>
+            <a:ext cx="8229600" cy="274320"/>
+          </a:xfrm>
+          <a:prstGeom prst="rect">
+            <a:avLst/>
+          </a:prstGeom>
+          <a:noFill/>
+        </p:spPr>
+        <p:txBody>
+          <a:bodyPr wrap="square" anchor="t" lIns="0" rIns="0" tIns="0" bIns="0">
+            <a:spAutoFit/>
+          </a:bodyPr>
+          <a:lstStyle/>
+          <a:p>
+            <a:pPr algn="l">
+              <a:lnSpc>
+                <a:spcPct val="100000"/>
+              </a:lnSpc>
+            </a:pPr>
+            <a:r>
+              <a:rPr sz="1000" b="0" i="0">
+                <a:solidFill>
+                  <a:srgbClr val="666E82"/>
+                </a:solidFill>
+                <a:latin typeface="Calibri"/>
+              </a:rPr>
+              <a:t>Прогнозирование временных рядов · ВКР · Лазарев А.К. · 2026</a:t>
+            </a:r>
+          </a:p>
+        </p:txBody>
+      </p:sp>
+      <p:sp>
+        <p:nvSpPr>
+          <p:cNvPr id="11" name="Rectangle 10"/>
+          <p:cNvSpPr/>
+          <p:nvPr/>
+        </p:nvSpPr>
+        <p:spPr>
+          <a:xfrm>
+            <a:off x="640080" y="1591056"/>
+            <a:ext cx="10908792" cy="859536"/>
+          </a:xfrm>
+          <a:prstGeom prst="rect">
+            <a:avLst/>
+          </a:prstGeom>
+          <a:solidFill>
+            <a:srgbClr val="EEF1F7"/>
+          </a:solidFill>
+          <a:ln>
+            <a:noFill/>
+          </a:ln>
+          <a:effectLst/>
+        </p:spPr>
+        <p:style>
+          <a:lnRef idx="1">
+            <a:schemeClr val="accent1"/>
+          </a:lnRef>
+          <a:fillRef idx="3">
+            <a:schemeClr val="accent1"/>
+          </a:fillRef>
+          <a:effectRef idx="2">
+            <a:schemeClr val="accent1"/>
+          </a:effectRef>
+          <a:fontRef idx="minor">
+            <a:schemeClr val="lt1"/>
+          </a:fontRef>
+        </p:style>
+        <p:txBody>
+          <a:bodyPr rtlCol="0" anchor="ctr"/>
+          <a:lstStyle/>
+          <a:p>
+            <a:pPr algn="ctr"/>
+          </a:p>
+        </p:txBody>
+      </p:sp>
+      <p:sp>
+        <p:nvSpPr>
+          <p:cNvPr id="12" name="Rectangle 11"/>
+          <p:cNvSpPr/>
+          <p:nvPr/>
+        </p:nvSpPr>
+        <p:spPr>
+          <a:xfrm>
+            <a:off x="640080" y="1591056"/>
+            <a:ext cx="50800" cy="859536"/>
+          </a:xfrm>
+          <a:prstGeom prst="rect">
+            <a:avLst/>
+          </a:prstGeom>
+          <a:solidFill>
+            <a:srgbClr val="E07A5F"/>
+          </a:solidFill>
+          <a:ln>
+            <a:noFill/>
+          </a:ln>
+          <a:effectLst/>
+        </p:spPr>
+        <p:style>
+          <a:lnRef idx="1">
+            <a:schemeClr val="accent1"/>
+          </a:lnRef>
+          <a:fillRef idx="3">
+            <a:schemeClr val="accent1"/>
+          </a:fillRef>
+          <a:effectRef idx="2">
+            <a:schemeClr val="accent1"/>
+          </a:effectRef>
+          <a:fontRef idx="minor">
+            <a:schemeClr val="lt1"/>
+          </a:fontRef>
+        </p:style>
+        <p:txBody>
+          <a:bodyPr rtlCol="0" anchor="ctr"/>
+          <a:lstStyle/>
+          <a:p>
+            <a:pPr algn="ctr"/>
+          </a:p>
+        </p:txBody>
+      </p:sp>
+      <p:sp>
+        <p:nvSpPr>
+          <p:cNvPr id="13" name="Oval 12"/>
+          <p:cNvSpPr/>
+          <p:nvPr/>
+        </p:nvSpPr>
+        <p:spPr>
+          <a:xfrm>
+            <a:off x="868680" y="1783080"/>
+            <a:ext cx="512064" cy="512064"/>
+          </a:xfrm>
+          <a:prstGeom prst="ellipse">
+            <a:avLst/>
+          </a:prstGeom>
+          <a:solidFill>
+            <a:srgbClr val="1B2649"/>
+          </a:solidFill>
+          <a:ln>
+            <a:noFill/>
+          </a:ln>
+          <a:effectLst/>
+        </p:spPr>
+        <p:style>
+          <a:lnRef idx="1">
+            <a:schemeClr val="accent1"/>
+          </a:lnRef>
+          <a:fillRef idx="3">
+            <a:schemeClr val="accent1"/>
+          </a:fillRef>
+          <a:effectRef idx="2">
+            <a:schemeClr val="accent1"/>
+          </a:effectRef>
+          <a:fontRef idx="minor">
+            <a:schemeClr val="lt1"/>
+          </a:fontRef>
+        </p:style>
+        <p:txBody>
+          <a:bodyPr rtlCol="0" anchor="ctr"/>
+          <a:lstStyle/>
+          <a:p>
+            <a:pPr algn="ctr"/>
+          </a:p>
+        </p:txBody>
+      </p:sp>
+      <p:sp>
+        <p:nvSpPr>
+          <p:cNvPr id="14" name="TextBox 13"/>
+          <p:cNvSpPr txBox="1"/>
+          <p:nvPr/>
+        </p:nvSpPr>
+        <p:spPr>
+          <a:xfrm>
+            <a:off x="868680" y="1856232"/>
+            <a:ext cx="512064" cy="365760"/>
+          </a:xfrm>
+          <a:prstGeom prst="rect">
+            <a:avLst/>
+          </a:prstGeom>
+          <a:noFill/>
+        </p:spPr>
+        <p:txBody>
+          <a:bodyPr wrap="square" anchor="t" lIns="0" rIns="0" tIns="0" bIns="0">
+            <a:spAutoFit/>
+          </a:bodyPr>
+          <a:lstStyle/>
+          <a:p>
+            <a:pPr algn="ctr">
+              <a:lnSpc>
+                <a:spcPct val="100000"/>
+              </a:lnSpc>
+            </a:pPr>
+            <a:r>
+              <a:rPr sz="1900" b="1" i="0">
+                <a:solidFill>
+                  <a:srgbClr val="FFFFFF"/>
+                </a:solidFill>
+                <a:latin typeface="Calibri"/>
+              </a:rPr>
+              <a:t>1</a:t>
+            </a:r>
+          </a:p>
+        </p:txBody>
+      </p:sp>
+      <p:sp>
+        <p:nvSpPr>
+          <p:cNvPr id="15" name="TextBox 14"/>
+          <p:cNvSpPr txBox="1"/>
+          <p:nvPr/>
+        </p:nvSpPr>
+        <p:spPr>
+          <a:xfrm>
+            <a:off x="1600200" y="1709928"/>
+            <a:ext cx="3200400" cy="640080"/>
+          </a:xfrm>
+          <a:prstGeom prst="rect">
+            <a:avLst/>
+          </a:prstGeom>
+          <a:noFill/>
+        </p:spPr>
+        <p:txBody>
+          <a:bodyPr wrap="square" anchor="ctr" lIns="0" rIns="0" tIns="0" bIns="0">
+            <a:spAutoFit/>
+          </a:bodyPr>
+          <a:lstStyle/>
+          <a:p>
+            <a:pPr algn="l">
+              <a:lnSpc>
+                <a:spcPct val="100000"/>
+              </a:lnSpc>
+            </a:pPr>
+            <a:r>
+              <a:rPr sz="1550" b="1" i="0">
+                <a:solidFill>
+                  <a:srgbClr val="1B2649"/>
+                </a:solidFill>
+                <a:latin typeface="Calibri"/>
+              </a:rPr>
+              <a:t>Длина обучающей выборки</a:t>
+            </a:r>
+          </a:p>
+        </p:txBody>
+      </p:sp>
+      <p:sp>
+        <p:nvSpPr>
+          <p:cNvPr id="16" name="TextBox 15"/>
+          <p:cNvSpPr txBox="1"/>
+          <p:nvPr/>
+        </p:nvSpPr>
+        <p:spPr>
+          <a:xfrm>
+            <a:off x="4892040" y="1682496"/>
+            <a:ext cx="6492240" cy="749808"/>
+          </a:xfrm>
+          <a:prstGeom prst="rect">
+            <a:avLst/>
+          </a:prstGeom>
+          <a:noFill/>
+        </p:spPr>
+        <p:txBody>
+          <a:bodyPr wrap="square" anchor="ctr" lIns="0" rIns="0" tIns="0" bIns="0">
+            <a:spAutoFit/>
+          </a:bodyPr>
+          <a:lstStyle/>
+          <a:p>
+            <a:pPr algn="l">
+              <a:lnSpc>
+                <a:spcPct val="110000"/>
+              </a:lnSpc>
+            </a:pPr>
+            <a:r>
+              <a:rPr sz="1350" b="0" i="0">
+                <a:solidFill>
+                  <a:srgbClr val="292E3A"/>
+                </a:solidFill>
+                <a:latin typeface="Calibri"/>
+              </a:rPr>
+              <a:t>Определяющий фактор. Ниже ≈ 50–100 наблюдений предпочтительны ETS и Auto-ARIMA; выше — нейросети конкурентоспособны.</a:t>
+            </a:r>
+          </a:p>
+        </p:txBody>
+      </p:sp>
+      <p:sp>
+        <p:nvSpPr>
+          <p:cNvPr id="17" name="Rectangle 16"/>
+          <p:cNvSpPr/>
+          <p:nvPr/>
+        </p:nvSpPr>
+        <p:spPr>
+          <a:xfrm>
+            <a:off x="640080" y="2505456"/>
+            <a:ext cx="10908792" cy="859536"/>
+          </a:xfrm>
+          <a:prstGeom prst="rect">
+            <a:avLst/>
+          </a:prstGeom>
+          <a:solidFill>
+            <a:srgbClr val="F6F7FB"/>
+          </a:solidFill>
+          <a:ln>
+            <a:noFill/>
+          </a:ln>
+          <a:effectLst/>
+        </p:spPr>
+        <p:style>
+          <a:lnRef idx="1">
+            <a:schemeClr val="accent1"/>
+          </a:lnRef>
+          <a:fillRef idx="3">
+            <a:schemeClr val="accent1"/>
+          </a:fillRef>
+          <a:effectRef idx="2">
+            <a:schemeClr val="accent1"/>
+          </a:effectRef>
+          <a:fontRef idx="minor">
+            <a:schemeClr val="lt1"/>
+          </a:fontRef>
+        </p:style>
+        <p:txBody>
+          <a:bodyPr rtlCol="0" anchor="ctr"/>
+          <a:lstStyle/>
+          <a:p>
+            <a:pPr algn="ctr"/>
+          </a:p>
+        </p:txBody>
+      </p:sp>
+      <p:sp>
+        <p:nvSpPr>
+          <p:cNvPr id="18" name="Rectangle 17"/>
+          <p:cNvSpPr/>
+          <p:nvPr/>
+        </p:nvSpPr>
+        <p:spPr>
+          <a:xfrm>
+            <a:off x="640080" y="2505456"/>
+            <a:ext cx="50800" cy="859536"/>
+          </a:xfrm>
+          <a:prstGeom prst="rect">
+            <a:avLst/>
+          </a:prstGeom>
+          <a:solidFill>
+            <a:srgbClr val="E07A5F"/>
+          </a:solidFill>
+          <a:ln>
+            <a:noFill/>
+          </a:ln>
+          <a:effectLst/>
+        </p:spPr>
+        <p:style>
+          <a:lnRef idx="1">
+            <a:schemeClr val="accent1"/>
+          </a:lnRef>
+          <a:fillRef idx="3">
+            <a:schemeClr val="accent1"/>
+          </a:fillRef>
+          <a:effectRef idx="2">
+            <a:schemeClr val="accent1"/>
+          </a:effectRef>
+          <a:fontRef idx="minor">
+            <a:schemeClr val="lt1"/>
+          </a:fontRef>
+        </p:style>
+        <p:txBody>
+          <a:bodyPr rtlCol="0" anchor="ctr"/>
+          <a:lstStyle/>
+          <a:p>
+            <a:pPr algn="ctr"/>
+          </a:p>
+        </p:txBody>
+      </p:sp>
+      <p:sp>
+        <p:nvSpPr>
+          <p:cNvPr id="19" name="Oval 18"/>
+          <p:cNvSpPr/>
+          <p:nvPr/>
+        </p:nvSpPr>
+        <p:spPr>
+          <a:xfrm>
+            <a:off x="868680" y="2697480"/>
+            <a:ext cx="512064" cy="512064"/>
+          </a:xfrm>
+          <a:prstGeom prst="ellipse">
+            <a:avLst/>
+          </a:prstGeom>
+          <a:solidFill>
+            <a:srgbClr val="1B2649"/>
+          </a:solidFill>
+          <a:ln>
+            <a:noFill/>
+          </a:ln>
+          <a:effectLst/>
+        </p:spPr>
+        <p:style>
+          <a:lnRef idx="1">
+            <a:schemeClr val="accent1"/>
+          </a:lnRef>
+          <a:fillRef idx="3">
+            <a:schemeClr val="accent1"/>
+          </a:fillRef>
+          <a:effectRef idx="2">
+            <a:schemeClr val="accent1"/>
+          </a:effectRef>
+          <a:fontRef idx="minor">
+            <a:schemeClr val="lt1"/>
+          </a:fontRef>
+        </p:style>
+        <p:txBody>
+          <a:bodyPr rtlCol="0" anchor="ctr"/>
+          <a:lstStyle/>
+          <a:p>
+            <a:pPr algn="ctr"/>
+          </a:p>
+        </p:txBody>
+      </p:sp>
+      <p:sp>
+        <p:nvSpPr>
+          <p:cNvPr id="20" name="TextBox 19"/>
+          <p:cNvSpPr txBox="1"/>
+          <p:nvPr/>
+        </p:nvSpPr>
+        <p:spPr>
+          <a:xfrm>
+            <a:off x="868680" y="2770632"/>
+            <a:ext cx="512064" cy="365760"/>
+          </a:xfrm>
+          <a:prstGeom prst="rect">
+            <a:avLst/>
+          </a:prstGeom>
+          <a:noFill/>
+        </p:spPr>
+        <p:txBody>
+          <a:bodyPr wrap="square" anchor="t" lIns="0" rIns="0" tIns="0" bIns="0">
+            <a:spAutoFit/>
+          </a:bodyPr>
+          <a:lstStyle/>
+          <a:p>
+            <a:pPr algn="ctr">
+              <a:lnSpc>
+                <a:spcPct val="100000"/>
+              </a:lnSpc>
+            </a:pPr>
+            <a:r>
+              <a:rPr sz="1900" b="1" i="0">
+                <a:solidFill>
+                  <a:srgbClr val="FFFFFF"/>
+                </a:solidFill>
+                <a:latin typeface="Calibri"/>
+              </a:rPr>
+              <a:t>2</a:t>
+            </a:r>
+          </a:p>
+        </p:txBody>
+      </p:sp>
+      <p:sp>
+        <p:nvSpPr>
+          <p:cNvPr id="21" name="TextBox 20"/>
+          <p:cNvSpPr txBox="1"/>
+          <p:nvPr/>
+        </p:nvSpPr>
+        <p:spPr>
+          <a:xfrm>
+            <a:off x="1600200" y="2624328"/>
+            <a:ext cx="3200400" cy="640080"/>
+          </a:xfrm>
+          <a:prstGeom prst="rect">
+            <a:avLst/>
+          </a:prstGeom>
+          <a:noFill/>
+        </p:spPr>
+        <p:txBody>
+          <a:bodyPr wrap="square" anchor="ctr" lIns="0" rIns="0" tIns="0" bIns="0">
+            <a:spAutoFit/>
+          </a:bodyPr>
+          <a:lstStyle/>
+          <a:p>
+            <a:pPr algn="l">
+              <a:lnSpc>
+                <a:spcPct val="100000"/>
+              </a:lnSpc>
+            </a:pPr>
+            <a:r>
+              <a:rPr sz="1550" b="1" i="0">
+                <a:solidFill>
+                  <a:srgbClr val="1B2649"/>
+                </a:solidFill>
+                <a:latin typeface="Calibri"/>
+              </a:rPr>
+              <a:t>TimesNet — лучшая нейросеть</a:t>
+            </a:r>
+          </a:p>
+        </p:txBody>
+      </p:sp>
+      <p:sp>
+        <p:nvSpPr>
+          <p:cNvPr id="22" name="TextBox 21"/>
+          <p:cNvSpPr txBox="1"/>
+          <p:nvPr/>
+        </p:nvSpPr>
+        <p:spPr>
+          <a:xfrm>
+            <a:off x="4892040" y="2596896"/>
+            <a:ext cx="6492240" cy="749808"/>
+          </a:xfrm>
+          <a:prstGeom prst="rect">
+            <a:avLst/>
+          </a:prstGeom>
+          <a:noFill/>
+        </p:spPr>
+        <p:txBody>
+          <a:bodyPr wrap="square" anchor="ctr" lIns="0" rIns="0" tIns="0" bIns="0">
+            <a:spAutoFit/>
+          </a:bodyPr>
+          <a:lstStyle/>
+          <a:p>
+            <a:pPr algn="l">
+              <a:lnSpc>
+                <a:spcPct val="110000"/>
+              </a:lnSpc>
+            </a:pPr>
+            <a:r>
+              <a:rPr sz="1350" b="0" i="0">
+                <a:solidFill>
+                  <a:srgbClr val="292E3A"/>
+                </a:solidFill>
+                <a:latin typeface="Calibri"/>
+              </a:rPr>
+              <a:t>В режиме обучения на одном ряде; обучаемая 2D-декомпозиция эффективна при достаточном объёме данных.</a:t>
+            </a:r>
+          </a:p>
+        </p:txBody>
+      </p:sp>
+      <p:sp>
+        <p:nvSpPr>
+          <p:cNvPr id="23" name="Rectangle 22"/>
+          <p:cNvSpPr/>
+          <p:nvPr/>
+        </p:nvSpPr>
+        <p:spPr>
+          <a:xfrm>
+            <a:off x="640080" y="3419856"/>
+            <a:ext cx="10908792" cy="859536"/>
+          </a:xfrm>
+          <a:prstGeom prst="rect">
+            <a:avLst/>
+          </a:prstGeom>
+          <a:solidFill>
+            <a:srgbClr val="EEF1F7"/>
+          </a:solidFill>
+          <a:ln>
+            <a:noFill/>
+          </a:ln>
+          <a:effectLst/>
+        </p:spPr>
+        <p:style>
+          <a:lnRef idx="1">
+            <a:schemeClr val="accent1"/>
+          </a:lnRef>
+          <a:fillRef idx="3">
+            <a:schemeClr val="accent1"/>
+          </a:fillRef>
+          <a:effectRef idx="2">
+            <a:schemeClr val="accent1"/>
+          </a:effectRef>
+          <a:fontRef idx="minor">
+            <a:schemeClr val="lt1"/>
+          </a:fontRef>
+        </p:style>
+        <p:txBody>
+          <a:bodyPr rtlCol="0" anchor="ctr"/>
+          <a:lstStyle/>
+          <a:p>
+            <a:pPr algn="ctr"/>
+          </a:p>
+        </p:txBody>
+      </p:sp>
+      <p:sp>
+        <p:nvSpPr>
+          <p:cNvPr id="24" name="Rectangle 23"/>
+          <p:cNvSpPr/>
+          <p:nvPr/>
+        </p:nvSpPr>
+        <p:spPr>
+          <a:xfrm>
+            <a:off x="640080" y="3419856"/>
+            <a:ext cx="50800" cy="859536"/>
+          </a:xfrm>
+          <a:prstGeom prst="rect">
+            <a:avLst/>
+          </a:prstGeom>
+          <a:solidFill>
+            <a:srgbClr val="E07A5F"/>
+          </a:solidFill>
+          <a:ln>
+            <a:noFill/>
+          </a:ln>
+          <a:effectLst/>
+        </p:spPr>
+        <p:style>
+          <a:lnRef idx="1">
+            <a:schemeClr val="accent1"/>
+          </a:lnRef>
+          <a:fillRef idx="3">
+            <a:schemeClr val="accent1"/>
+          </a:fillRef>
+          <a:effectRef idx="2">
+            <a:schemeClr val="accent1"/>
+          </a:effectRef>
+          <a:fontRef idx="minor">
+            <a:schemeClr val="lt1"/>
+          </a:fontRef>
+        </p:style>
+        <p:txBody>
+          <a:bodyPr rtlCol="0" anchor="ctr"/>
+          <a:lstStyle/>
+          <a:p>
+            <a:pPr algn="ctr"/>
+          </a:p>
+        </p:txBody>
+      </p:sp>
+      <p:sp>
+        <p:nvSpPr>
+          <p:cNvPr id="25" name="Oval 24"/>
+          <p:cNvSpPr/>
+          <p:nvPr/>
+        </p:nvSpPr>
+        <p:spPr>
+          <a:xfrm>
+            <a:off x="868680" y="3611880"/>
+            <a:ext cx="512064" cy="512064"/>
+          </a:xfrm>
+          <a:prstGeom prst="ellipse">
+            <a:avLst/>
+          </a:prstGeom>
+          <a:solidFill>
+            <a:srgbClr val="1B2649"/>
+          </a:solidFill>
+          <a:ln>
+            <a:noFill/>
+          </a:ln>
+          <a:effectLst/>
+        </p:spPr>
+        <p:style>
+          <a:lnRef idx="1">
+            <a:schemeClr val="accent1"/>
+          </a:lnRef>
+          <a:fillRef idx="3">
+            <a:schemeClr val="accent1"/>
+          </a:fillRef>
+          <a:effectRef idx="2">
+            <a:schemeClr val="accent1"/>
+          </a:effectRef>
+          <a:fontRef idx="minor">
+            <a:schemeClr val="lt1"/>
+          </a:fontRef>
+        </p:style>
+        <p:txBody>
+          <a:bodyPr rtlCol="0" anchor="ctr"/>
+          <a:lstStyle/>
+          <a:p>
+            <a:pPr algn="ctr"/>
+          </a:p>
+        </p:txBody>
+      </p:sp>
+      <p:sp>
+        <p:nvSpPr>
+          <p:cNvPr id="26" name="TextBox 25"/>
+          <p:cNvSpPr txBox="1"/>
+          <p:nvPr/>
+        </p:nvSpPr>
+        <p:spPr>
+          <a:xfrm>
+            <a:off x="868680" y="3685032"/>
+            <a:ext cx="512064" cy="365760"/>
+          </a:xfrm>
+          <a:prstGeom prst="rect">
+            <a:avLst/>
+          </a:prstGeom>
+          <a:noFill/>
+        </p:spPr>
+        <p:txBody>
+          <a:bodyPr wrap="square" anchor="t" lIns="0" rIns="0" tIns="0" bIns="0">
+            <a:spAutoFit/>
+          </a:bodyPr>
+          <a:lstStyle/>
+          <a:p>
+            <a:pPr algn="ctr">
+              <a:lnSpc>
+                <a:spcPct val="100000"/>
+              </a:lnSpc>
+            </a:pPr>
+            <a:r>
+              <a:rPr sz="1900" b="1" i="0">
+                <a:solidFill>
+                  <a:srgbClr val="FFFFFF"/>
+                </a:solidFill>
+                <a:latin typeface="Calibri"/>
+              </a:rPr>
+              <a:t>3</a:t>
+            </a:r>
+          </a:p>
+        </p:txBody>
+      </p:sp>
+      <p:sp>
+        <p:nvSpPr>
+          <p:cNvPr id="27" name="TextBox 26"/>
+          <p:cNvSpPr txBox="1"/>
+          <p:nvPr/>
+        </p:nvSpPr>
+        <p:spPr>
+          <a:xfrm>
+            <a:off x="1600200" y="3538728"/>
+            <a:ext cx="3200400" cy="640080"/>
+          </a:xfrm>
+          <a:prstGeom prst="rect">
+            <a:avLst/>
+          </a:prstGeom>
+          <a:noFill/>
+        </p:spPr>
+        <p:txBody>
+          <a:bodyPr wrap="square" anchor="ctr" lIns="0" rIns="0" tIns="0" bIns="0">
+            <a:spAutoFit/>
+          </a:bodyPr>
+          <a:lstStyle/>
+          <a:p>
+            <a:pPr algn="l">
+              <a:lnSpc>
+                <a:spcPct val="100000"/>
+              </a:lnSpc>
+            </a:pPr>
+            <a:r>
+              <a:rPr sz="1550" b="1" i="0">
+                <a:solidFill>
+                  <a:srgbClr val="1B2649"/>
+                </a:solidFill>
+                <a:latin typeface="Calibri"/>
+              </a:rPr>
+              <a:t>Предобучение</a:t>
+            </a:r>
+          </a:p>
+        </p:txBody>
+      </p:sp>
+      <p:sp>
+        <p:nvSpPr>
+          <p:cNvPr id="28" name="TextBox 27"/>
+          <p:cNvSpPr txBox="1"/>
+          <p:nvPr/>
+        </p:nvSpPr>
+        <p:spPr>
+          <a:xfrm>
+            <a:off x="4892040" y="3511296"/>
+            <a:ext cx="6492240" cy="749808"/>
+          </a:xfrm>
+          <a:prstGeom prst="rect">
+            <a:avLst/>
+          </a:prstGeom>
+          <a:noFill/>
+        </p:spPr>
+        <p:txBody>
+          <a:bodyPr wrap="square" anchor="ctr" lIns="0" rIns="0" tIns="0" bIns="0">
+            <a:spAutoFit/>
+          </a:bodyPr>
+          <a:lstStyle/>
+          <a:p>
+            <a:pPr algn="l">
+              <a:lnSpc>
+                <a:spcPct val="110000"/>
+              </a:lnSpc>
+            </a:pPr>
+            <a:r>
+              <a:rPr sz="1350" b="0" i="0">
+                <a:solidFill>
+                  <a:srgbClr val="292E3A"/>
+                </a:solidFill>
+                <a:latin typeface="Calibri"/>
+              </a:rPr>
+              <a:t>Повышает качество нейросетей на 18–32 % и выводит их на уровень и выше классики на M3 monthly и M4 daily.</a:t>
+            </a:r>
+          </a:p>
+        </p:txBody>
+      </p:sp>
+      <p:sp>
+        <p:nvSpPr>
+          <p:cNvPr id="29" name="Rectangle 28"/>
+          <p:cNvSpPr/>
+          <p:nvPr/>
+        </p:nvSpPr>
+        <p:spPr>
+          <a:xfrm>
+            <a:off x="640080" y="4334256"/>
+            <a:ext cx="10908792" cy="859536"/>
+          </a:xfrm>
+          <a:prstGeom prst="rect">
+            <a:avLst/>
+          </a:prstGeom>
+          <a:solidFill>
+            <a:srgbClr val="F6F7FB"/>
+          </a:solidFill>
+          <a:ln>
+            <a:noFill/>
+          </a:ln>
+          <a:effectLst/>
+        </p:spPr>
+        <p:style>
+          <a:lnRef idx="1">
+            <a:schemeClr val="accent1"/>
+          </a:lnRef>
+          <a:fillRef idx="3">
+            <a:schemeClr val="accent1"/>
+          </a:fillRef>
+          <a:effectRef idx="2">
+            <a:schemeClr val="accent1"/>
+          </a:effectRef>
+          <a:fontRef idx="minor">
+            <a:schemeClr val="lt1"/>
+          </a:fontRef>
+        </p:style>
+        <p:txBody>
+          <a:bodyPr rtlCol="0" anchor="ctr"/>
+          <a:lstStyle/>
+          <a:p>
+            <a:pPr algn="ctr"/>
+          </a:p>
+        </p:txBody>
+      </p:sp>
+      <p:sp>
+        <p:nvSpPr>
+          <p:cNvPr id="30" name="Rectangle 29"/>
+          <p:cNvSpPr/>
+          <p:nvPr/>
+        </p:nvSpPr>
+        <p:spPr>
+          <a:xfrm>
+            <a:off x="640080" y="4334256"/>
+            <a:ext cx="50800" cy="859536"/>
+          </a:xfrm>
+          <a:prstGeom prst="rect">
+            <a:avLst/>
+          </a:prstGeom>
+          <a:solidFill>
+            <a:srgbClr val="E07A5F"/>
+          </a:solidFill>
+          <a:ln>
+            <a:noFill/>
+          </a:ln>
+          <a:effectLst/>
+        </p:spPr>
+        <p:style>
+          <a:lnRef idx="1">
+            <a:schemeClr val="accent1"/>
+          </a:lnRef>
+          <a:fillRef idx="3">
+            <a:schemeClr val="accent1"/>
+          </a:fillRef>
+          <a:effectRef idx="2">
+            <a:schemeClr val="accent1"/>
+          </a:effectRef>
+          <a:fontRef idx="minor">
+            <a:schemeClr val="lt1"/>
+          </a:fontRef>
+        </p:style>
+        <p:txBody>
+          <a:bodyPr rtlCol="0" anchor="ctr"/>
+          <a:lstStyle/>
+          <a:p>
+            <a:pPr algn="ctr"/>
+          </a:p>
+        </p:txBody>
+      </p:sp>
+      <p:sp>
+        <p:nvSpPr>
+          <p:cNvPr id="31" name="Oval 30"/>
+          <p:cNvSpPr/>
+          <p:nvPr/>
+        </p:nvSpPr>
+        <p:spPr>
+          <a:xfrm>
+            <a:off x="868680" y="4526280"/>
+            <a:ext cx="512064" cy="512064"/>
+          </a:xfrm>
+          <a:prstGeom prst="ellipse">
+            <a:avLst/>
+          </a:prstGeom>
+          <a:solidFill>
+            <a:srgbClr val="1B2649"/>
+          </a:solidFill>
+          <a:ln>
+            <a:noFill/>
+          </a:ln>
+          <a:effectLst/>
+        </p:spPr>
+        <p:style>
+          <a:lnRef idx="1">
+            <a:schemeClr val="accent1"/>
+          </a:lnRef>
+          <a:fillRef idx="3">
+            <a:schemeClr val="accent1"/>
+          </a:fillRef>
+          <a:effectRef idx="2">
+            <a:schemeClr val="accent1"/>
+          </a:effectRef>
+          <a:fontRef idx="minor">
+            <a:schemeClr val="lt1"/>
+          </a:fontRef>
+        </p:style>
+        <p:txBody>
+          <a:bodyPr rtlCol="0" anchor="ctr"/>
+          <a:lstStyle/>
+          <a:p>
+            <a:pPr algn="ctr"/>
+          </a:p>
+        </p:txBody>
+      </p:sp>
+      <p:sp>
+        <p:nvSpPr>
+          <p:cNvPr id="32" name="TextBox 31"/>
+          <p:cNvSpPr txBox="1"/>
+          <p:nvPr/>
+        </p:nvSpPr>
+        <p:spPr>
+          <a:xfrm>
+            <a:off x="868680" y="4599432"/>
+            <a:ext cx="512064" cy="365760"/>
+          </a:xfrm>
+          <a:prstGeom prst="rect">
+            <a:avLst/>
+          </a:prstGeom>
+          <a:noFill/>
+        </p:spPr>
+        <p:txBody>
+          <a:bodyPr wrap="square" anchor="t" lIns="0" rIns="0" tIns="0" bIns="0">
+            <a:spAutoFit/>
+          </a:bodyPr>
+          <a:lstStyle/>
+          <a:p>
+            <a:pPr algn="ctr">
+              <a:lnSpc>
+                <a:spcPct val="100000"/>
+              </a:lnSpc>
+            </a:pPr>
+            <a:r>
+              <a:rPr sz="1900" b="1" i="0">
+                <a:solidFill>
+                  <a:srgbClr val="FFFFFF"/>
+                </a:solidFill>
+                <a:latin typeface="Calibri"/>
+              </a:rPr>
+              <a:t>4</a:t>
+            </a:r>
+          </a:p>
+        </p:txBody>
+      </p:sp>
+      <p:sp>
+        <p:nvSpPr>
+          <p:cNvPr id="33" name="TextBox 32"/>
+          <p:cNvSpPr txBox="1"/>
+          <p:nvPr/>
+        </p:nvSpPr>
+        <p:spPr>
+          <a:xfrm>
+            <a:off x="1600200" y="4453128"/>
+            <a:ext cx="3200400" cy="640080"/>
+          </a:xfrm>
+          <a:prstGeom prst="rect">
+            <a:avLst/>
+          </a:prstGeom>
+          <a:noFill/>
+        </p:spPr>
+        <p:txBody>
+          <a:bodyPr wrap="square" anchor="ctr" lIns="0" rIns="0" tIns="0" bIns="0">
+            <a:spAutoFit/>
+          </a:bodyPr>
+          <a:lstStyle/>
+          <a:p>
+            <a:pPr algn="l">
+              <a:lnSpc>
+                <a:spcPct val="100000"/>
+              </a:lnSpc>
+            </a:pPr>
+            <a:r>
+              <a:rPr sz="1550" b="1" i="0">
+                <a:solidFill>
+                  <a:srgbClr val="1B2649"/>
+                </a:solidFill>
+                <a:latin typeface="Calibri"/>
+              </a:rPr>
+              <a:t>Тип декомпозиции и режим</a:t>
+            </a:r>
+          </a:p>
+        </p:txBody>
+      </p:sp>
+      <p:sp>
+        <p:nvSpPr>
+          <p:cNvPr id="34" name="TextBox 33"/>
+          <p:cNvSpPr txBox="1"/>
+          <p:nvPr/>
+        </p:nvSpPr>
+        <p:spPr>
+          <a:xfrm>
+            <a:off x="4892040" y="4425696"/>
+            <a:ext cx="6492240" cy="749808"/>
+          </a:xfrm>
+          <a:prstGeom prst="rect">
+            <a:avLst/>
+          </a:prstGeom>
+          <a:noFill/>
+        </p:spPr>
+        <p:txBody>
+          <a:bodyPr wrap="square" anchor="ctr" lIns="0" rIns="0" tIns="0" bIns="0">
+            <a:spAutoFit/>
+          </a:bodyPr>
+          <a:lstStyle/>
+          <a:p>
+            <a:pPr algn="l">
+              <a:lnSpc>
+                <a:spcPct val="110000"/>
+              </a:lnSpc>
+            </a:pPr>
+            <a:r>
+              <a:rPr sz="1350" b="0" i="0">
+                <a:solidFill>
+                  <a:srgbClr val="292E3A"/>
+                </a:solidFill>
+                <a:latin typeface="Calibri"/>
+              </a:rPr>
+              <a:t>Фиксированная декомпозиция устойчивее, обучаемая адаптивнее, но хрупка при итеративном прогнозировании.</a:t>
+            </a:r>
+          </a:p>
+        </p:txBody>
+      </p:sp>
+      <p:sp>
+        <p:nvSpPr>
+          <p:cNvPr id="35" name="Rectangle 34"/>
+          <p:cNvSpPr/>
+          <p:nvPr/>
+        </p:nvSpPr>
+        <p:spPr>
+          <a:xfrm>
+            <a:off x="640080" y="5248656"/>
+            <a:ext cx="10908792" cy="859536"/>
+          </a:xfrm>
+          <a:prstGeom prst="rect">
+            <a:avLst/>
+          </a:prstGeom>
+          <a:solidFill>
+            <a:srgbClr val="EEF1F7"/>
+          </a:solidFill>
+          <a:ln>
+            <a:noFill/>
+          </a:ln>
+          <a:effectLst/>
+        </p:spPr>
+        <p:style>
+          <a:lnRef idx="1">
+            <a:schemeClr val="accent1"/>
+          </a:lnRef>
+          <a:fillRef idx="3">
+            <a:schemeClr val="accent1"/>
+          </a:fillRef>
+          <a:effectRef idx="2">
+            <a:schemeClr val="accent1"/>
+          </a:effectRef>
+          <a:fontRef idx="minor">
+            <a:schemeClr val="lt1"/>
+          </a:fontRef>
+        </p:style>
+        <p:txBody>
+          <a:bodyPr rtlCol="0" anchor="ctr"/>
+          <a:lstStyle/>
+          <a:p>
+            <a:pPr algn="ctr"/>
+          </a:p>
+        </p:txBody>
+      </p:sp>
+      <p:sp>
+        <p:nvSpPr>
+          <p:cNvPr id="36" name="Rectangle 35"/>
+          <p:cNvSpPr/>
+          <p:nvPr/>
+        </p:nvSpPr>
+        <p:spPr>
+          <a:xfrm>
+            <a:off x="640080" y="5248656"/>
+            <a:ext cx="50800" cy="859536"/>
+          </a:xfrm>
+          <a:prstGeom prst="rect">
+            <a:avLst/>
+          </a:prstGeom>
+          <a:solidFill>
+            <a:srgbClr val="E07A5F"/>
+          </a:solidFill>
+          <a:ln>
+            <a:noFill/>
+          </a:ln>
+          <a:effectLst/>
+        </p:spPr>
+        <p:style>
+          <a:lnRef idx="1">
+            <a:schemeClr val="accent1"/>
+          </a:lnRef>
+          <a:fillRef idx="3">
+            <a:schemeClr val="accent1"/>
+          </a:fillRef>
+          <a:effectRef idx="2">
+            <a:schemeClr val="accent1"/>
+          </a:effectRef>
+          <a:fontRef idx="minor">
+            <a:schemeClr val="lt1"/>
+          </a:fontRef>
+        </p:style>
+        <p:txBody>
+          <a:bodyPr rtlCol="0" anchor="ctr"/>
+          <a:lstStyle/>
+          <a:p>
+            <a:pPr algn="ctr"/>
+          </a:p>
+        </p:txBody>
+      </p:sp>
+      <p:sp>
+        <p:nvSpPr>
+          <p:cNvPr id="37" name="Oval 36"/>
+          <p:cNvSpPr/>
+          <p:nvPr/>
+        </p:nvSpPr>
+        <p:spPr>
+          <a:xfrm>
+            <a:off x="868680" y="5440680"/>
+            <a:ext cx="512064" cy="512064"/>
+          </a:xfrm>
+          <a:prstGeom prst="ellipse">
+            <a:avLst/>
+          </a:prstGeom>
+          <a:solidFill>
+            <a:srgbClr val="1B2649"/>
+          </a:solidFill>
+          <a:ln>
+            <a:noFill/>
+          </a:ln>
+          <a:effectLst/>
+        </p:spPr>
+        <p:style>
+          <a:lnRef idx="1">
+            <a:schemeClr val="accent1"/>
+          </a:lnRef>
+          <a:fillRef idx="3">
+            <a:schemeClr val="accent1"/>
+          </a:fillRef>
+          <a:effectRef idx="2">
+            <a:schemeClr val="accent1"/>
+          </a:effectRef>
+          <a:fontRef idx="minor">
+            <a:schemeClr val="lt1"/>
+          </a:fontRef>
+        </p:style>
+        <p:txBody>
+          <a:bodyPr rtlCol="0" anchor="ctr"/>
+          <a:lstStyle/>
+          <a:p>
+            <a:pPr algn="ctr"/>
+          </a:p>
+        </p:txBody>
+      </p:sp>
+      <p:sp>
+        <p:nvSpPr>
+          <p:cNvPr id="38" name="TextBox 37"/>
+          <p:cNvSpPr txBox="1"/>
+          <p:nvPr/>
+        </p:nvSpPr>
+        <p:spPr>
+          <a:xfrm>
+            <a:off x="868680" y="5513832"/>
+            <a:ext cx="512064" cy="365760"/>
+          </a:xfrm>
+          <a:prstGeom prst="rect">
+            <a:avLst/>
+          </a:prstGeom>
+          <a:noFill/>
+        </p:spPr>
+        <p:txBody>
+          <a:bodyPr wrap="square" anchor="t" lIns="0" rIns="0" tIns="0" bIns="0">
+            <a:spAutoFit/>
+          </a:bodyPr>
+          <a:lstStyle/>
+          <a:p>
+            <a:pPr algn="ctr">
+              <a:lnSpc>
+                <a:spcPct val="100000"/>
+              </a:lnSpc>
+            </a:pPr>
+            <a:r>
+              <a:rPr sz="1900" b="1" i="0">
+                <a:solidFill>
+                  <a:srgbClr val="FFFFFF"/>
+                </a:solidFill>
+                <a:latin typeface="Calibri"/>
+              </a:rPr>
+              <a:t>5</a:t>
+            </a:r>
+          </a:p>
+        </p:txBody>
+      </p:sp>
+      <p:sp>
+        <p:nvSpPr>
+          <p:cNvPr id="39" name="TextBox 38"/>
+          <p:cNvSpPr txBox="1"/>
+          <p:nvPr/>
+        </p:nvSpPr>
+        <p:spPr>
+          <a:xfrm>
+            <a:off x="1600200" y="5367528"/>
+            <a:ext cx="3200400" cy="640080"/>
+          </a:xfrm>
+          <a:prstGeom prst="rect">
+            <a:avLst/>
+          </a:prstGeom>
+          <a:noFill/>
+        </p:spPr>
+        <p:txBody>
+          <a:bodyPr wrap="square" anchor="ctr" lIns="0" rIns="0" tIns="0" bIns="0">
+            <a:spAutoFit/>
+          </a:bodyPr>
+          <a:lstStyle/>
+          <a:p>
+            <a:pPr algn="l">
+              <a:lnSpc>
+                <a:spcPct val="100000"/>
+              </a:lnSpc>
+            </a:pPr>
+            <a:r>
+              <a:rPr sz="1550" b="1" i="0">
+                <a:solidFill>
+                  <a:srgbClr val="1B2649"/>
+                </a:solidFill>
+                <a:latin typeface="Calibri"/>
+              </a:rPr>
+              <a:t>Общий вывод</a:t>
+            </a:r>
+          </a:p>
+        </p:txBody>
+      </p:sp>
+      <p:sp>
+        <p:nvSpPr>
+          <p:cNvPr id="40" name="TextBox 39"/>
+          <p:cNvSpPr txBox="1"/>
+          <p:nvPr/>
+        </p:nvSpPr>
+        <p:spPr>
+          <a:xfrm>
+            <a:off x="4892040" y="5340096"/>
+            <a:ext cx="6492240" cy="749808"/>
+          </a:xfrm>
+          <a:prstGeom prst="rect">
+            <a:avLst/>
+          </a:prstGeom>
+          <a:noFill/>
+        </p:spPr>
+        <p:txBody>
+          <a:bodyPr wrap="square" anchor="ctr" lIns="0" rIns="0" tIns="0" bIns="0">
+            <a:spAutoFit/>
+          </a:bodyPr>
+          <a:lstStyle/>
+          <a:p>
+            <a:pPr algn="l">
+              <a:lnSpc>
+                <a:spcPct val="110000"/>
+              </a:lnSpc>
+            </a:pPr>
+            <a:r>
+              <a:rPr sz="1350" b="0" i="0">
+                <a:solidFill>
+                  <a:srgbClr val="292E3A"/>
+                </a:solidFill>
+                <a:latin typeface="Calibri"/>
+              </a:rPr>
+              <a:t>Эффективность нейросетевых механизмов не абсолютна — она определяется длиной ряда, режимом обучения и объёмом данных.</a:t>
+            </a:r>
+          </a:p>
+        </p:txBody>
+      </p:sp>
+    </p:spTree>
+  </p:cSld>
+  <p:clrMapOvr>
+    <a:masterClrMapping/>
+  </p:clrMapOvr>
+</p:sld>
+</file>
+
+<file path=ppt/slides/slide15.xml><?xml version="1.0" encoding="utf-8"?>
+<p:sld xmlns:a="http://schemas.openxmlformats.org/drawingml/2006/main" xmlns:p="http://schemas.openxmlformats.org/presentationml/2006/main" xmlns:r="http://schemas.openxmlformats.org/officeDocument/2006/relationships">
+  <p:cSld>
+    <p:spTree>
+      <p:nvGrpSpPr>
+        <p:cNvPr id="1" name=""/>
+        <p:cNvGrpSpPr/>
+        <p:nvPr/>
+      </p:nvGrpSpPr>
+      <p:grpSpPr/>
+      <p:sp>
+        <p:nvSpPr>
+          <p:cNvPr id="2" name="Rectangle 1"/>
+          <p:cNvSpPr/>
+          <p:nvPr/>
+        </p:nvSpPr>
+        <p:spPr>
+          <a:xfrm>
+            <a:off x="0" y="0"/>
+            <a:ext cx="12191695" cy="6858000"/>
+          </a:xfrm>
+          <a:prstGeom prst="rect">
+            <a:avLst/>
+          </a:prstGeom>
+          <a:solidFill>
             <a:srgbClr val="1B2649"/>
           </a:solidFill>
           <a:ln>
@@ -10527,7 +11644,7 @@
                 </a:solidFill>
                 <a:latin typeface="Calibri"/>
               </a:rPr>
-              <a:t>02 / 14</a:t>
+              <a:t>02 / 15</a:t>
             </a:r>
           </a:p>
         </p:txBody>
@@ -11348,7 +12465,7 @@
                 </a:solidFill>
                 <a:latin typeface="Calibri"/>
               </a:rPr>
-              <a:t>03 / 14</a:t>
+              <a:t>03 / 15</a:t>
             </a:r>
           </a:p>
         </p:txBody>
@@ -12904,7 +14021,7 @@
                 </a:solidFill>
                 <a:latin typeface="Calibri"/>
               </a:rPr>
-              <a:t>04 / 14</a:t>
+              <a:t>04 / 15</a:t>
             </a:r>
           </a:p>
         </p:txBody>
@@ -13823,7 +14940,7 @@
                 </a:solidFill>
                 <a:latin typeface="Calibri"/>
               </a:rPr>
-              <a:t>05 / 14</a:t>
+              <a:t>05 / 15</a:t>
             </a:r>
           </a:p>
         </p:txBody>
@@ -15203,7 +16320,7 @@
                 </a:solidFill>
                 <a:latin typeface="Calibri"/>
               </a:rPr>
-              <a:t>06 / 14</a:t>
+              <a:t>06 / 15</a:t>
             </a:r>
           </a:p>
         </p:txBody>
@@ -16048,7 +17165,7 @@
                 </a:solidFill>
                 <a:latin typeface="Calibri"/>
               </a:rPr>
-              <a:t>07 / 14</a:t>
+              <a:t>07 / 15</a:t>
             </a:r>
           </a:p>
         </p:txBody>
@@ -16893,7 +18010,7 @@
                 </a:solidFill>
                 <a:latin typeface="Calibri"/>
               </a:rPr>
-              <a:t>08 / 14</a:t>
+              <a:t>08 / 15</a:t>
             </a:r>
           </a:p>
         </p:txBody>
@@ -17838,7 +18955,7 @@
                 </a:solidFill>
                 <a:latin typeface="Calibri"/>
               </a:rPr>
-              <a:t>09 / 14</a:t>
+              <a:t>09 / 15</a:t>
             </a:r>
           </a:p>
         </p:txBody>

--- a/docs/Презентация_Лазарев_ВКР.pptx
+++ b/docs/Презентация_Лазарев_ВКР.pptx
@@ -20,6 +20,7 @@
     <p:sldId id="268" r:id="rId19"/>
     <p:sldId id="269" r:id="rId20"/>
     <p:sldId id="270" r:id="rId21"/>
+    <p:sldId id="271" r:id="rId22"/>
   </p:sldIdLst>
   <p:sldSz cx="12191695" cy="6858000" type="screen4x3"/>
   <p:notesSz cx="6858000" cy="9144000"/>
@@ -3863,7 +3864,7 @@
                 </a:solidFill>
                 <a:latin typeface="Calibri"/>
               </a:rPr>
-              <a:t>10 / 15</a:t>
+              <a:t>10 / 16</a:t>
             </a:r>
           </a:p>
         </p:txBody>
@@ -6873,7 +6874,7 @@
                 </a:solidFill>
                 <a:latin typeface="Calibri"/>
               </a:rPr>
-              <a:t>11 / 15</a:t>
+              <a:t>11 / 16</a:t>
             </a:r>
           </a:p>
         </p:txBody>
@@ -7701,7 +7702,7 @@
                 </a:solidFill>
                 <a:latin typeface="Calibri"/>
               </a:rPr>
-              <a:t>12 / 15</a:t>
+              <a:t>12 / 16</a:t>
             </a:r>
           </a:p>
         </p:txBody>
@@ -8695,7 +8696,7 @@
                 </a:solidFill>
                 <a:latin typeface="Calibri"/>
               </a:rPr>
-              <a:t>Итеративное прогнозирование: прямой vs итеративный</a:t>
+              <a:t>Итеративное прогнозирование: масштаб деградации</a:t>
             </a:r>
           </a:p>
         </p:txBody>
@@ -8734,7 +8735,7 @@
                 </a:solidFill>
                 <a:latin typeface="Calibri"/>
               </a:rPr>
-              <a:t>Раздел 3. Прогноз на квартальном ряде M3 (T478)</a:t>
+              <a:t>Раздел 3. Прямой vs итеративный sMAPE по моделям (M3)</a:t>
             </a:r>
           </a:p>
         </p:txBody>
@@ -8817,7 +8818,7 @@
                 </a:solidFill>
                 <a:latin typeface="Calibri"/>
               </a:rPr>
-              <a:t>13 / 15</a:t>
+              <a:t>13 / 16</a:t>
             </a:r>
           </a:p>
         </p:txBody>
@@ -8907,7 +8908,7 @@
       </p:sp>
       <p:pic>
         <p:nvPicPr>
-          <p:cNvPr id="11" name="Picture 10" descr="rollout_m3_quarterly_T478.png"/>
+          <p:cNvPr id="11" name="Picture 10" descr="rollout_degradation_bars.png"/>
           <p:cNvPicPr>
             <a:picLocks noChangeAspect="1"/>
           </p:cNvPicPr>
@@ -8921,8 +8922,8 @@
         </p:blipFill>
         <p:spPr>
           <a:xfrm>
-            <a:off x="640080" y="1953168"/>
-            <a:ext cx="7269480" cy="3225984"/>
+            <a:off x="640080" y="1966326"/>
+            <a:ext cx="7269480" cy="3199667"/>
           </a:xfrm>
           <a:prstGeom prst="rect">
             <a:avLst/>
@@ -9051,7 +9052,7 @@
                 </a:solidFill>
                 <a:latin typeface="Calibri"/>
               </a:rPr>
-              <a:t>Как читать график</a:t>
+              <a:t>Что показывает диаграмма</a:t>
             </a:r>
           </a:p>
         </p:txBody>
@@ -9083,7 +9084,7 @@
                 <a:spcPct val="110000"/>
               </a:lnSpc>
               <a:spcAft>
-                <a:spcPts val="1200"/>
+                <a:spcPts val="1100"/>
               </a:spcAft>
             </a:pPr>
             <a:r>
@@ -9102,7 +9103,7 @@
                 </a:solidFill>
                 <a:latin typeface="Calibri"/>
               </a:rPr>
-              <a:t>Чёрная линия — </a:t>
+              <a:t>Синий — </a:t>
             </a:r>
             <a:r>
               <a:rPr sz="1350" b="0" i="0">
@@ -9111,7 +9112,7 @@
                 </a:solidFill>
                 <a:latin typeface="Calibri"/>
               </a:rPr>
-              <a:t>фактические значения.</a:t>
+              <a:t>прямой прогноз, оранжевый — итеративный.</a:t>
             </a:r>
           </a:p>
           <a:p>
@@ -9120,7 +9121,7 @@
                 <a:spcPct val="110000"/>
               </a:lnSpc>
               <a:spcAft>
-                <a:spcPts val="1200"/>
+                <a:spcPts val="1100"/>
               </a:spcAft>
             </a:pPr>
             <a:r>
@@ -9139,7 +9140,7 @@
                 </a:solidFill>
                 <a:latin typeface="Calibri"/>
               </a:rPr>
-              <a:t>Пунктир </a:t>
+              <a:t>Классика </a:t>
             </a:r>
             <a:r>
               <a:rPr sz="1350" b="0" i="0">
@@ -9148,7 +9149,7 @@
                 </a:solidFill>
                 <a:latin typeface="Calibri"/>
               </a:rPr>
-              <a:t>— прямой прогноз модели.</a:t>
+              <a:t>(S. Naive, ARIMA, ETS) — деградации практически нет.</a:t>
             </a:r>
           </a:p>
           <a:p>
@@ -9157,7 +9158,7 @@
                 <a:spcPct val="110000"/>
               </a:lnSpc>
               <a:spcAft>
-                <a:spcPts val="1200"/>
+                <a:spcPts val="1100"/>
               </a:spcAft>
             </a:pPr>
             <a:r>
@@ -9176,7 +9177,7 @@
                 </a:solidFill>
                 <a:latin typeface="Calibri"/>
               </a:rPr>
-              <a:t>Сплошная </a:t>
+              <a:t>Обучаемая декомпозиция </a:t>
             </a:r>
             <a:r>
               <a:rPr sz="1350" b="0" i="0">
@@ -9185,7 +9186,7 @@
                 </a:solidFill>
                 <a:latin typeface="Calibri"/>
               </a:rPr>
-              <a:t>— итеративный прогноз той же модели.</a:t>
+              <a:t>(FEDformer, Autoformer, TimesNet) теряет 4–6 п.п. sMAPE.</a:t>
             </a:r>
           </a:p>
           <a:p>
@@ -9194,7 +9195,7 @@
                 <a:spcPct val="110000"/>
               </a:lnSpc>
               <a:spcAft>
-                <a:spcPts val="1200"/>
+                <a:spcPts val="1100"/>
               </a:spcAft>
             </a:pPr>
             <a:r>
@@ -9213,7 +9214,7 @@
                 </a:solidFill>
                 <a:latin typeface="Calibri"/>
               </a:rPr>
-              <a:t>Расхождение </a:t>
+              <a:t>Модели упорядочены </a:t>
             </a:r>
             <a:r>
               <a:rPr sz="1350" b="0" i="0">
@@ -9222,7 +9223,7 @@
                 </a:solidFill>
                 <a:latin typeface="Calibri"/>
               </a:rPr>
-              <a:t>пунктира и сплошной линии показывает деградацию модели в итеративном режиме.</a:t>
+              <a:t>по росту деградации слева направо.</a:t>
             </a:r>
           </a:p>
         </p:txBody>
@@ -9388,7 +9389,7 @@
                 </a:solidFill>
                 <a:latin typeface="Calibri"/>
               </a:rPr>
-              <a:t>Модели с обучаемой декомпозицией заметно отклоняются от факта в итеративном режиме; классические — нет.</a:t>
+              <a:t>Чем сложнее обучаемая декомпозиция, тем сильнее накопление ошибки в итеративном режиме; классика к режиму нечувствительна.</a:t>
             </a:r>
           </a:p>
         </p:txBody>
@@ -9699,7 +9700,7 @@
                 </a:solidFill>
                 <a:latin typeface="Calibri"/>
               </a:rPr>
-              <a:t>14 / 15</a:t>
+              <a:t>14 / 16</a:t>
             </a:r>
           </a:p>
         </p:txBody>
@@ -11065,6 +11066,1104 @@
             <a:avLst/>
           </a:prstGeom>
           <a:solidFill>
+            <a:srgbClr val="FFFFFF"/>
+          </a:solidFill>
+          <a:ln>
+            <a:noFill/>
+          </a:ln>
+          <a:effectLst/>
+        </p:spPr>
+        <p:style>
+          <a:lnRef idx="1">
+            <a:schemeClr val="accent1"/>
+          </a:lnRef>
+          <a:fillRef idx="3">
+            <a:schemeClr val="accent1"/>
+          </a:fillRef>
+          <a:effectRef idx="2">
+            <a:schemeClr val="accent1"/>
+          </a:effectRef>
+          <a:fontRef idx="minor">
+            <a:schemeClr val="lt1"/>
+          </a:fontRef>
+        </p:style>
+        <p:txBody>
+          <a:bodyPr rtlCol="0" anchor="ctr"/>
+          <a:lstStyle/>
+          <a:p>
+            <a:pPr algn="ctr"/>
+          </a:p>
+        </p:txBody>
+      </p:sp>
+      <p:sp>
+        <p:nvSpPr>
+          <p:cNvPr id="3" name="Rectangle 2"/>
+          <p:cNvSpPr/>
+          <p:nvPr/>
+        </p:nvSpPr>
+        <p:spPr>
+          <a:xfrm>
+            <a:off x="0" y="0"/>
+            <a:ext cx="12191695" cy="1335024"/>
+          </a:xfrm>
+          <a:prstGeom prst="rect">
+            <a:avLst/>
+          </a:prstGeom>
+          <a:solidFill>
+            <a:srgbClr val="1B2649"/>
+          </a:solidFill>
+          <a:ln>
+            <a:noFill/>
+          </a:ln>
+          <a:effectLst/>
+        </p:spPr>
+        <p:style>
+          <a:lnRef idx="1">
+            <a:schemeClr val="accent1"/>
+          </a:lnRef>
+          <a:fillRef idx="3">
+            <a:schemeClr val="accent1"/>
+          </a:fillRef>
+          <a:effectRef idx="2">
+            <a:schemeClr val="accent1"/>
+          </a:effectRef>
+          <a:fontRef idx="minor">
+            <a:schemeClr val="lt1"/>
+          </a:fontRef>
+        </p:style>
+        <p:txBody>
+          <a:bodyPr rtlCol="0" anchor="ctr"/>
+          <a:lstStyle/>
+          <a:p>
+            <a:pPr algn="ctr"/>
+          </a:p>
+        </p:txBody>
+      </p:sp>
+      <p:sp>
+        <p:nvSpPr>
+          <p:cNvPr id="4" name="Rectangle 3"/>
+          <p:cNvSpPr/>
+          <p:nvPr/>
+        </p:nvSpPr>
+        <p:spPr>
+          <a:xfrm>
+            <a:off x="0" y="1335024"/>
+            <a:ext cx="12191695" cy="38100"/>
+          </a:xfrm>
+          <a:prstGeom prst="rect">
+            <a:avLst/>
+          </a:prstGeom>
+          <a:solidFill>
+            <a:srgbClr val="E07A5F"/>
+          </a:solidFill>
+          <a:ln>
+            <a:noFill/>
+          </a:ln>
+          <a:effectLst/>
+        </p:spPr>
+        <p:style>
+          <a:lnRef idx="1">
+            <a:schemeClr val="accent1"/>
+          </a:lnRef>
+          <a:fillRef idx="3">
+            <a:schemeClr val="accent1"/>
+          </a:fillRef>
+          <a:effectRef idx="2">
+            <a:schemeClr val="accent1"/>
+          </a:effectRef>
+          <a:fontRef idx="minor">
+            <a:schemeClr val="lt1"/>
+          </a:fontRef>
+        </p:style>
+        <p:txBody>
+          <a:bodyPr rtlCol="0" anchor="ctr"/>
+          <a:lstStyle/>
+          <a:p>
+            <a:pPr algn="ctr"/>
+          </a:p>
+        </p:txBody>
+      </p:sp>
+      <p:sp>
+        <p:nvSpPr>
+          <p:cNvPr id="5" name="TextBox 4"/>
+          <p:cNvSpPr txBox="1"/>
+          <p:nvPr/>
+        </p:nvSpPr>
+        <p:spPr>
+          <a:xfrm>
+            <a:off x="640080" y="237744"/>
+            <a:ext cx="9326880" cy="658368"/>
+          </a:xfrm>
+          <a:prstGeom prst="rect">
+            <a:avLst/>
+          </a:prstGeom>
+          <a:noFill/>
+        </p:spPr>
+        <p:txBody>
+          <a:bodyPr wrap="square" anchor="t" lIns="0" rIns="0" tIns="0" bIns="0">
+            <a:spAutoFit/>
+          </a:bodyPr>
+          <a:lstStyle/>
+          <a:p>
+            <a:pPr algn="l">
+              <a:lnSpc>
+                <a:spcPct val="100000"/>
+              </a:lnSpc>
+            </a:pPr>
+            <a:r>
+              <a:rPr sz="2700" b="1" i="0">
+                <a:solidFill>
+                  <a:srgbClr val="FFFFFF"/>
+                </a:solidFill>
+                <a:latin typeface="Calibri"/>
+              </a:rPr>
+              <a:t>Список литературы (избранное)</a:t>
+            </a:r>
+          </a:p>
+        </p:txBody>
+      </p:sp>
+      <p:sp>
+        <p:nvSpPr>
+          <p:cNvPr id="6" name="TextBox 5"/>
+          <p:cNvSpPr txBox="1"/>
+          <p:nvPr/>
+        </p:nvSpPr>
+        <p:spPr>
+          <a:xfrm>
+            <a:off x="658368" y="896112"/>
+            <a:ext cx="9144000" cy="365760"/>
+          </a:xfrm>
+          <a:prstGeom prst="rect">
+            <a:avLst/>
+          </a:prstGeom>
+          <a:noFill/>
+        </p:spPr>
+        <p:txBody>
+          <a:bodyPr wrap="square" anchor="t" lIns="0" rIns="0" tIns="0" bIns="0">
+            <a:spAutoFit/>
+          </a:bodyPr>
+          <a:lstStyle/>
+          <a:p>
+            <a:pPr algn="l">
+              <a:lnSpc>
+                <a:spcPct val="100000"/>
+              </a:lnSpc>
+            </a:pPr>
+            <a:r>
+              <a:rPr sz="1400" b="0" i="1">
+                <a:solidFill>
+                  <a:srgbClr val="B7C2DE"/>
+                </a:solidFill>
+                <a:latin typeface="Calibri"/>
+              </a:rPr>
+              <a:t>Раздел 5. Полный список — 49 источников в ВКР</a:t>
+            </a:r>
+          </a:p>
+        </p:txBody>
+      </p:sp>
+      <p:sp>
+        <p:nvSpPr>
+          <p:cNvPr id="7" name="Rounded Rectangle 6"/>
+          <p:cNvSpPr/>
+          <p:nvPr/>
+        </p:nvSpPr>
+        <p:spPr>
+          <a:xfrm>
+            <a:off x="10927080" y="384048"/>
+            <a:ext cx="868680" cy="457200"/>
+          </a:xfrm>
+          <a:prstGeom prst="roundRect">
+            <a:avLst/>
+          </a:prstGeom>
+          <a:solidFill>
+            <a:srgbClr val="2E3D6B"/>
+          </a:solidFill>
+          <a:ln>
+            <a:noFill/>
+          </a:ln>
+          <a:effectLst/>
+        </p:spPr>
+        <p:style>
+          <a:lnRef idx="1">
+            <a:schemeClr val="accent1"/>
+          </a:lnRef>
+          <a:fillRef idx="3">
+            <a:schemeClr val="accent1"/>
+          </a:fillRef>
+          <a:effectRef idx="2">
+            <a:schemeClr val="accent1"/>
+          </a:effectRef>
+          <a:fontRef idx="minor">
+            <a:schemeClr val="lt1"/>
+          </a:fontRef>
+        </p:style>
+        <p:txBody>
+          <a:bodyPr rtlCol="0" anchor="ctr"/>
+          <a:lstStyle/>
+          <a:p>
+            <a:pPr algn="ctr"/>
+          </a:p>
+        </p:txBody>
+      </p:sp>
+      <p:sp>
+        <p:nvSpPr>
+          <p:cNvPr id="8" name="TextBox 7"/>
+          <p:cNvSpPr txBox="1"/>
+          <p:nvPr/>
+        </p:nvSpPr>
+        <p:spPr>
+          <a:xfrm>
+            <a:off x="10927080" y="475488"/>
+            <a:ext cx="868680" cy="310896"/>
+          </a:xfrm>
+          <a:prstGeom prst="rect">
+            <a:avLst/>
+          </a:prstGeom>
+          <a:noFill/>
+        </p:spPr>
+        <p:txBody>
+          <a:bodyPr wrap="square" anchor="t" lIns="0" rIns="0" tIns="0" bIns="0">
+            <a:spAutoFit/>
+          </a:bodyPr>
+          <a:lstStyle/>
+          <a:p>
+            <a:pPr algn="ctr">
+              <a:lnSpc>
+                <a:spcPct val="100000"/>
+              </a:lnSpc>
+            </a:pPr>
+            <a:r>
+              <a:rPr sz="1300" b="1" i="0">
+                <a:solidFill>
+                  <a:srgbClr val="FFFFFF"/>
+                </a:solidFill>
+                <a:latin typeface="Calibri"/>
+              </a:rPr>
+              <a:t>15 / 16</a:t>
+            </a:r>
+          </a:p>
+        </p:txBody>
+      </p:sp>
+      <p:sp>
+        <p:nvSpPr>
+          <p:cNvPr id="9" name="Rectangle 8"/>
+          <p:cNvSpPr/>
+          <p:nvPr/>
+        </p:nvSpPr>
+        <p:spPr>
+          <a:xfrm>
+            <a:off x="640080" y="6437376"/>
+            <a:ext cx="10908792" cy="9525"/>
+          </a:xfrm>
+          <a:prstGeom prst="rect">
+            <a:avLst/>
+          </a:prstGeom>
+          <a:solidFill>
+            <a:srgbClr val="D7DDEA"/>
+          </a:solidFill>
+          <a:ln>
+            <a:noFill/>
+          </a:ln>
+          <a:effectLst/>
+        </p:spPr>
+        <p:style>
+          <a:lnRef idx="1">
+            <a:schemeClr val="accent1"/>
+          </a:lnRef>
+          <a:fillRef idx="3">
+            <a:schemeClr val="accent1"/>
+          </a:fillRef>
+          <a:effectRef idx="2">
+            <a:schemeClr val="accent1"/>
+          </a:effectRef>
+          <a:fontRef idx="minor">
+            <a:schemeClr val="lt1"/>
+          </a:fontRef>
+        </p:style>
+        <p:txBody>
+          <a:bodyPr rtlCol="0" anchor="ctr"/>
+          <a:lstStyle/>
+          <a:p>
+            <a:pPr algn="ctr"/>
+          </a:p>
+        </p:txBody>
+      </p:sp>
+      <p:sp>
+        <p:nvSpPr>
+          <p:cNvPr id="10" name="TextBox 9"/>
+          <p:cNvSpPr txBox="1"/>
+          <p:nvPr/>
+        </p:nvSpPr>
+        <p:spPr>
+          <a:xfrm>
+            <a:off x="640080" y="6492240"/>
+            <a:ext cx="8229600" cy="274320"/>
+          </a:xfrm>
+          <a:prstGeom prst="rect">
+            <a:avLst/>
+          </a:prstGeom>
+          <a:noFill/>
+        </p:spPr>
+        <p:txBody>
+          <a:bodyPr wrap="square" anchor="t" lIns="0" rIns="0" tIns="0" bIns="0">
+            <a:spAutoFit/>
+          </a:bodyPr>
+          <a:lstStyle/>
+          <a:p>
+            <a:pPr algn="l">
+              <a:lnSpc>
+                <a:spcPct val="100000"/>
+              </a:lnSpc>
+            </a:pPr>
+            <a:r>
+              <a:rPr sz="1000" b="0" i="0">
+                <a:solidFill>
+                  <a:srgbClr val="666E82"/>
+                </a:solidFill>
+                <a:latin typeface="Calibri"/>
+              </a:rPr>
+              <a:t>Прогнозирование временных рядов · ВКР · Лазарев А.К. · 2026</a:t>
+            </a:r>
+          </a:p>
+        </p:txBody>
+      </p:sp>
+      <p:sp>
+        <p:nvSpPr>
+          <p:cNvPr id="11" name="TextBox 10"/>
+          <p:cNvSpPr txBox="1"/>
+          <p:nvPr/>
+        </p:nvSpPr>
+        <p:spPr>
+          <a:xfrm>
+            <a:off x="640080" y="1691640"/>
+            <a:ext cx="5394960" cy="4480560"/>
+          </a:xfrm>
+          <a:prstGeom prst="rect">
+            <a:avLst/>
+          </a:prstGeom>
+          <a:noFill/>
+        </p:spPr>
+        <p:txBody>
+          <a:bodyPr wrap="square" anchor="t" lIns="0" rIns="0" tIns="0" bIns="0">
+            <a:spAutoFit/>
+          </a:bodyPr>
+          <a:lstStyle/>
+          <a:p>
+            <a:pPr algn="l">
+              <a:lnSpc>
+                <a:spcPct val="112000"/>
+              </a:lnSpc>
+              <a:spcAft>
+                <a:spcPts val="1300"/>
+              </a:spcAft>
+            </a:pPr>
+            <a:r>
+              <a:rPr sz="1100" b="1" i="0">
+                <a:solidFill>
+                  <a:srgbClr val="C25A40"/>
+                </a:solidFill>
+                <a:latin typeface="Calibri"/>
+              </a:rPr>
+              <a:t>1.  </a:t>
+            </a:r>
+            <a:r>
+              <a:rPr sz="1100" b="0" i="0">
+                <a:solidFill>
+                  <a:srgbClr val="292E3A"/>
+                </a:solidFill>
+                <a:latin typeface="Calibri"/>
+              </a:rPr>
+              <a:t>Hyndman R.J., Athanasopoulos G. Forecasting: principles and practice. — Melbourne: OTexts, 2021.</a:t>
+            </a:r>
+          </a:p>
+          <a:p>
+            <a:pPr algn="l">
+              <a:lnSpc>
+                <a:spcPct val="112000"/>
+              </a:lnSpc>
+              <a:spcAft>
+                <a:spcPts val="1300"/>
+              </a:spcAft>
+            </a:pPr>
+            <a:r>
+              <a:rPr sz="1100" b="1" i="0">
+                <a:solidFill>
+                  <a:srgbClr val="C25A40"/>
+                </a:solidFill>
+                <a:latin typeface="Calibri"/>
+              </a:rPr>
+              <a:t>2.  </a:t>
+            </a:r>
+            <a:r>
+              <a:rPr sz="1100" b="0" i="0">
+                <a:solidFill>
+                  <a:srgbClr val="292E3A"/>
+                </a:solidFill>
+                <a:latin typeface="Calibri"/>
+              </a:rPr>
+              <a:t>Box G.E.P., Jenkins G.M. Time series analysis: forecasting and control. — Holden-Day, 1970.</a:t>
+            </a:r>
+          </a:p>
+          <a:p>
+            <a:pPr algn="l">
+              <a:lnSpc>
+                <a:spcPct val="112000"/>
+              </a:lnSpc>
+              <a:spcAft>
+                <a:spcPts val="1300"/>
+              </a:spcAft>
+            </a:pPr>
+            <a:r>
+              <a:rPr sz="1100" b="1" i="0">
+                <a:solidFill>
+                  <a:srgbClr val="C25A40"/>
+                </a:solidFill>
+                <a:latin typeface="Calibri"/>
+              </a:rPr>
+              <a:t>3.  </a:t>
+            </a:r>
+            <a:r>
+              <a:rPr sz="1100" b="0" i="0">
+                <a:solidFill>
+                  <a:srgbClr val="292E3A"/>
+                </a:solidFill>
+                <a:latin typeface="Calibri"/>
+              </a:rPr>
+              <a:t>Makridakis S., Spiliotis E., Assimakopoulos V. The M4 Competition // Int. J. Forecasting. — 2020. — Vol. 36(1).</a:t>
+            </a:r>
+          </a:p>
+          <a:p>
+            <a:pPr algn="l">
+              <a:lnSpc>
+                <a:spcPct val="112000"/>
+              </a:lnSpc>
+              <a:spcAft>
+                <a:spcPts val="1300"/>
+              </a:spcAft>
+            </a:pPr>
+            <a:r>
+              <a:rPr sz="1100" b="1" i="0">
+                <a:solidFill>
+                  <a:srgbClr val="C25A40"/>
+                </a:solidFill>
+                <a:latin typeface="Calibri"/>
+              </a:rPr>
+              <a:t>4.  </a:t>
+            </a:r>
+            <a:r>
+              <a:rPr sz="1100" b="0" i="0">
+                <a:solidFill>
+                  <a:srgbClr val="292E3A"/>
+                </a:solidFill>
+                <a:latin typeface="Calibri"/>
+              </a:rPr>
+              <a:t>Makridakis S., Hibon M. The M3-Competition // Int. J. Forecasting. — 2000. — Vol. 16(4).</a:t>
+            </a:r>
+          </a:p>
+          <a:p>
+            <a:pPr algn="l">
+              <a:lnSpc>
+                <a:spcPct val="112000"/>
+              </a:lnSpc>
+              <a:spcAft>
+                <a:spcPts val="1300"/>
+              </a:spcAft>
+            </a:pPr>
+            <a:r>
+              <a:rPr sz="1100" b="1" i="0">
+                <a:solidFill>
+                  <a:srgbClr val="C25A40"/>
+                </a:solidFill>
+                <a:latin typeface="Calibri"/>
+              </a:rPr>
+              <a:t>5.  </a:t>
+            </a:r>
+            <a:r>
+              <a:rPr sz="1100" b="0" i="0">
+                <a:solidFill>
+                  <a:srgbClr val="292E3A"/>
+                </a:solidFill>
+                <a:latin typeface="Calibri"/>
+              </a:rPr>
+              <a:t>Cleveland R.B. et al. STL: A Seasonal-Trend Decomposition Procedure Based on Loess // J. Official Statistics. — 1990.</a:t>
+            </a:r>
+          </a:p>
+          <a:p>
+            <a:pPr algn="l">
+              <a:lnSpc>
+                <a:spcPct val="112000"/>
+              </a:lnSpc>
+              <a:spcAft>
+                <a:spcPts val="1300"/>
+              </a:spcAft>
+            </a:pPr>
+            <a:r>
+              <a:rPr sz="1100" b="1" i="0">
+                <a:solidFill>
+                  <a:srgbClr val="C25A40"/>
+                </a:solidFill>
+                <a:latin typeface="Calibri"/>
+              </a:rPr>
+              <a:t>6.  </a:t>
+            </a:r>
+            <a:r>
+              <a:rPr sz="1100" b="0" i="0">
+                <a:solidFill>
+                  <a:srgbClr val="292E3A"/>
+                </a:solidFill>
+                <a:latin typeface="Calibri"/>
+              </a:rPr>
+              <a:t>Hyndman R.J. et al. A state space framework for automatic forecasting // Int. J. Forecasting. — 2002.</a:t>
+            </a:r>
+          </a:p>
+          <a:p>
+            <a:pPr algn="l">
+              <a:lnSpc>
+                <a:spcPct val="112000"/>
+              </a:lnSpc>
+              <a:spcAft>
+                <a:spcPts val="1300"/>
+              </a:spcAft>
+            </a:pPr>
+            <a:r>
+              <a:rPr sz="1100" b="1" i="0">
+                <a:solidFill>
+                  <a:srgbClr val="C25A40"/>
+                </a:solidFill>
+                <a:latin typeface="Calibri"/>
+              </a:rPr>
+              <a:t>7.  </a:t>
+            </a:r>
+            <a:r>
+              <a:rPr sz="1100" b="0" i="0">
+                <a:solidFill>
+                  <a:srgbClr val="292E3A"/>
+                </a:solidFill>
+                <a:latin typeface="Calibri"/>
+              </a:rPr>
+              <a:t>Taylor S.J., Letham B. Forecasting at scale // The American Statistician. — 2018. — Vol. 72(1).</a:t>
+            </a:r>
+          </a:p>
+          <a:p>
+            <a:pPr algn="l">
+              <a:lnSpc>
+                <a:spcPct val="112000"/>
+              </a:lnSpc>
+              <a:spcAft>
+                <a:spcPts val="1300"/>
+              </a:spcAft>
+            </a:pPr>
+            <a:r>
+              <a:rPr sz="1100" b="1" i="0">
+                <a:solidFill>
+                  <a:srgbClr val="C25A40"/>
+                </a:solidFill>
+                <a:latin typeface="Calibri"/>
+              </a:rPr>
+              <a:t>8.  </a:t>
+            </a:r>
+            <a:r>
+              <a:rPr sz="1100" b="0" i="0">
+                <a:solidFill>
+                  <a:srgbClr val="292E3A"/>
+                </a:solidFill>
+                <a:latin typeface="Calibri"/>
+              </a:rPr>
+              <a:t>Zeng A. et al. Are Transformers Effective for Time Series Forecasting? (DLinear) // AAAI. — 2023.</a:t>
+            </a:r>
+          </a:p>
+        </p:txBody>
+      </p:sp>
+      <p:sp>
+        <p:nvSpPr>
+          <p:cNvPr id="12" name="Rectangle 11"/>
+          <p:cNvSpPr/>
+          <p:nvPr/>
+        </p:nvSpPr>
+        <p:spPr>
+          <a:xfrm>
+            <a:off x="6089904" y="1783080"/>
+            <a:ext cx="9525" cy="4114800"/>
+          </a:xfrm>
+          <a:prstGeom prst="rect">
+            <a:avLst/>
+          </a:prstGeom>
+          <a:solidFill>
+            <a:srgbClr val="D7DDEA"/>
+          </a:solidFill>
+          <a:ln>
+            <a:noFill/>
+          </a:ln>
+          <a:effectLst/>
+        </p:spPr>
+        <p:style>
+          <a:lnRef idx="1">
+            <a:schemeClr val="accent1"/>
+          </a:lnRef>
+          <a:fillRef idx="3">
+            <a:schemeClr val="accent1"/>
+          </a:fillRef>
+          <a:effectRef idx="2">
+            <a:schemeClr val="accent1"/>
+          </a:effectRef>
+          <a:fontRef idx="minor">
+            <a:schemeClr val="lt1"/>
+          </a:fontRef>
+        </p:style>
+        <p:txBody>
+          <a:bodyPr rtlCol="0" anchor="ctr"/>
+          <a:lstStyle/>
+          <a:p>
+            <a:pPr algn="ctr"/>
+          </a:p>
+        </p:txBody>
+      </p:sp>
+      <p:sp>
+        <p:nvSpPr>
+          <p:cNvPr id="13" name="TextBox 12"/>
+          <p:cNvSpPr txBox="1"/>
+          <p:nvPr/>
+        </p:nvSpPr>
+        <p:spPr>
+          <a:xfrm>
+            <a:off x="6309360" y="1691640"/>
+            <a:ext cx="5394960" cy="4480560"/>
+          </a:xfrm>
+          <a:prstGeom prst="rect">
+            <a:avLst/>
+          </a:prstGeom>
+          <a:noFill/>
+        </p:spPr>
+        <p:txBody>
+          <a:bodyPr wrap="square" anchor="t" lIns="0" rIns="0" tIns="0" bIns="0">
+            <a:spAutoFit/>
+          </a:bodyPr>
+          <a:lstStyle/>
+          <a:p>
+            <a:pPr algn="l">
+              <a:lnSpc>
+                <a:spcPct val="112000"/>
+              </a:lnSpc>
+              <a:spcAft>
+                <a:spcPts val="1300"/>
+              </a:spcAft>
+            </a:pPr>
+            <a:r>
+              <a:rPr sz="1100" b="1" i="0">
+                <a:solidFill>
+                  <a:srgbClr val="C25A40"/>
+                </a:solidFill>
+                <a:latin typeface="Calibri"/>
+              </a:rPr>
+              <a:t>9.  </a:t>
+            </a:r>
+            <a:r>
+              <a:rPr sz="1100" b="0" i="0">
+                <a:solidFill>
+                  <a:srgbClr val="292E3A"/>
+                </a:solidFill>
+                <a:latin typeface="Calibri"/>
+              </a:rPr>
+              <a:t>Oreshkin B.N. et al. N-BEATS: Neural basis expansion analysis. — arXiv:1905.10437, 2020.</a:t>
+            </a:r>
+          </a:p>
+          <a:p>
+            <a:pPr algn="l">
+              <a:lnSpc>
+                <a:spcPct val="112000"/>
+              </a:lnSpc>
+              <a:spcAft>
+                <a:spcPts val="1300"/>
+              </a:spcAft>
+            </a:pPr>
+            <a:r>
+              <a:rPr sz="1100" b="1" i="0">
+                <a:solidFill>
+                  <a:srgbClr val="C25A40"/>
+                </a:solidFill>
+                <a:latin typeface="Calibri"/>
+              </a:rPr>
+              <a:t>10.  </a:t>
+            </a:r>
+            <a:r>
+              <a:rPr sz="1100" b="0" i="0">
+                <a:solidFill>
+                  <a:srgbClr val="292E3A"/>
+                </a:solidFill>
+                <a:latin typeface="Calibri"/>
+              </a:rPr>
+              <a:t>Wu H. et al. TimesNet: Temporal 2D-Variation Modeling. — ICLR, 2023.</a:t>
+            </a:r>
+          </a:p>
+          <a:p>
+            <a:pPr algn="l">
+              <a:lnSpc>
+                <a:spcPct val="112000"/>
+              </a:lnSpc>
+              <a:spcAft>
+                <a:spcPts val="1300"/>
+              </a:spcAft>
+            </a:pPr>
+            <a:r>
+              <a:rPr sz="1100" b="1" i="0">
+                <a:solidFill>
+                  <a:srgbClr val="C25A40"/>
+                </a:solidFill>
+                <a:latin typeface="Calibri"/>
+              </a:rPr>
+              <a:t>11.  </a:t>
+            </a:r>
+            <a:r>
+              <a:rPr sz="1100" b="0" i="0">
+                <a:solidFill>
+                  <a:srgbClr val="292E3A"/>
+                </a:solidFill>
+                <a:latin typeface="Calibri"/>
+              </a:rPr>
+              <a:t>Wu H. et al. Autoformer: Decomposition Transformers with Auto-Correlation. — NeurIPS, 2021.</a:t>
+            </a:r>
+          </a:p>
+          <a:p>
+            <a:pPr algn="l">
+              <a:lnSpc>
+                <a:spcPct val="112000"/>
+              </a:lnSpc>
+              <a:spcAft>
+                <a:spcPts val="1300"/>
+              </a:spcAft>
+            </a:pPr>
+            <a:r>
+              <a:rPr sz="1100" b="1" i="0">
+                <a:solidFill>
+                  <a:srgbClr val="C25A40"/>
+                </a:solidFill>
+                <a:latin typeface="Calibri"/>
+              </a:rPr>
+              <a:t>12.  </a:t>
+            </a:r>
+            <a:r>
+              <a:rPr sz="1100" b="0" i="0">
+                <a:solidFill>
+                  <a:srgbClr val="292E3A"/>
+                </a:solidFill>
+                <a:latin typeface="Calibri"/>
+              </a:rPr>
+              <a:t>Zhou T. et al. FEDformer: Frequency Enhanced Decomposed Transformer // ICML. — 2022.</a:t>
+            </a:r>
+          </a:p>
+          <a:p>
+            <a:pPr algn="l">
+              <a:lnSpc>
+                <a:spcPct val="112000"/>
+              </a:lnSpc>
+              <a:spcAft>
+                <a:spcPts val="1300"/>
+              </a:spcAft>
+            </a:pPr>
+            <a:r>
+              <a:rPr sz="1100" b="1" i="0">
+                <a:solidFill>
+                  <a:srgbClr val="C25A40"/>
+                </a:solidFill>
+                <a:latin typeface="Calibri"/>
+              </a:rPr>
+              <a:t>13.  </a:t>
+            </a:r>
+            <a:r>
+              <a:rPr sz="1100" b="0" i="0">
+                <a:solidFill>
+                  <a:srgbClr val="292E3A"/>
+                </a:solidFill>
+                <a:latin typeface="Calibri"/>
+              </a:rPr>
+              <a:t>Nie Y. et al. A Time Series is Worth 64 Words (PatchTST). — ICLR, 2023.</a:t>
+            </a:r>
+          </a:p>
+          <a:p>
+            <a:pPr algn="l">
+              <a:lnSpc>
+                <a:spcPct val="112000"/>
+              </a:lnSpc>
+              <a:spcAft>
+                <a:spcPts val="1300"/>
+              </a:spcAft>
+            </a:pPr>
+            <a:r>
+              <a:rPr sz="1100" b="1" i="0">
+                <a:solidFill>
+                  <a:srgbClr val="C25A40"/>
+                </a:solidFill>
+                <a:latin typeface="Calibri"/>
+              </a:rPr>
+              <a:t>14.  </a:t>
+            </a:r>
+            <a:r>
+              <a:rPr sz="1100" b="0" i="0">
+                <a:solidFill>
+                  <a:srgbClr val="292E3A"/>
+                </a:solidFill>
+                <a:latin typeface="Calibri"/>
+              </a:rPr>
+              <a:t>Kehinde T.O. et al. Helformer: An Attention-Based Deep Learning Model // J. Big Data. — 2025.</a:t>
+            </a:r>
+          </a:p>
+          <a:p>
+            <a:pPr algn="l">
+              <a:lnSpc>
+                <a:spcPct val="112000"/>
+              </a:lnSpc>
+              <a:spcAft>
+                <a:spcPts val="1300"/>
+              </a:spcAft>
+            </a:pPr>
+            <a:r>
+              <a:rPr sz="1100" b="1" i="0">
+                <a:solidFill>
+                  <a:srgbClr val="C25A40"/>
+                </a:solidFill>
+                <a:latin typeface="Calibri"/>
+              </a:rPr>
+              <a:t>15.  </a:t>
+            </a:r>
+            <a:r>
+              <a:rPr sz="1100" b="0" i="0">
+                <a:solidFill>
+                  <a:srgbClr val="292E3A"/>
+                </a:solidFill>
+                <a:latin typeface="Calibri"/>
+              </a:rPr>
+              <a:t>Vaswani A. et al. Attention Is All You Need. — NeurIPS, 2017.</a:t>
+            </a:r>
+          </a:p>
+          <a:p>
+            <a:pPr algn="l">
+              <a:lnSpc>
+                <a:spcPct val="112000"/>
+              </a:lnSpc>
+              <a:spcAft>
+                <a:spcPts val="1300"/>
+              </a:spcAft>
+            </a:pPr>
+            <a:r>
+              <a:rPr sz="1100" b="1" i="0">
+                <a:solidFill>
+                  <a:srgbClr val="C25A40"/>
+                </a:solidFill>
+                <a:latin typeface="Calibri"/>
+              </a:rPr>
+              <a:t>16.  </a:t>
+            </a:r>
+            <a:r>
+              <a:rPr sz="1100" b="0" i="0">
+                <a:solidFill>
+                  <a:srgbClr val="292E3A"/>
+                </a:solidFill>
+                <a:latin typeface="Calibri"/>
+              </a:rPr>
+              <a:t>Wen Q. et al. Transformers in Time Series: A Survey // IJCAI. — 2023.</a:t>
+            </a:r>
+          </a:p>
+        </p:txBody>
+      </p:sp>
+      <p:sp>
+        <p:nvSpPr>
+          <p:cNvPr id="14" name="Rectangle 13"/>
+          <p:cNvSpPr/>
+          <p:nvPr/>
+        </p:nvSpPr>
+        <p:spPr>
+          <a:xfrm>
+            <a:off x="640080" y="5897880"/>
+            <a:ext cx="10908792" cy="566928"/>
+          </a:xfrm>
+          <a:prstGeom prst="rect">
+            <a:avLst/>
+          </a:prstGeom>
+          <a:solidFill>
+            <a:srgbClr val="EEF1F7"/>
+          </a:solidFill>
+          <a:ln>
+            <a:noFill/>
+          </a:ln>
+          <a:effectLst/>
+        </p:spPr>
+        <p:style>
+          <a:lnRef idx="1">
+            <a:schemeClr val="accent1"/>
+          </a:lnRef>
+          <a:fillRef idx="3">
+            <a:schemeClr val="accent1"/>
+          </a:fillRef>
+          <a:effectRef idx="2">
+            <a:schemeClr val="accent1"/>
+          </a:effectRef>
+          <a:fontRef idx="minor">
+            <a:schemeClr val="lt1"/>
+          </a:fontRef>
+        </p:style>
+        <p:txBody>
+          <a:bodyPr rtlCol="0" anchor="ctr"/>
+          <a:lstStyle/>
+          <a:p>
+            <a:pPr algn="ctr"/>
+          </a:p>
+        </p:txBody>
+      </p:sp>
+      <p:sp>
+        <p:nvSpPr>
+          <p:cNvPr id="15" name="Rectangle 14"/>
+          <p:cNvSpPr/>
+          <p:nvPr/>
+        </p:nvSpPr>
+        <p:spPr>
+          <a:xfrm>
+            <a:off x="640080" y="5897880"/>
+            <a:ext cx="50800" cy="566928"/>
+          </a:xfrm>
+          <a:prstGeom prst="rect">
+            <a:avLst/>
+          </a:prstGeom>
+          <a:solidFill>
+            <a:srgbClr val="E07A5F"/>
+          </a:solidFill>
+          <a:ln>
+            <a:noFill/>
+          </a:ln>
+          <a:effectLst/>
+        </p:spPr>
+        <p:style>
+          <a:lnRef idx="1">
+            <a:schemeClr val="accent1"/>
+          </a:lnRef>
+          <a:fillRef idx="3">
+            <a:schemeClr val="accent1"/>
+          </a:fillRef>
+          <a:effectRef idx="2">
+            <a:schemeClr val="accent1"/>
+          </a:effectRef>
+          <a:fontRef idx="minor">
+            <a:schemeClr val="lt1"/>
+          </a:fontRef>
+        </p:style>
+        <p:txBody>
+          <a:bodyPr rtlCol="0" anchor="ctr"/>
+          <a:lstStyle/>
+          <a:p>
+            <a:pPr algn="ctr"/>
+          </a:p>
+        </p:txBody>
+      </p:sp>
+      <p:sp>
+        <p:nvSpPr>
+          <p:cNvPr id="16" name="TextBox 15"/>
+          <p:cNvSpPr txBox="1"/>
+          <p:nvPr/>
+        </p:nvSpPr>
+        <p:spPr>
+          <a:xfrm>
+            <a:off x="914400" y="5971032"/>
+            <a:ext cx="1554480" cy="420624"/>
+          </a:xfrm>
+          <a:prstGeom prst="rect">
+            <a:avLst/>
+          </a:prstGeom>
+          <a:noFill/>
+        </p:spPr>
+        <p:txBody>
+          <a:bodyPr wrap="square" anchor="ctr" lIns="0" rIns="0" tIns="0" bIns="0">
+            <a:spAutoFit/>
+          </a:bodyPr>
+          <a:lstStyle/>
+          <a:p>
+            <a:pPr algn="l">
+              <a:lnSpc>
+                <a:spcPct val="100000"/>
+              </a:lnSpc>
+            </a:pPr>
+            <a:r>
+              <a:rPr sz="1300" b="1" i="0">
+                <a:solidFill>
+                  <a:srgbClr val="C25A40"/>
+                </a:solidFill>
+                <a:latin typeface="Calibri"/>
+              </a:rPr>
+              <a:t>ВЫВОД</a:t>
+            </a:r>
+          </a:p>
+        </p:txBody>
+      </p:sp>
+      <p:sp>
+        <p:nvSpPr>
+          <p:cNvPr id="17" name="TextBox 16"/>
+          <p:cNvSpPr txBox="1"/>
+          <p:nvPr/>
+        </p:nvSpPr>
+        <p:spPr>
+          <a:xfrm>
+            <a:off x="1965960" y="5897880"/>
+            <a:ext cx="9418320" cy="566928"/>
+          </a:xfrm>
+          <a:prstGeom prst="rect">
+            <a:avLst/>
+          </a:prstGeom>
+          <a:noFill/>
+        </p:spPr>
+        <p:txBody>
+          <a:bodyPr wrap="square" anchor="ctr" lIns="0" rIns="0" tIns="0" bIns="0">
+            <a:spAutoFit/>
+          </a:bodyPr>
+          <a:lstStyle/>
+          <a:p>
+            <a:pPr algn="l">
+              <a:lnSpc>
+                <a:spcPct val="105000"/>
+              </a:lnSpc>
+            </a:pPr>
+            <a:r>
+              <a:rPr sz="1450" b="0" i="0">
+                <a:solidFill>
+                  <a:srgbClr val="292E3A"/>
+                </a:solidFill>
+                <a:latin typeface="Calibri"/>
+              </a:rPr>
+              <a:t>Полный пронумерованный список из 49 источников по ГОСТ Р 7.0.5-2008 приведён в тексте ВКР.</a:t>
+            </a:r>
+          </a:p>
+        </p:txBody>
+      </p:sp>
+    </p:spTree>
+  </p:cSld>
+  <p:clrMapOvr>
+    <a:masterClrMapping/>
+  </p:clrMapOvr>
+</p:sld>
+</file>
+
+<file path=ppt/slides/slide16.xml><?xml version="1.0" encoding="utf-8"?>
+<p:sld xmlns:a="http://schemas.openxmlformats.org/drawingml/2006/main" xmlns:p="http://schemas.openxmlformats.org/presentationml/2006/main" xmlns:r="http://schemas.openxmlformats.org/officeDocument/2006/relationships">
+  <p:cSld>
+    <p:spTree>
+      <p:nvGrpSpPr>
+        <p:cNvPr id="1" name=""/>
+        <p:cNvGrpSpPr/>
+        <p:nvPr/>
+      </p:nvGrpSpPr>
+      <p:grpSpPr/>
+      <p:sp>
+        <p:nvSpPr>
+          <p:cNvPr id="2" name="Rectangle 1"/>
+          <p:cNvSpPr/>
+          <p:nvPr/>
+        </p:nvSpPr>
+        <p:spPr>
+          <a:xfrm>
+            <a:off x="0" y="0"/>
+            <a:ext cx="12191695" cy="6858000"/>
+          </a:xfrm>
+          <a:prstGeom prst="rect">
+            <a:avLst/>
+          </a:prstGeom>
+          <a:solidFill>
             <a:srgbClr val="1B2649"/>
           </a:solidFill>
           <a:ln>
@@ -11644,7 +12743,7 @@
                 </a:solidFill>
                 <a:latin typeface="Calibri"/>
               </a:rPr>
-              <a:t>02 / 15</a:t>
+              <a:t>02 / 16</a:t>
             </a:r>
           </a:p>
         </p:txBody>
@@ -12465,7 +13564,7 @@
                 </a:solidFill>
                 <a:latin typeface="Calibri"/>
               </a:rPr>
-              <a:t>03 / 15</a:t>
+              <a:t>03 / 16</a:t>
             </a:r>
           </a:p>
         </p:txBody>
@@ -14021,7 +15120,7 @@
                 </a:solidFill>
                 <a:latin typeface="Calibri"/>
               </a:rPr>
-              <a:t>04 / 15</a:t>
+              <a:t>04 / 16</a:t>
             </a:r>
           </a:p>
         </p:txBody>
@@ -14940,7 +16039,7 @@
                 </a:solidFill>
                 <a:latin typeface="Calibri"/>
               </a:rPr>
-              <a:t>05 / 15</a:t>
+              <a:t>05 / 16</a:t>
             </a:r>
           </a:p>
         </p:txBody>
@@ -16198,7 +17297,7 @@
                 </a:solidFill>
                 <a:latin typeface="Calibri"/>
               </a:rPr>
-              <a:t>Прямое прогнозирование: общая картина</a:t>
+              <a:t>Прямое прогнозирование: кто точнее</a:t>
             </a:r>
           </a:p>
         </p:txBody>
@@ -16237,7 +17336,7 @@
                 </a:solidFill>
                 <a:latin typeface="Calibri"/>
               </a:rPr>
-              <a:t>Раздел 3. Сравнительная позиция моделей по частотам</a:t>
+              <a:t>Раздел 3. Ранг моделей по 6 частотным категориям</a:t>
             </a:r>
           </a:p>
         </p:txBody>
@@ -16320,7 +17419,7 @@
                 </a:solidFill>
                 <a:latin typeface="Calibri"/>
               </a:rPr>
-              <a:t>06 / 15</a:t>
+              <a:t>06 / 16</a:t>
             </a:r>
           </a:p>
         </p:txBody>
@@ -16410,7 +17509,7 @@
       </p:sp>
       <p:pic>
         <p:nvPicPr>
-          <p:cNvPr id="11" name="Picture 10" descr="rank_evolution.png"/>
+          <p:cNvPr id="11" name="Picture 10" descr="heatmap_rank.png"/>
           <p:cNvPicPr>
             <a:picLocks noChangeAspect="1"/>
           </p:cNvPicPr>
@@ -16424,8 +17523,8 @@
         </p:blipFill>
         <p:spPr>
           <a:xfrm>
-            <a:off x="640080" y="1769467"/>
-            <a:ext cx="7360920" cy="3639106"/>
+            <a:off x="640080" y="1643320"/>
+            <a:ext cx="7223760" cy="3845679"/>
           </a:xfrm>
           <a:prstGeom prst="rect">
             <a:avLst/>
@@ -16440,8 +17539,8 @@
         </p:nvSpPr>
         <p:spPr>
           <a:xfrm>
-            <a:off x="8138160" y="1554480"/>
-            <a:ext cx="3410712" cy="4069080"/>
+            <a:off x="8001000" y="1554480"/>
+            <a:ext cx="3547872" cy="4023360"/>
           </a:xfrm>
           <a:prstGeom prst="rect">
             <a:avLst/>
@@ -16484,8 +17583,8 @@
         </p:nvSpPr>
         <p:spPr>
           <a:xfrm>
-            <a:off x="8138160" y="1554480"/>
-            <a:ext cx="50800" cy="4069080"/>
+            <a:off x="8001000" y="1554480"/>
+            <a:ext cx="50800" cy="4023360"/>
           </a:xfrm>
           <a:prstGeom prst="rect">
             <a:avLst/>
@@ -16528,8 +17627,8 @@
         </p:nvSpPr>
         <p:spPr>
           <a:xfrm>
-            <a:off x="8394192" y="1719072"/>
-            <a:ext cx="3044952" cy="365760"/>
+            <a:off x="8257032" y="1719072"/>
+            <a:ext cx="3182112" cy="365760"/>
           </a:xfrm>
           <a:prstGeom prst="rect">
             <a:avLst/>
@@ -16554,7 +17653,7 @@
                 </a:solidFill>
                 <a:latin typeface="Calibri"/>
               </a:rPr>
-              <a:t>Наблюдения</a:t>
+              <a:t>Как читать карту</a:t>
             </a:r>
           </a:p>
         </p:txBody>
@@ -16567,8 +17666,8 @@
         </p:nvSpPr>
         <p:spPr>
           <a:xfrm>
-            <a:off x="8394192" y="2157984"/>
-            <a:ext cx="2953512" cy="3337560"/>
+            <a:off x="8257032" y="2157984"/>
+            <a:ext cx="3090672" cy="3291840"/>
           </a:xfrm>
           <a:prstGeom prst="rect">
             <a:avLst/>
@@ -16586,7 +17685,7 @@
                 <a:spcPct val="110000"/>
               </a:lnSpc>
               <a:spcAft>
-                <a:spcPts val="1000"/>
+                <a:spcPts val="1100"/>
               </a:spcAft>
             </a:pPr>
             <a:r>
@@ -16605,7 +17704,7 @@
                 </a:solidFill>
                 <a:latin typeface="Calibri"/>
               </a:rPr>
-              <a:t>Лидерство классики. </a:t>
+              <a:t>Строка — модель, </a:t>
             </a:r>
             <a:r>
               <a:rPr sz="1350" b="0" i="0">
@@ -16614,7 +17713,7 @@
                 </a:solidFill>
                 <a:latin typeface="Calibri"/>
               </a:rPr>
-              <a:t>Auto-ARIMA, ETS, Seasonal Naive — верхние ранги на всех частотах.</a:t>
+              <a:t>столбец — частотная категория.</a:t>
             </a:r>
           </a:p>
           <a:p>
@@ -16623,7 +17722,7 @@
                 <a:spcPct val="110000"/>
               </a:lnSpc>
               <a:spcAft>
-                <a:spcPts val="1000"/>
+                <a:spcPts val="1100"/>
               </a:spcAft>
             </a:pPr>
             <a:r>
@@ -16642,7 +17741,7 @@
                 </a:solidFill>
                 <a:latin typeface="Calibri"/>
               </a:rPr>
-              <a:t>Лучшая нейросеть. </a:t>
+              <a:t>Цвет — ранг: </a:t>
             </a:r>
             <a:r>
               <a:rPr sz="1350" b="0" i="0">
@@ -16651,7 +17750,7 @@
                 </a:solidFill>
                 <a:latin typeface="Calibri"/>
               </a:rPr>
-              <a:t>TimesNet, средний ранг ≈ 4.</a:t>
+              <a:t>зелёный = лучше, красный = хуже.</a:t>
             </a:r>
           </a:p>
           <a:p>
@@ -16660,7 +17759,7 @@
                 <a:spcPct val="110000"/>
               </a:lnSpc>
               <a:spcAft>
-                <a:spcPts val="1000"/>
+                <a:spcPts val="1100"/>
               </a:spcAft>
             </a:pPr>
             <a:r>
@@ -16679,7 +17778,7 @@
                 </a:solidFill>
                 <a:latin typeface="Calibri"/>
               </a:rPr>
-              <a:t>Отставание трансформеров </a:t>
+              <a:t>Зелёная полоса вверху </a:t>
             </a:r>
             <a:r>
               <a:rPr sz="1350" b="0" i="0">
@@ -16688,7 +17787,44 @@
                 </a:solidFill>
                 <a:latin typeface="Calibri"/>
               </a:rPr>
-              <a:t>в режиме обучения на одном ряде.</a:t>
+              <a:t>— классика (Auto-ARIMA, ETS, S. Naive) стабильно в топе.</a:t>
+            </a:r>
+          </a:p>
+          <a:p>
+            <a:pPr algn="l">
+              <a:lnSpc>
+                <a:spcPct val="110000"/>
+              </a:lnSpc>
+              <a:spcAft>
+                <a:spcPts val="1100"/>
+              </a:spcAft>
+            </a:pPr>
+            <a:r>
+              <a:rPr sz="1350" b="1" i="0">
+                <a:solidFill>
+                  <a:srgbClr val="E07A5F"/>
+                </a:solidFill>
+                <a:latin typeface="Calibri"/>
+              </a:rPr>
+              <a:t>▪  </a:t>
+            </a:r>
+            <a:r>
+              <a:rPr sz="1350" b="1" i="0">
+                <a:solidFill>
+                  <a:srgbClr val="292E3A"/>
+                </a:solidFill>
+                <a:latin typeface="Calibri"/>
+              </a:rPr>
+              <a:t>TimesNet </a:t>
+            </a:r>
+            <a:r>
+              <a:rPr sz="1350" b="0" i="0">
+                <a:solidFill>
+                  <a:srgbClr val="292E3A"/>
+                </a:solidFill>
+                <a:latin typeface="Calibri"/>
+              </a:rPr>
+              <a:t>— единственная нейросеть рядом с лидерами.</a:t>
             </a:r>
           </a:p>
         </p:txBody>
@@ -16854,7 +17990,7 @@
                 </a:solidFill>
                 <a:latin typeface="Calibri"/>
               </a:rPr>
-              <a:t>В режиме обучения на одном ряде классические модели сохраняют лидерство, однако разрыв убывает с ростом длины ряда.</a:t>
+              <a:t>В режиме обучения на одном ряде классика устойчиво лидирует во всех категориях; среди нейросетей выделяется только TimesNet.</a:t>
             </a:r>
           </a:p>
         </p:txBody>
@@ -17165,7 +18301,7 @@
                 </a:solidFill>
                 <a:latin typeface="Calibri"/>
               </a:rPr>
-              <a:t>07 / 15</a:t>
+              <a:t>07 / 16</a:t>
             </a:r>
           </a:p>
         </p:txBody>
@@ -18010,7 +19146,7 @@
                 </a:solidFill>
                 <a:latin typeface="Calibri"/>
               </a:rPr>
-              <a:t>08 / 15</a:t>
+              <a:t>08 / 16</a:t>
             </a:r>
           </a:p>
         </p:txBody>
@@ -18955,7 +20091,7 @@
                 </a:solidFill>
                 <a:latin typeface="Calibri"/>
               </a:rPr>
-              <a:t>09 / 15</a:t>
+              <a:t>09 / 16</a:t>
             </a:r>
           </a:p>
         </p:txBody>
